--- a/IPCMS_v2.pptx
+++ b/IPCMS_v2.pptx
@@ -18,6 +18,16 @@
     <p:sldId id="266" r:id="rId17"/>
     <p:sldId id="267" r:id="rId18"/>
     <p:sldId id="268" r:id="rId19"/>
+    <p:sldId id="270" r:id="rId21"/>
+    <p:sldId id="271" r:id="rId22"/>
+    <p:sldId id="272" r:id="rId23"/>
+    <p:sldId id="273" r:id="rId24"/>
+    <p:sldId id="274" r:id="rId25"/>
+    <p:sldId id="275" r:id="rId26"/>
+    <p:sldId id="276" r:id="rId27"/>
+    <p:sldId id="277" r:id="rId28"/>
+    <p:sldId id="278" r:id="rId29"/>
+    <p:sldId id="279" r:id="rId30"/>
     <p:sldId id="269" r:id="rId20"/>
   </p:sldIdLst>
   <p:sldSz cx="12191695" cy="6858000" type="screen4x3"/>
@@ -5722,7 +5732,7 @@
                 </a:solidFill>
                 <a:latin typeface="Calibri"/>
               </a:rPr>
-              <a:t>1 / 14</a:t>
+              <a:t>1 / 24</a:t>
             </a:r>
           </a:p>
         </p:txBody>
@@ -6927,7 +6937,7 @@
                 </a:solidFill>
                 <a:latin typeface="Calibri"/>
               </a:rPr>
-              <a:t>10 / 14</a:t>
+              <a:t>10 / 24</a:t>
             </a:r>
           </a:p>
         </p:txBody>
@@ -9815,7 +9825,7 @@
                 </a:solidFill>
                 <a:latin typeface="Calibri"/>
               </a:rPr>
-              <a:t>11 / 14</a:t>
+              <a:t>11 / 24</a:t>
             </a:r>
           </a:p>
         </p:txBody>
@@ -11461,7 +11471,7 @@
                 </a:solidFill>
                 <a:latin typeface="Calibri"/>
               </a:rPr>
-              <a:t>12 / 14</a:t>
+              <a:t>12 / 24</a:t>
             </a:r>
           </a:p>
         </p:txBody>
@@ -12861,7 +12871,7 @@
                 </a:solidFill>
                 <a:latin typeface="Calibri"/>
               </a:rPr>
-              <a:t>13 / 14</a:t>
+              <a:t>13 / 24</a:t>
             </a:r>
           </a:p>
         </p:txBody>
@@ -12892,14 +12902,420 @@
         </p:nvSpPr>
         <p:spPr>
           <a:xfrm>
-            <a:off x="0" y="0"/>
-            <a:ext cx="12191695" cy="6858000"/>
+            <a:off x="502920" y="502920"/>
+            <a:ext cx="109728" cy="502920"/>
           </a:xfrm>
           <a:prstGeom prst="rect">
             <a:avLst/>
           </a:prstGeom>
           <a:solidFill>
-            <a:srgbClr val="FBFCFD"/>
+            <a:srgbClr val="14B8A6"/>
+          </a:solidFill>
+          <a:ln>
+            <a:noFill/>
+          </a:ln>
+        </p:spPr>
+        <p:style>
+          <a:lnRef idx="1">
+            <a:schemeClr val="accent1"/>
+          </a:lnRef>
+          <a:fillRef idx="3">
+            <a:schemeClr val="accent1"/>
+          </a:fillRef>
+          <a:effectRef idx="2">
+            <a:schemeClr val="accent1"/>
+          </a:effectRef>
+          <a:fontRef idx="minor">
+            <a:schemeClr val="lt1"/>
+          </a:fontRef>
+        </p:style>
+        <p:txBody>
+          <a:bodyPr rtlCol="0" anchor="ctr"/>
+          <a:lstStyle/>
+          <a:p>
+            <a:pPr algn="ctr"/>
+          </a:p>
+        </p:txBody>
+      </p:sp>
+      <p:sp>
+        <p:nvSpPr>
+          <p:cNvPr id="3" name="TextBox 2"/>
+          <p:cNvSpPr txBox="1"/>
+          <p:nvPr/>
+        </p:nvSpPr>
+        <p:spPr>
+          <a:xfrm>
+            <a:off x="713232" y="457200"/>
+            <a:ext cx="10972800" cy="256032"/>
+          </a:xfrm>
+          <a:prstGeom prst="rect">
+            <a:avLst/>
+          </a:prstGeom>
+          <a:noFill/>
+        </p:spPr>
+        <p:txBody>
+          <a:bodyPr wrap="none">
+            <a:spAutoFit/>
+          </a:bodyPr>
+          <a:lstStyle/>
+          <a:p>
+            <a:r>
+              <a:rPr sz="1000" b="1">
+                <a:solidFill>
+                  <a:srgbClr val="14B8A6"/>
+                </a:solidFill>
+                <a:latin typeface="Calibri"/>
+              </a:rPr>
+              <a:t>SECTION 12</a:t>
+            </a:r>
+          </a:p>
+        </p:txBody>
+      </p:sp>
+      <p:sp>
+        <p:nvSpPr>
+          <p:cNvPr id="4" name="TextBox 3"/>
+          <p:cNvSpPr txBox="1"/>
+          <p:nvPr/>
+        </p:nvSpPr>
+        <p:spPr>
+          <a:xfrm>
+            <a:off x="713232" y="713232"/>
+            <a:ext cx="11155680" cy="502920"/>
+          </a:xfrm>
+          <a:prstGeom prst="rect">
+            <a:avLst/>
+          </a:prstGeom>
+          <a:noFill/>
+        </p:spPr>
+        <p:txBody>
+          <a:bodyPr wrap="none">
+            <a:spAutoFit/>
+          </a:bodyPr>
+          <a:lstStyle/>
+          <a:p>
+            <a:r>
+              <a:rPr sz="2600" b="1">
+                <a:solidFill>
+                  <a:srgbClr val="0F172A"/>
+                </a:solidFill>
+                <a:latin typeface="Calibri"/>
+              </a:rPr>
+              <a:t>Problem statements &amp; solutions</a:t>
+            </a:r>
+          </a:p>
+        </p:txBody>
+      </p:sp>
+      <p:sp>
+        <p:nvSpPr>
+          <p:cNvPr id="5" name="TextBox 4"/>
+          <p:cNvSpPr txBox="1"/>
+          <p:nvPr/>
+        </p:nvSpPr>
+        <p:spPr>
+          <a:xfrm>
+            <a:off x="713232" y="1234440"/>
+            <a:ext cx="11155680" cy="365760"/>
+          </a:xfrm>
+          <a:prstGeom prst="rect">
+            <a:avLst/>
+          </a:prstGeom>
+          <a:noFill/>
+        </p:spPr>
+        <p:txBody>
+          <a:bodyPr wrap="none">
+            <a:spAutoFit/>
+          </a:bodyPr>
+          <a:lstStyle/>
+          <a:p>
+            <a:r>
+              <a:rPr sz="1200">
+                <a:solidFill>
+                  <a:srgbClr val="64748B"/>
+                </a:solidFill>
+                <a:latin typeface="Calibri"/>
+              </a:rPr>
+              <a:t>What real-world gaps the project closes — and exactly how the build answers each one.</a:t>
+            </a:r>
+          </a:p>
+        </p:txBody>
+      </p:sp>
+      <p:cxnSp>
+        <p:nvCxnSpPr>
+          <p:cNvPr id="6" name="Connector 5"/>
+          <p:cNvCxnSpPr/>
+          <p:nvPr/>
+        </p:nvCxnSpPr>
+        <p:spPr>
+          <a:xfrm>
+            <a:off x="713232" y="1627632"/>
+            <a:ext cx="10808208" cy="0"/>
+          </a:xfrm>
+          <a:prstGeom prst="line">
+            <a:avLst/>
+          </a:prstGeom>
+          <a:ln w="9525">
+            <a:solidFill>
+              <a:srgbClr val="E2E8F0"/>
+            </a:solidFill>
+          </a:ln>
+        </p:spPr>
+        <p:style>
+          <a:lnRef idx="2">
+            <a:schemeClr val="accent1"/>
+          </a:lnRef>
+          <a:fillRef idx="0">
+            <a:schemeClr val="accent1"/>
+          </a:fillRef>
+          <a:effectRef idx="1">
+            <a:schemeClr val="accent1"/>
+          </a:effectRef>
+          <a:fontRef idx="minor">
+            <a:schemeClr val="tx1"/>
+          </a:fontRef>
+        </p:style>
+      </p:cxnSp>
+      <p:sp>
+        <p:nvSpPr>
+          <p:cNvPr id="7" name="Rectangle 6"/>
+          <p:cNvSpPr/>
+          <p:nvPr/>
+        </p:nvSpPr>
+        <p:spPr>
+          <a:xfrm>
+            <a:off x="0" y="6565392"/>
+            <a:ext cx="12191695" cy="292608"/>
+          </a:xfrm>
+          <a:prstGeom prst="rect">
+            <a:avLst/>
+          </a:prstGeom>
+          <a:solidFill>
+            <a:srgbClr val="F8FAFC"/>
+          </a:solidFill>
+          <a:ln>
+            <a:noFill/>
+          </a:ln>
+        </p:spPr>
+        <p:style>
+          <a:lnRef idx="1">
+            <a:schemeClr val="accent1"/>
+          </a:lnRef>
+          <a:fillRef idx="3">
+            <a:schemeClr val="accent1"/>
+          </a:fillRef>
+          <a:effectRef idx="2">
+            <a:schemeClr val="accent1"/>
+          </a:effectRef>
+          <a:fontRef idx="minor">
+            <a:schemeClr val="lt1"/>
+          </a:fontRef>
+        </p:style>
+        <p:txBody>
+          <a:bodyPr rtlCol="0" anchor="ctr"/>
+          <a:lstStyle/>
+          <a:p>
+            <a:pPr algn="ctr"/>
+          </a:p>
+        </p:txBody>
+      </p:sp>
+      <p:sp>
+        <p:nvSpPr>
+          <p:cNvPr id="8" name="TextBox 7"/>
+          <p:cNvSpPr txBox="1"/>
+          <p:nvPr/>
+        </p:nvSpPr>
+        <p:spPr>
+          <a:xfrm>
+            <a:off x="365760" y="6601968"/>
+            <a:ext cx="8229600" cy="228600"/>
+          </a:xfrm>
+          <a:prstGeom prst="rect">
+            <a:avLst/>
+          </a:prstGeom>
+          <a:noFill/>
+        </p:spPr>
+        <p:txBody>
+          <a:bodyPr wrap="none">
+            <a:spAutoFit/>
+          </a:bodyPr>
+          <a:lstStyle/>
+          <a:p>
+            <a:r>
+              <a:rPr sz="900">
+                <a:solidFill>
+                  <a:srgbClr val="64748B"/>
+                </a:solidFill>
+                <a:latin typeface="Calibri"/>
+              </a:rPr>
+              <a:t>IPCMS — Integrated Patient Care Management System</a:t>
+            </a:r>
+          </a:p>
+        </p:txBody>
+      </p:sp>
+      <p:sp>
+        <p:nvSpPr>
+          <p:cNvPr id="9" name="TextBox 8"/>
+          <p:cNvSpPr txBox="1"/>
+          <p:nvPr/>
+        </p:nvSpPr>
+        <p:spPr>
+          <a:xfrm>
+            <a:off x="10607040" y="6601968"/>
+            <a:ext cx="1280160" cy="228600"/>
+          </a:xfrm>
+          <a:prstGeom prst="rect">
+            <a:avLst/>
+          </a:prstGeom>
+          <a:noFill/>
+        </p:spPr>
+        <p:txBody>
+          <a:bodyPr wrap="none">
+            <a:spAutoFit/>
+          </a:bodyPr>
+          <a:lstStyle/>
+          <a:p>
+            <a:pPr algn="r"/>
+            <a:r>
+              <a:rPr sz="900">
+                <a:solidFill>
+                  <a:srgbClr val="64748B"/>
+                </a:solidFill>
+                <a:latin typeface="Calibri"/>
+              </a:rPr>
+              <a:t>15 / 24</a:t>
+            </a:r>
+          </a:p>
+        </p:txBody>
+      </p:sp>
+      <p:sp>
+        <p:nvSpPr>
+          <p:cNvPr id="10" name="TextBox 9"/>
+          <p:cNvSpPr txBox="1"/>
+          <p:nvPr/>
+        </p:nvSpPr>
+        <p:spPr>
+          <a:xfrm>
+            <a:off x="502920" y="1783080"/>
+            <a:ext cx="5486400" cy="320040"/>
+          </a:xfrm>
+          <a:prstGeom prst="rect">
+            <a:avLst/>
+          </a:prstGeom>
+          <a:noFill/>
+        </p:spPr>
+        <p:txBody>
+          <a:bodyPr wrap="square">
+            <a:spAutoFit/>
+          </a:bodyPr>
+          <a:lstStyle/>
+          <a:p>
+            <a:r>
+              <a:rPr sz="1100" b="1">
+                <a:solidFill>
+                  <a:srgbClr val="0E4F8A"/>
+                </a:solidFill>
+                <a:latin typeface="Calibri"/>
+              </a:rPr>
+              <a:t>PROBLEM</a:t>
+            </a:r>
+          </a:p>
+        </p:txBody>
+      </p:sp>
+      <p:sp>
+        <p:nvSpPr>
+          <p:cNvPr id="11" name="TextBox 10"/>
+          <p:cNvSpPr txBox="1"/>
+          <p:nvPr/>
+        </p:nvSpPr>
+        <p:spPr>
+          <a:xfrm>
+            <a:off x="6355080" y="1783080"/>
+            <a:ext cx="5486400" cy="320040"/>
+          </a:xfrm>
+          <a:prstGeom prst="rect">
+            <a:avLst/>
+          </a:prstGeom>
+          <a:noFill/>
+        </p:spPr>
+        <p:txBody>
+          <a:bodyPr wrap="square">
+            <a:spAutoFit/>
+          </a:bodyPr>
+          <a:lstStyle/>
+          <a:p>
+            <a:r>
+              <a:rPr sz="1100" b="1">
+                <a:solidFill>
+                  <a:srgbClr val="0E4F8A"/>
+                </a:solidFill>
+                <a:latin typeface="Calibri"/>
+              </a:rPr>
+              <a:t>OUR SOLUTION</a:t>
+            </a:r>
+          </a:p>
+        </p:txBody>
+      </p:sp>
+      <p:sp>
+        <p:nvSpPr>
+          <p:cNvPr id="12" name="Rounded Rectangle 11"/>
+          <p:cNvSpPr/>
+          <p:nvPr/>
+        </p:nvSpPr>
+        <p:spPr>
+          <a:xfrm>
+            <a:off x="502920" y="2148840"/>
+            <a:ext cx="5486400" cy="960120"/>
+          </a:xfrm>
+          <a:prstGeom prst="roundRect">
+            <a:avLst/>
+          </a:prstGeom>
+          <a:solidFill>
+            <a:srgbClr val="FEF3F2"/>
+          </a:solidFill>
+          <a:ln w="9525">
+            <a:solidFill>
+              <a:srgbClr val="F1C0B8"/>
+            </a:solidFill>
+          </a:ln>
+          <a:effectLst/>
+        </p:spPr>
+        <p:style>
+          <a:lnRef idx="1">
+            <a:schemeClr val="accent1"/>
+          </a:lnRef>
+          <a:fillRef idx="3">
+            <a:schemeClr val="accent1"/>
+          </a:fillRef>
+          <a:effectRef idx="2">
+            <a:schemeClr val="accent1"/>
+          </a:effectRef>
+          <a:fontRef idx="minor">
+            <a:schemeClr val="lt1"/>
+          </a:fontRef>
+        </p:style>
+        <p:txBody>
+          <a:bodyPr rtlCol="0" anchor="ctr"/>
+          <a:lstStyle/>
+          <a:p>
+            <a:pPr algn="ctr"/>
+          </a:p>
+        </p:txBody>
+      </p:sp>
+      <p:sp>
+        <p:nvSpPr>
+          <p:cNvPr id="13" name="Rounded Rectangle 12"/>
+          <p:cNvSpPr/>
+          <p:nvPr/>
+        </p:nvSpPr>
+        <p:spPr>
+          <a:xfrm>
+            <a:off x="640080" y="2313432"/>
+            <a:ext cx="502920" cy="502920"/>
+          </a:xfrm>
+          <a:prstGeom prst="roundRect">
+            <a:avLst/>
+          </a:prstGeom>
+          <a:solidFill>
+            <a:srgbClr val="14B8A6"/>
           </a:solidFill>
           <a:ln>
             <a:noFill/>
@@ -12921,6 +13337,129 @@
           </a:fontRef>
         </p:style>
         <p:txBody>
+          <a:bodyPr rtlCol="0" anchor="ctr" lIns="0" rIns="0" tIns="0" bIns="0" wrap="none"/>
+          <a:lstStyle/>
+          <a:p>
+            <a:pPr algn="ctr"/>
+            <a:r>
+              <a:rPr sz="1300" b="1">
+                <a:solidFill>
+                  <a:srgbClr val="FFFFFF"/>
+                </a:solidFill>
+                <a:latin typeface="Calibri"/>
+              </a:rPr>
+              <a:t>P1</a:t>
+            </a:r>
+          </a:p>
+        </p:txBody>
+      </p:sp>
+      <p:sp>
+        <p:nvSpPr>
+          <p:cNvPr id="14" name="TextBox 13"/>
+          <p:cNvSpPr txBox="1"/>
+          <p:nvPr/>
+        </p:nvSpPr>
+        <p:spPr>
+          <a:xfrm>
+            <a:off x="1280160" y="2258568"/>
+            <a:ext cx="4663440" cy="320040"/>
+          </a:xfrm>
+          <a:prstGeom prst="rect">
+            <a:avLst/>
+          </a:prstGeom>
+          <a:noFill/>
+        </p:spPr>
+        <p:txBody>
+          <a:bodyPr wrap="square">
+            <a:spAutoFit/>
+          </a:bodyPr>
+          <a:lstStyle/>
+          <a:p>
+            <a:r>
+              <a:rPr sz="1200" b="1">
+                <a:solidFill>
+                  <a:srgbClr val="0F172A"/>
+                </a:solidFill>
+                <a:latin typeface="Calibri"/>
+              </a:rPr>
+              <a:t>Fragmented patient records</a:t>
+            </a:r>
+          </a:p>
+        </p:txBody>
+      </p:sp>
+      <p:sp>
+        <p:nvSpPr>
+          <p:cNvPr id="15" name="TextBox 14"/>
+          <p:cNvSpPr txBox="1"/>
+          <p:nvPr/>
+        </p:nvSpPr>
+        <p:spPr>
+          <a:xfrm>
+            <a:off x="1280160" y="2587752"/>
+            <a:ext cx="4663440" cy="548640"/>
+          </a:xfrm>
+          <a:prstGeom prst="rect">
+            <a:avLst/>
+          </a:prstGeom>
+          <a:noFill/>
+        </p:spPr>
+        <p:txBody>
+          <a:bodyPr wrap="square">
+            <a:spAutoFit/>
+          </a:bodyPr>
+          <a:lstStyle/>
+          <a:p>
+            <a:r>
+              <a:rPr sz="1000" b="0">
+                <a:solidFill>
+                  <a:srgbClr val="334E68"/>
+                </a:solidFill>
+                <a:latin typeface="Calibri"/>
+              </a:rPr>
+              <a:t>Different doctors store notes in different places — history is hard to retrieve, harder to share.</a:t>
+            </a:r>
+          </a:p>
+        </p:txBody>
+      </p:sp>
+      <p:sp>
+        <p:nvSpPr>
+          <p:cNvPr id="16" name="Rounded Rectangle 15"/>
+          <p:cNvSpPr/>
+          <p:nvPr/>
+        </p:nvSpPr>
+        <p:spPr>
+          <a:xfrm>
+            <a:off x="6355080" y="2148840"/>
+            <a:ext cx="5486400" cy="960120"/>
+          </a:xfrm>
+          <a:prstGeom prst="roundRect">
+            <a:avLst/>
+          </a:prstGeom>
+          <a:solidFill>
+            <a:srgbClr val="ECFDF5"/>
+          </a:solidFill>
+          <a:ln w="9525">
+            <a:solidFill>
+              <a:srgbClr val="99E8D2"/>
+            </a:solidFill>
+          </a:ln>
+          <a:effectLst/>
+        </p:spPr>
+        <p:style>
+          <a:lnRef idx="1">
+            <a:schemeClr val="accent1"/>
+          </a:lnRef>
+          <a:fillRef idx="3">
+            <a:schemeClr val="accent1"/>
+          </a:fillRef>
+          <a:effectRef idx="2">
+            <a:schemeClr val="accent1"/>
+          </a:effectRef>
+          <a:fontRef idx="minor">
+            <a:schemeClr val="lt1"/>
+          </a:fontRef>
+        </p:style>
+        <p:txBody>
           <a:bodyPr rtlCol="0" anchor="ctr"/>
           <a:lstStyle/>
           <a:p>
@@ -12930,16 +13469,16 @@
       </p:sp>
       <p:sp>
         <p:nvSpPr>
-          <p:cNvPr id="3" name="Rectangle 2"/>
+          <p:cNvPr id="17" name="Rounded Rectangle 16"/>
           <p:cNvSpPr/>
           <p:nvPr/>
         </p:nvSpPr>
         <p:spPr>
           <a:xfrm>
-            <a:off x="0" y="0"/>
-            <a:ext cx="12191695" cy="3200400"/>
-          </a:xfrm>
-          <a:prstGeom prst="rect">
+            <a:off x="6492240" y="2313432"/>
+            <a:ext cx="502920" cy="502920"/>
+          </a:xfrm>
+          <a:prstGeom prst="roundRect">
             <a:avLst/>
           </a:prstGeom>
           <a:solidFill>
@@ -12965,6 +13504,129 @@
           </a:fontRef>
         </p:style>
         <p:txBody>
+          <a:bodyPr rtlCol="0" anchor="ctr" lIns="0" rIns="0" tIns="0" bIns="0" wrap="none"/>
+          <a:lstStyle/>
+          <a:p>
+            <a:pPr algn="ctr"/>
+            <a:r>
+              <a:rPr sz="1300" b="1">
+                <a:solidFill>
+                  <a:srgbClr val="FFFFFF"/>
+                </a:solidFill>
+                <a:latin typeface="Calibri"/>
+              </a:rPr>
+              <a:t>S1</a:t>
+            </a:r>
+          </a:p>
+        </p:txBody>
+      </p:sp>
+      <p:sp>
+        <p:nvSpPr>
+          <p:cNvPr id="18" name="TextBox 17"/>
+          <p:cNvSpPr txBox="1"/>
+          <p:nvPr/>
+        </p:nvSpPr>
+        <p:spPr>
+          <a:xfrm>
+            <a:off x="7132320" y="2258568"/>
+            <a:ext cx="4572000" cy="320040"/>
+          </a:xfrm>
+          <a:prstGeom prst="rect">
+            <a:avLst/>
+          </a:prstGeom>
+          <a:noFill/>
+        </p:spPr>
+        <p:txBody>
+          <a:bodyPr wrap="square">
+            <a:spAutoFit/>
+          </a:bodyPr>
+          <a:lstStyle/>
+          <a:p>
+            <a:r>
+              <a:rPr sz="1200" b="1">
+                <a:solidFill>
+                  <a:srgbClr val="0F172A"/>
+                </a:solidFill>
+                <a:latin typeface="Calibri"/>
+              </a:rPr>
+              <a:t>Fix for: Fragmented patient records</a:t>
+            </a:r>
+          </a:p>
+        </p:txBody>
+      </p:sp>
+      <p:sp>
+        <p:nvSpPr>
+          <p:cNvPr id="19" name="TextBox 18"/>
+          <p:cNvSpPr txBox="1"/>
+          <p:nvPr/>
+        </p:nvSpPr>
+        <p:spPr>
+          <a:xfrm>
+            <a:off x="7132320" y="2587752"/>
+            <a:ext cx="4572000" cy="548640"/>
+          </a:xfrm>
+          <a:prstGeom prst="rect">
+            <a:avLst/>
+          </a:prstGeom>
+          <a:noFill/>
+        </p:spPr>
+        <p:txBody>
+          <a:bodyPr wrap="square">
+            <a:spAutoFit/>
+          </a:bodyPr>
+          <a:lstStyle/>
+          <a:p>
+            <a:r>
+              <a:rPr sz="1000" b="0">
+                <a:solidFill>
+                  <a:srgbClr val="334E68"/>
+                </a:solidFill>
+                <a:latin typeface="Calibri"/>
+              </a:rPr>
+              <a:t>Single MySQL schema with role-aware views. Patients, doctors and admins all read the same tables, so history, visits and prescriptions live in one place.</a:t>
+            </a:r>
+          </a:p>
+        </p:txBody>
+      </p:sp>
+      <p:sp>
+        <p:nvSpPr>
+          <p:cNvPr id="20" name="Rounded Rectangle 19"/>
+          <p:cNvSpPr/>
+          <p:nvPr/>
+        </p:nvSpPr>
+        <p:spPr>
+          <a:xfrm>
+            <a:off x="502920" y="3172968"/>
+            <a:ext cx="5486400" cy="960120"/>
+          </a:xfrm>
+          <a:prstGeom prst="roundRect">
+            <a:avLst/>
+          </a:prstGeom>
+          <a:solidFill>
+            <a:srgbClr val="FEF3F2"/>
+          </a:solidFill>
+          <a:ln w="9525">
+            <a:solidFill>
+              <a:srgbClr val="F1C0B8"/>
+            </a:solidFill>
+          </a:ln>
+          <a:effectLst/>
+        </p:spPr>
+        <p:style>
+          <a:lnRef idx="1">
+            <a:schemeClr val="accent1"/>
+          </a:lnRef>
+          <a:fillRef idx="3">
+            <a:schemeClr val="accent1"/>
+          </a:fillRef>
+          <a:effectRef idx="2">
+            <a:schemeClr val="accent1"/>
+          </a:effectRef>
+          <a:fontRef idx="minor">
+            <a:schemeClr val="lt1"/>
+          </a:fontRef>
+        </p:style>
+        <p:txBody>
           <a:bodyPr rtlCol="0" anchor="ctr"/>
           <a:lstStyle/>
           <a:p>
@@ -12974,16 +13636,16 @@
       </p:sp>
       <p:sp>
         <p:nvSpPr>
-          <p:cNvPr id="4" name="Rectangle 3"/>
+          <p:cNvPr id="21" name="Rounded Rectangle 20"/>
           <p:cNvSpPr/>
           <p:nvPr/>
         </p:nvSpPr>
         <p:spPr>
           <a:xfrm>
-            <a:off x="0" y="3200400"/>
-            <a:ext cx="12191695" cy="54864"/>
-          </a:xfrm>
-          <a:prstGeom prst="rect">
+            <a:off x="640080" y="3337560"/>
+            <a:ext cx="502920" cy="502920"/>
+          </a:xfrm>
+          <a:prstGeom prst="roundRect">
             <a:avLst/>
           </a:prstGeom>
           <a:solidFill>
@@ -13009,6 +13671,129 @@
           </a:fontRef>
         </p:style>
         <p:txBody>
+          <a:bodyPr rtlCol="0" anchor="ctr" lIns="0" rIns="0" tIns="0" bIns="0" wrap="none"/>
+          <a:lstStyle/>
+          <a:p>
+            <a:pPr algn="ctr"/>
+            <a:r>
+              <a:rPr sz="1300" b="1">
+                <a:solidFill>
+                  <a:srgbClr val="FFFFFF"/>
+                </a:solidFill>
+                <a:latin typeface="Calibri"/>
+              </a:rPr>
+              <a:t>P2</a:t>
+            </a:r>
+          </a:p>
+        </p:txBody>
+      </p:sp>
+      <p:sp>
+        <p:nvSpPr>
+          <p:cNvPr id="22" name="TextBox 21"/>
+          <p:cNvSpPr txBox="1"/>
+          <p:nvPr/>
+        </p:nvSpPr>
+        <p:spPr>
+          <a:xfrm>
+            <a:off x="1280160" y="3282696"/>
+            <a:ext cx="4663440" cy="320040"/>
+          </a:xfrm>
+          <a:prstGeom prst="rect">
+            <a:avLst/>
+          </a:prstGeom>
+          <a:noFill/>
+        </p:spPr>
+        <p:txBody>
+          <a:bodyPr wrap="square">
+            <a:spAutoFit/>
+          </a:bodyPr>
+          <a:lstStyle/>
+          <a:p>
+            <a:r>
+              <a:rPr sz="1200" b="1">
+                <a:solidFill>
+                  <a:srgbClr val="0F172A"/>
+                </a:solidFill>
+                <a:latin typeface="Calibri"/>
+              </a:rPr>
+              <a:t>Manual appointment routing</a:t>
+            </a:r>
+          </a:p>
+        </p:txBody>
+      </p:sp>
+      <p:sp>
+        <p:nvSpPr>
+          <p:cNvPr id="23" name="TextBox 22"/>
+          <p:cNvSpPr txBox="1"/>
+          <p:nvPr/>
+        </p:nvSpPr>
+        <p:spPr>
+          <a:xfrm>
+            <a:off x="1280160" y="3611880"/>
+            <a:ext cx="4663440" cy="548640"/>
+          </a:xfrm>
+          <a:prstGeom prst="rect">
+            <a:avLst/>
+          </a:prstGeom>
+          <a:noFill/>
+        </p:spPr>
+        <p:txBody>
+          <a:bodyPr wrap="square">
+            <a:spAutoFit/>
+          </a:bodyPr>
+          <a:lstStyle/>
+          <a:p>
+            <a:r>
+              <a:rPr sz="1000" b="0">
+                <a:solidFill>
+                  <a:srgbClr val="334E68"/>
+                </a:solidFill>
+                <a:latin typeface="Calibri"/>
+              </a:rPr>
+              <a:t>Reception reads forms and assigns slots by hand — slow, error-prone, no self-service.</a:t>
+            </a:r>
+          </a:p>
+        </p:txBody>
+      </p:sp>
+      <p:sp>
+        <p:nvSpPr>
+          <p:cNvPr id="24" name="Rounded Rectangle 23"/>
+          <p:cNvSpPr/>
+          <p:nvPr/>
+        </p:nvSpPr>
+        <p:spPr>
+          <a:xfrm>
+            <a:off x="6355080" y="3172968"/>
+            <a:ext cx="5486400" cy="960120"/>
+          </a:xfrm>
+          <a:prstGeom prst="roundRect">
+            <a:avLst/>
+          </a:prstGeom>
+          <a:solidFill>
+            <a:srgbClr val="ECFDF5"/>
+          </a:solidFill>
+          <a:ln w="9525">
+            <a:solidFill>
+              <a:srgbClr val="99E8D2"/>
+            </a:solidFill>
+          </a:ln>
+          <a:effectLst/>
+        </p:spPr>
+        <p:style>
+          <a:lnRef idx="1">
+            <a:schemeClr val="accent1"/>
+          </a:lnRef>
+          <a:fillRef idx="3">
+            <a:schemeClr val="accent1"/>
+          </a:fillRef>
+          <a:effectRef idx="2">
+            <a:schemeClr val="accent1"/>
+          </a:effectRef>
+          <a:fontRef idx="minor">
+            <a:schemeClr val="lt1"/>
+          </a:fontRef>
+        </p:style>
+        <p:txBody>
           <a:bodyPr rtlCol="0" anchor="ctr"/>
           <a:lstStyle/>
           <a:p>
@@ -13018,20 +13803,20 @@
       </p:sp>
       <p:sp>
         <p:nvSpPr>
-          <p:cNvPr id="5" name="Oval 4"/>
+          <p:cNvPr id="25" name="Rounded Rectangle 24"/>
           <p:cNvSpPr/>
           <p:nvPr/>
         </p:nvSpPr>
         <p:spPr>
           <a:xfrm>
-            <a:off x="9601200" y="-1371600"/>
-            <a:ext cx="3200400" cy="3200400"/>
-          </a:xfrm>
-          <a:prstGeom prst="ellipse">
+            <a:off x="6492240" y="3337560"/>
+            <a:ext cx="502920" cy="502920"/>
+          </a:xfrm>
+          <a:prstGeom prst="roundRect">
             <a:avLst/>
           </a:prstGeom>
           <a:solidFill>
-            <a:srgbClr val="066FA8"/>
+            <a:srgbClr val="0E4F8A"/>
           </a:solidFill>
           <a:ln>
             <a:noFill/>
@@ -13053,6 +13838,129 @@
           </a:fontRef>
         </p:style>
         <p:txBody>
+          <a:bodyPr rtlCol="0" anchor="ctr" lIns="0" rIns="0" tIns="0" bIns="0" wrap="none"/>
+          <a:lstStyle/>
+          <a:p>
+            <a:pPr algn="ctr"/>
+            <a:r>
+              <a:rPr sz="1300" b="1">
+                <a:solidFill>
+                  <a:srgbClr val="FFFFFF"/>
+                </a:solidFill>
+                <a:latin typeface="Calibri"/>
+              </a:rPr>
+              <a:t>S2</a:t>
+            </a:r>
+          </a:p>
+        </p:txBody>
+      </p:sp>
+      <p:sp>
+        <p:nvSpPr>
+          <p:cNvPr id="26" name="TextBox 25"/>
+          <p:cNvSpPr txBox="1"/>
+          <p:nvPr/>
+        </p:nvSpPr>
+        <p:spPr>
+          <a:xfrm>
+            <a:off x="7132320" y="3282696"/>
+            <a:ext cx="4572000" cy="320040"/>
+          </a:xfrm>
+          <a:prstGeom prst="rect">
+            <a:avLst/>
+          </a:prstGeom>
+          <a:noFill/>
+        </p:spPr>
+        <p:txBody>
+          <a:bodyPr wrap="square">
+            <a:spAutoFit/>
+          </a:bodyPr>
+          <a:lstStyle/>
+          <a:p>
+            <a:r>
+              <a:rPr sz="1200" b="1">
+                <a:solidFill>
+                  <a:srgbClr val="0F172A"/>
+                </a:solidFill>
+                <a:latin typeface="Calibri"/>
+              </a:rPr>
+              <a:t>Fix for: Manual appointment routing</a:t>
+            </a:r>
+          </a:p>
+        </p:txBody>
+      </p:sp>
+      <p:sp>
+        <p:nvSpPr>
+          <p:cNvPr id="27" name="TextBox 26"/>
+          <p:cNvSpPr txBox="1"/>
+          <p:nvPr/>
+        </p:nvSpPr>
+        <p:spPr>
+          <a:xfrm>
+            <a:off x="7132320" y="3611880"/>
+            <a:ext cx="4572000" cy="548640"/>
+          </a:xfrm>
+          <a:prstGeom prst="rect">
+            <a:avLst/>
+          </a:prstGeom>
+          <a:noFill/>
+        </p:spPr>
+        <p:txBody>
+          <a:bodyPr wrap="square">
+            <a:spAutoFit/>
+          </a:bodyPr>
+          <a:lstStyle/>
+          <a:p>
+            <a:r>
+              <a:rPr sz="1000" b="0">
+                <a:solidFill>
+                  <a:srgbClr val="334E68"/>
+                </a:solidFill>
+                <a:latin typeface="Calibri"/>
+              </a:rPr>
+              <a:t>Self-service slot booking by patients, validated server-side. Doctors manage availability; the chatbot can book appointments in natural language.</a:t>
+            </a:r>
+          </a:p>
+        </p:txBody>
+      </p:sp>
+      <p:sp>
+        <p:nvSpPr>
+          <p:cNvPr id="28" name="Rounded Rectangle 27"/>
+          <p:cNvSpPr/>
+          <p:nvPr/>
+        </p:nvSpPr>
+        <p:spPr>
+          <a:xfrm>
+            <a:off x="502920" y="4197096"/>
+            <a:ext cx="5486400" cy="960120"/>
+          </a:xfrm>
+          <a:prstGeom prst="roundRect">
+            <a:avLst/>
+          </a:prstGeom>
+          <a:solidFill>
+            <a:srgbClr val="FEF3F2"/>
+          </a:solidFill>
+          <a:ln w="9525">
+            <a:solidFill>
+              <a:srgbClr val="F1C0B8"/>
+            </a:solidFill>
+          </a:ln>
+          <a:effectLst/>
+        </p:spPr>
+        <p:style>
+          <a:lnRef idx="1">
+            <a:schemeClr val="accent1"/>
+          </a:lnRef>
+          <a:fillRef idx="3">
+            <a:schemeClr val="accent1"/>
+          </a:fillRef>
+          <a:effectRef idx="2">
+            <a:schemeClr val="accent1"/>
+          </a:effectRef>
+          <a:fontRef idx="minor">
+            <a:schemeClr val="lt1"/>
+          </a:fontRef>
+        </p:style>
+        <p:txBody>
           <a:bodyPr rtlCol="0" anchor="ctr"/>
           <a:lstStyle/>
           <a:p>
@@ -13062,16 +13970,16 @@
       </p:sp>
       <p:sp>
         <p:nvSpPr>
-          <p:cNvPr id="6" name="Oval 5"/>
+          <p:cNvPr id="29" name="Rounded Rectangle 28"/>
           <p:cNvSpPr/>
           <p:nvPr/>
         </p:nvSpPr>
         <p:spPr>
           <a:xfrm>
-            <a:off x="10789920" y="731520"/>
-            <a:ext cx="1828800" cy="1828800"/>
-          </a:xfrm>
-          <a:prstGeom prst="ellipse">
+            <a:off x="640080" y="4361688"/>
+            <a:ext cx="502920" cy="502920"/>
+          </a:xfrm>
+          <a:prstGeom prst="roundRect">
             <a:avLst/>
           </a:prstGeom>
           <a:solidFill>
@@ -13097,6 +14005,129 @@
           </a:fontRef>
         </p:style>
         <p:txBody>
+          <a:bodyPr rtlCol="0" anchor="ctr" lIns="0" rIns="0" tIns="0" bIns="0" wrap="none"/>
+          <a:lstStyle/>
+          <a:p>
+            <a:pPr algn="ctr"/>
+            <a:r>
+              <a:rPr sz="1300" b="1">
+                <a:solidFill>
+                  <a:srgbClr val="FFFFFF"/>
+                </a:solidFill>
+                <a:latin typeface="Calibri"/>
+              </a:rPr>
+              <a:t>P3</a:t>
+            </a:r>
+          </a:p>
+        </p:txBody>
+      </p:sp>
+      <p:sp>
+        <p:nvSpPr>
+          <p:cNvPr id="30" name="TextBox 29"/>
+          <p:cNvSpPr txBox="1"/>
+          <p:nvPr/>
+        </p:nvSpPr>
+        <p:spPr>
+          <a:xfrm>
+            <a:off x="1280160" y="4306824"/>
+            <a:ext cx="4663440" cy="320040"/>
+          </a:xfrm>
+          <a:prstGeom prst="rect">
+            <a:avLst/>
+          </a:prstGeom>
+          <a:noFill/>
+        </p:spPr>
+        <p:txBody>
+          <a:bodyPr wrap="square">
+            <a:spAutoFit/>
+          </a:bodyPr>
+          <a:lstStyle/>
+          <a:p>
+            <a:r>
+              <a:rPr sz="1200" b="1">
+                <a:solidFill>
+                  <a:srgbClr val="0F172A"/>
+                </a:solidFill>
+                <a:latin typeface="Calibri"/>
+              </a:rPr>
+              <a:t>No intelligent first response</a:t>
+            </a:r>
+          </a:p>
+        </p:txBody>
+      </p:sp>
+      <p:sp>
+        <p:nvSpPr>
+          <p:cNvPr id="31" name="TextBox 30"/>
+          <p:cNvSpPr txBox="1"/>
+          <p:nvPr/>
+        </p:nvSpPr>
+        <p:spPr>
+          <a:xfrm>
+            <a:off x="1280160" y="4636008"/>
+            <a:ext cx="4663440" cy="548640"/>
+          </a:xfrm>
+          <a:prstGeom prst="rect">
+            <a:avLst/>
+          </a:prstGeom>
+          <a:noFill/>
+        </p:spPr>
+        <p:txBody>
+          <a:bodyPr wrap="square">
+            <a:spAutoFit/>
+          </a:bodyPr>
+          <a:lstStyle/>
+          <a:p>
+            <a:r>
+              <a:rPr sz="1000" b="0">
+                <a:solidFill>
+                  <a:srgbClr val="334E68"/>
+                </a:solidFill>
+                <a:latin typeface="Calibri"/>
+              </a:rPr>
+              <a:t>Patients Google symptoms or wait days for advice; doctors can't scale 1-to-1 chat.</a:t>
+            </a:r>
+          </a:p>
+        </p:txBody>
+      </p:sp>
+      <p:sp>
+        <p:nvSpPr>
+          <p:cNvPr id="32" name="Rounded Rectangle 31"/>
+          <p:cNvSpPr/>
+          <p:nvPr/>
+        </p:nvSpPr>
+        <p:spPr>
+          <a:xfrm>
+            <a:off x="6355080" y="4197096"/>
+            <a:ext cx="5486400" cy="960120"/>
+          </a:xfrm>
+          <a:prstGeom prst="roundRect">
+            <a:avLst/>
+          </a:prstGeom>
+          <a:solidFill>
+            <a:srgbClr val="ECFDF5"/>
+          </a:solidFill>
+          <a:ln w="9525">
+            <a:solidFill>
+              <a:srgbClr val="99E8D2"/>
+            </a:solidFill>
+          </a:ln>
+          <a:effectLst/>
+        </p:spPr>
+        <p:style>
+          <a:lnRef idx="1">
+            <a:schemeClr val="accent1"/>
+          </a:lnRef>
+          <a:fillRef idx="3">
+            <a:schemeClr val="accent1"/>
+          </a:fillRef>
+          <a:effectRef idx="2">
+            <a:schemeClr val="accent1"/>
+          </a:effectRef>
+          <a:fontRef idx="minor">
+            <a:schemeClr val="lt1"/>
+          </a:fontRef>
+        </p:style>
+        <p:txBody>
           <a:bodyPr rtlCol="0" anchor="ctr"/>
           <a:lstStyle/>
           <a:p>
@@ -13106,40 +14137,697 @@
       </p:sp>
       <p:sp>
         <p:nvSpPr>
-          <p:cNvPr id="7" name="TextBox 6"/>
-          <p:cNvSpPr txBox="1"/>
-          <p:nvPr/>
-        </p:nvSpPr>
-        <p:spPr>
-          <a:xfrm>
-            <a:off x="640080" y="640080"/>
-            <a:ext cx="10058400" cy="365760"/>
-          </a:xfrm>
-          <a:prstGeom prst="rect">
-            <a:avLst/>
-          </a:prstGeom>
-          <a:noFill/>
-        </p:spPr>
-        <p:txBody>
-          <a:bodyPr wrap="square" lIns="36000" rIns="36000" tIns="18000" bIns="18000" anchor="t">
-            <a:spAutoFit/>
-          </a:bodyPr>
-          <a:lstStyle/>
-          <a:p>
-            <a:pPr algn="l">
-              <a:lnSpc>
-                <a:spcPct val="120000"/>
-              </a:lnSpc>
-            </a:pPr>
-            <a:r>
-              <a:rPr sz="1400" b="1" i="0">
+          <p:cNvPr id="33" name="Rounded Rectangle 32"/>
+          <p:cNvSpPr/>
+          <p:nvPr/>
+        </p:nvSpPr>
+        <p:spPr>
+          <a:xfrm>
+            <a:off x="6492240" y="4361688"/>
+            <a:ext cx="502920" cy="502920"/>
+          </a:xfrm>
+          <a:prstGeom prst="roundRect">
+            <a:avLst/>
+          </a:prstGeom>
+          <a:solidFill>
+            <a:srgbClr val="0E4F8A"/>
+          </a:solidFill>
+          <a:ln>
+            <a:noFill/>
+          </a:ln>
+          <a:effectLst/>
+        </p:spPr>
+        <p:style>
+          <a:lnRef idx="1">
+            <a:schemeClr val="accent1"/>
+          </a:lnRef>
+          <a:fillRef idx="3">
+            <a:schemeClr val="accent1"/>
+          </a:fillRef>
+          <a:effectRef idx="2">
+            <a:schemeClr val="accent1"/>
+          </a:effectRef>
+          <a:fontRef idx="minor">
+            <a:schemeClr val="lt1"/>
+          </a:fontRef>
+        </p:style>
+        <p:txBody>
+          <a:bodyPr rtlCol="0" anchor="ctr" lIns="0" rIns="0" tIns="0" bIns="0" wrap="none"/>
+          <a:lstStyle/>
+          <a:p>
+            <a:pPr algn="ctr"/>
+            <a:r>
+              <a:rPr sz="1300" b="1">
+                <a:solidFill>
+                  <a:srgbClr val="FFFFFF"/>
+                </a:solidFill>
+                <a:latin typeface="Calibri"/>
+              </a:rPr>
+              <a:t>S3</a:t>
+            </a:r>
+          </a:p>
+        </p:txBody>
+      </p:sp>
+      <p:sp>
+        <p:nvSpPr>
+          <p:cNvPr id="34" name="TextBox 33"/>
+          <p:cNvSpPr txBox="1"/>
+          <p:nvPr/>
+        </p:nvSpPr>
+        <p:spPr>
+          <a:xfrm>
+            <a:off x="7132320" y="4306824"/>
+            <a:ext cx="4572000" cy="320040"/>
+          </a:xfrm>
+          <a:prstGeom prst="rect">
+            <a:avLst/>
+          </a:prstGeom>
+          <a:noFill/>
+        </p:spPr>
+        <p:txBody>
+          <a:bodyPr wrap="square">
+            <a:spAutoFit/>
+          </a:bodyPr>
+          <a:lstStyle/>
+          <a:p>
+            <a:r>
+              <a:rPr sz="1200" b="1">
+                <a:solidFill>
+                  <a:srgbClr val="0F172A"/>
+                </a:solidFill>
+                <a:latin typeface="Calibri"/>
+              </a:rPr>
+              <a:t>Fix for: No intelligent first response</a:t>
+            </a:r>
+          </a:p>
+        </p:txBody>
+      </p:sp>
+      <p:sp>
+        <p:nvSpPr>
+          <p:cNvPr id="35" name="TextBox 34"/>
+          <p:cNvSpPr txBox="1"/>
+          <p:nvPr/>
+        </p:nvSpPr>
+        <p:spPr>
+          <a:xfrm>
+            <a:off x="7132320" y="4636008"/>
+            <a:ext cx="4572000" cy="548640"/>
+          </a:xfrm>
+          <a:prstGeom prst="rect">
+            <a:avLst/>
+          </a:prstGeom>
+          <a:noFill/>
+        </p:spPr>
+        <p:txBody>
+          <a:bodyPr wrap="square">
+            <a:spAutoFit/>
+          </a:bodyPr>
+          <a:lstStyle/>
+          <a:p>
+            <a:r>
+              <a:rPr sz="1000" b="0">
+                <a:solidFill>
+                  <a:srgbClr val="334E68"/>
+                </a:solidFill>
+                <a:latin typeface="Calibri"/>
+              </a:rPr>
+              <a:t>Two AI assistants (in-app Groq copilot + always-on voice widget) give 24×7 triage, prescription context and follow-up answers using the patient's DB history.</a:t>
+            </a:r>
+          </a:p>
+        </p:txBody>
+      </p:sp>
+      <p:sp>
+        <p:nvSpPr>
+          <p:cNvPr id="36" name="Rounded Rectangle 35"/>
+          <p:cNvSpPr/>
+          <p:nvPr/>
+        </p:nvSpPr>
+        <p:spPr>
+          <a:xfrm>
+            <a:off x="502920" y="5221224"/>
+            <a:ext cx="5486400" cy="960120"/>
+          </a:xfrm>
+          <a:prstGeom prst="roundRect">
+            <a:avLst/>
+          </a:prstGeom>
+          <a:solidFill>
+            <a:srgbClr val="FEF3F2"/>
+          </a:solidFill>
+          <a:ln w="9525">
+            <a:solidFill>
+              <a:srgbClr val="F1C0B8"/>
+            </a:solidFill>
+          </a:ln>
+          <a:effectLst/>
+        </p:spPr>
+        <p:style>
+          <a:lnRef idx="1">
+            <a:schemeClr val="accent1"/>
+          </a:lnRef>
+          <a:fillRef idx="3">
+            <a:schemeClr val="accent1"/>
+          </a:fillRef>
+          <a:effectRef idx="2">
+            <a:schemeClr val="accent1"/>
+          </a:effectRef>
+          <a:fontRef idx="minor">
+            <a:schemeClr val="lt1"/>
+          </a:fontRef>
+        </p:style>
+        <p:txBody>
+          <a:bodyPr rtlCol="0" anchor="ctr"/>
+          <a:lstStyle/>
+          <a:p>
+            <a:pPr algn="ctr"/>
+          </a:p>
+        </p:txBody>
+      </p:sp>
+      <p:sp>
+        <p:nvSpPr>
+          <p:cNvPr id="37" name="Rounded Rectangle 36"/>
+          <p:cNvSpPr/>
+          <p:nvPr/>
+        </p:nvSpPr>
+        <p:spPr>
+          <a:xfrm>
+            <a:off x="640080" y="5385816"/>
+            <a:ext cx="502920" cy="502920"/>
+          </a:xfrm>
+          <a:prstGeom prst="roundRect">
+            <a:avLst/>
+          </a:prstGeom>
+          <a:solidFill>
+            <a:srgbClr val="14B8A6"/>
+          </a:solidFill>
+          <a:ln>
+            <a:noFill/>
+          </a:ln>
+          <a:effectLst/>
+        </p:spPr>
+        <p:style>
+          <a:lnRef idx="1">
+            <a:schemeClr val="accent1"/>
+          </a:lnRef>
+          <a:fillRef idx="3">
+            <a:schemeClr val="accent1"/>
+          </a:fillRef>
+          <a:effectRef idx="2">
+            <a:schemeClr val="accent1"/>
+          </a:effectRef>
+          <a:fontRef idx="minor">
+            <a:schemeClr val="lt1"/>
+          </a:fontRef>
+        </p:style>
+        <p:txBody>
+          <a:bodyPr rtlCol="0" anchor="ctr" lIns="0" rIns="0" tIns="0" bIns="0" wrap="none"/>
+          <a:lstStyle/>
+          <a:p>
+            <a:pPr algn="ctr"/>
+            <a:r>
+              <a:rPr sz="1300" b="1">
+                <a:solidFill>
+                  <a:srgbClr val="FFFFFF"/>
+                </a:solidFill>
+                <a:latin typeface="Calibri"/>
+              </a:rPr>
+              <a:t>P4</a:t>
+            </a:r>
+          </a:p>
+        </p:txBody>
+      </p:sp>
+      <p:sp>
+        <p:nvSpPr>
+          <p:cNvPr id="38" name="TextBox 37"/>
+          <p:cNvSpPr txBox="1"/>
+          <p:nvPr/>
+        </p:nvSpPr>
+        <p:spPr>
+          <a:xfrm>
+            <a:off x="1280160" y="5330952"/>
+            <a:ext cx="4663440" cy="320040"/>
+          </a:xfrm>
+          <a:prstGeom prst="rect">
+            <a:avLst/>
+          </a:prstGeom>
+          <a:noFill/>
+        </p:spPr>
+        <p:txBody>
+          <a:bodyPr wrap="square">
+            <a:spAutoFit/>
+          </a:bodyPr>
+          <a:lstStyle/>
+          <a:p>
+            <a:r>
+              <a:rPr sz="1200" b="1">
+                <a:solidFill>
+                  <a:srgbClr val="0F172A"/>
+                </a:solidFill>
+                <a:latin typeface="Calibri"/>
+              </a:rPr>
+              <a:t>Paper-based pharmacy &amp; onboarding</a:t>
+            </a:r>
+          </a:p>
+        </p:txBody>
+      </p:sp>
+      <p:sp>
+        <p:nvSpPr>
+          <p:cNvPr id="39" name="TextBox 38"/>
+          <p:cNvSpPr txBox="1"/>
+          <p:nvPr/>
+        </p:nvSpPr>
+        <p:spPr>
+          <a:xfrm>
+            <a:off x="1280160" y="5660136"/>
+            <a:ext cx="4663440" cy="548640"/>
+          </a:xfrm>
+          <a:prstGeom prst="rect">
+            <a:avLst/>
+          </a:prstGeom>
+          <a:noFill/>
+        </p:spPr>
+        <p:txBody>
+          <a:bodyPr wrap="square">
+            <a:spAutoFit/>
+          </a:bodyPr>
+          <a:lstStyle/>
+          <a:p>
+            <a:r>
+              <a:rPr sz="1000" b="0">
+                <a:solidFill>
+                  <a:srgbClr val="334E68"/>
+                </a:solidFill>
+                <a:latin typeface="Calibri"/>
+              </a:rPr>
+              <a:t>Buying medicine, refilling prescriptions, and onboarding new doctors all run on paper / manual calls.</a:t>
+            </a:r>
+          </a:p>
+        </p:txBody>
+      </p:sp>
+      <p:sp>
+        <p:nvSpPr>
+          <p:cNvPr id="40" name="Rounded Rectangle 39"/>
+          <p:cNvSpPr/>
+          <p:nvPr/>
+        </p:nvSpPr>
+        <p:spPr>
+          <a:xfrm>
+            <a:off x="6355080" y="5221224"/>
+            <a:ext cx="5486400" cy="960120"/>
+          </a:xfrm>
+          <a:prstGeom prst="roundRect">
+            <a:avLst/>
+          </a:prstGeom>
+          <a:solidFill>
+            <a:srgbClr val="ECFDF5"/>
+          </a:solidFill>
+          <a:ln w="9525">
+            <a:solidFill>
+              <a:srgbClr val="99E8D2"/>
+            </a:solidFill>
+          </a:ln>
+          <a:effectLst/>
+        </p:spPr>
+        <p:style>
+          <a:lnRef idx="1">
+            <a:schemeClr val="accent1"/>
+          </a:lnRef>
+          <a:fillRef idx="3">
+            <a:schemeClr val="accent1"/>
+          </a:fillRef>
+          <a:effectRef idx="2">
+            <a:schemeClr val="accent1"/>
+          </a:effectRef>
+          <a:fontRef idx="minor">
+            <a:schemeClr val="lt1"/>
+          </a:fontRef>
+        </p:style>
+        <p:txBody>
+          <a:bodyPr rtlCol="0" anchor="ctr"/>
+          <a:lstStyle/>
+          <a:p>
+            <a:pPr algn="ctr"/>
+          </a:p>
+        </p:txBody>
+      </p:sp>
+      <p:sp>
+        <p:nvSpPr>
+          <p:cNvPr id="41" name="Rounded Rectangle 40"/>
+          <p:cNvSpPr/>
+          <p:nvPr/>
+        </p:nvSpPr>
+        <p:spPr>
+          <a:xfrm>
+            <a:off x="6492240" y="5385816"/>
+            <a:ext cx="502920" cy="502920"/>
+          </a:xfrm>
+          <a:prstGeom prst="roundRect">
+            <a:avLst/>
+          </a:prstGeom>
+          <a:solidFill>
+            <a:srgbClr val="0E4F8A"/>
+          </a:solidFill>
+          <a:ln>
+            <a:noFill/>
+          </a:ln>
+          <a:effectLst/>
+        </p:spPr>
+        <p:style>
+          <a:lnRef idx="1">
+            <a:schemeClr val="accent1"/>
+          </a:lnRef>
+          <a:fillRef idx="3">
+            <a:schemeClr val="accent1"/>
+          </a:fillRef>
+          <a:effectRef idx="2">
+            <a:schemeClr val="accent1"/>
+          </a:effectRef>
+          <a:fontRef idx="minor">
+            <a:schemeClr val="lt1"/>
+          </a:fontRef>
+        </p:style>
+        <p:txBody>
+          <a:bodyPr rtlCol="0" anchor="ctr" lIns="0" rIns="0" tIns="0" bIns="0" wrap="none"/>
+          <a:lstStyle/>
+          <a:p>
+            <a:pPr algn="ctr"/>
+            <a:r>
+              <a:rPr sz="1300" b="1">
+                <a:solidFill>
+                  <a:srgbClr val="FFFFFF"/>
+                </a:solidFill>
+                <a:latin typeface="Calibri"/>
+              </a:rPr>
+              <a:t>S4</a:t>
+            </a:r>
+          </a:p>
+        </p:txBody>
+      </p:sp>
+      <p:sp>
+        <p:nvSpPr>
+          <p:cNvPr id="42" name="TextBox 41"/>
+          <p:cNvSpPr txBox="1"/>
+          <p:nvPr/>
+        </p:nvSpPr>
+        <p:spPr>
+          <a:xfrm>
+            <a:off x="7132320" y="5330952"/>
+            <a:ext cx="4572000" cy="320040"/>
+          </a:xfrm>
+          <a:prstGeom prst="rect">
+            <a:avLst/>
+          </a:prstGeom>
+          <a:noFill/>
+        </p:spPr>
+        <p:txBody>
+          <a:bodyPr wrap="square">
+            <a:spAutoFit/>
+          </a:bodyPr>
+          <a:lstStyle/>
+          <a:p>
+            <a:r>
+              <a:rPr sz="1200" b="1">
+                <a:solidFill>
+                  <a:srgbClr val="0F172A"/>
+                </a:solidFill>
+                <a:latin typeface="Calibri"/>
+              </a:rPr>
+              <a:t>Fix for: Paper-based pharmacy &amp; onboarding</a:t>
+            </a:r>
+          </a:p>
+        </p:txBody>
+      </p:sp>
+      <p:sp>
+        <p:nvSpPr>
+          <p:cNvPr id="43" name="TextBox 42"/>
+          <p:cNvSpPr txBox="1"/>
+          <p:nvPr/>
+        </p:nvSpPr>
+        <p:spPr>
+          <a:xfrm>
+            <a:off x="7132320" y="5660136"/>
+            <a:ext cx="4572000" cy="548640"/>
+          </a:xfrm>
+          <a:prstGeom prst="rect">
+            <a:avLst/>
+          </a:prstGeom>
+          <a:noFill/>
+        </p:spPr>
+        <p:txBody>
+          <a:bodyPr wrap="square">
+            <a:spAutoFit/>
+          </a:bodyPr>
+          <a:lstStyle/>
+          <a:p>
+            <a:r>
+              <a:rPr sz="1000" b="0">
+                <a:solidFill>
+                  <a:srgbClr val="334E68"/>
+                </a:solidFill>
+                <a:latin typeface="Calibri"/>
+              </a:rPr>
+              <a:t>Digital pharmacy module with admin CRUD on medicine images, patient-side buy/book flow, e-prescription PDF export, and doctor-onboarding with auto-emailed credentials.</a:t>
+            </a:r>
+          </a:p>
+        </p:txBody>
+      </p:sp>
+    </p:spTree>
+  </p:cSld>
+  <p:clrMapOvr>
+    <a:masterClrMapping/>
+  </p:clrMapOvr>
+</p:sld>
+</file>
+
+<file path=ppt/slides/slide15.xml><?xml version="1.0" encoding="utf-8"?>
+<p:sld xmlns:a="http://schemas.openxmlformats.org/drawingml/2006/main" xmlns:p="http://schemas.openxmlformats.org/presentationml/2006/main" xmlns:r="http://schemas.openxmlformats.org/officeDocument/2006/relationships">
+  <p:cSld>
+    <p:spTree>
+      <p:nvGrpSpPr>
+        <p:cNvPr id="1" name=""/>
+        <p:cNvGrpSpPr/>
+        <p:nvPr/>
+      </p:nvGrpSpPr>
+      <p:grpSpPr/>
+      <p:sp>
+        <p:nvSpPr>
+          <p:cNvPr id="2" name="Rectangle 1"/>
+          <p:cNvSpPr/>
+          <p:nvPr/>
+        </p:nvSpPr>
+        <p:spPr>
+          <a:xfrm>
+            <a:off x="502920" y="502920"/>
+            <a:ext cx="109728" cy="502920"/>
+          </a:xfrm>
+          <a:prstGeom prst="rect">
+            <a:avLst/>
+          </a:prstGeom>
+          <a:solidFill>
+            <a:srgbClr val="14B8A6"/>
+          </a:solidFill>
+          <a:ln>
+            <a:noFill/>
+          </a:ln>
+        </p:spPr>
+        <p:style>
+          <a:lnRef idx="1">
+            <a:schemeClr val="accent1"/>
+          </a:lnRef>
+          <a:fillRef idx="3">
+            <a:schemeClr val="accent1"/>
+          </a:fillRef>
+          <a:effectRef idx="2">
+            <a:schemeClr val="accent1"/>
+          </a:effectRef>
+          <a:fontRef idx="minor">
+            <a:schemeClr val="lt1"/>
+          </a:fontRef>
+        </p:style>
+        <p:txBody>
+          <a:bodyPr rtlCol="0" anchor="ctr"/>
+          <a:lstStyle/>
+          <a:p>
+            <a:pPr algn="ctr"/>
+          </a:p>
+        </p:txBody>
+      </p:sp>
+      <p:sp>
+        <p:nvSpPr>
+          <p:cNvPr id="3" name="TextBox 2"/>
+          <p:cNvSpPr txBox="1"/>
+          <p:nvPr/>
+        </p:nvSpPr>
+        <p:spPr>
+          <a:xfrm>
+            <a:off x="713232" y="457200"/>
+            <a:ext cx="10972800" cy="256032"/>
+          </a:xfrm>
+          <a:prstGeom prst="rect">
+            <a:avLst/>
+          </a:prstGeom>
+          <a:noFill/>
+        </p:spPr>
+        <p:txBody>
+          <a:bodyPr wrap="none">
+            <a:spAutoFit/>
+          </a:bodyPr>
+          <a:lstStyle/>
+          <a:p>
+            <a:r>
+              <a:rPr sz="1000" b="1">
                 <a:solidFill>
                   <a:srgbClr val="14B8A6"/>
                 </a:solidFill>
                 <a:latin typeface="Calibri"/>
               </a:rPr>
-              <a:t>THANK YOU</a:t>
-            </a:r>
+              <a:t>MILESTONE 01</a:t>
+            </a:r>
+          </a:p>
+        </p:txBody>
+      </p:sp>
+      <p:sp>
+        <p:nvSpPr>
+          <p:cNvPr id="4" name="TextBox 3"/>
+          <p:cNvSpPr txBox="1"/>
+          <p:nvPr/>
+        </p:nvSpPr>
+        <p:spPr>
+          <a:xfrm>
+            <a:off x="713232" y="713232"/>
+            <a:ext cx="11155680" cy="502920"/>
+          </a:xfrm>
+          <a:prstGeom prst="rect">
+            <a:avLst/>
+          </a:prstGeom>
+          <a:noFill/>
+        </p:spPr>
+        <p:txBody>
+          <a:bodyPr wrap="none">
+            <a:spAutoFit/>
+          </a:bodyPr>
+          <a:lstStyle/>
+          <a:p>
+            <a:r>
+              <a:rPr sz="2600" b="1">
+                <a:solidFill>
+                  <a:srgbClr val="0F172A"/>
+                </a:solidFill>
+                <a:latin typeface="Calibri"/>
+              </a:rPr>
+              <a:t>Login UI — design &amp; polish</a:t>
+            </a:r>
+          </a:p>
+        </p:txBody>
+      </p:sp>
+      <p:sp>
+        <p:nvSpPr>
+          <p:cNvPr id="5" name="TextBox 4"/>
+          <p:cNvSpPr txBox="1"/>
+          <p:nvPr/>
+        </p:nvSpPr>
+        <p:spPr>
+          <a:xfrm>
+            <a:off x="713232" y="1234440"/>
+            <a:ext cx="11155680" cy="365760"/>
+          </a:xfrm>
+          <a:prstGeom prst="rect">
+            <a:avLst/>
+          </a:prstGeom>
+          <a:noFill/>
+        </p:spPr>
+        <p:txBody>
+          <a:bodyPr wrap="none">
+            <a:spAutoFit/>
+          </a:bodyPr>
+          <a:lstStyle/>
+          <a:p>
+            <a:r>
+              <a:rPr sz="1200">
+                <a:solidFill>
+                  <a:srgbClr val="64748B"/>
+                </a:solidFill>
+                <a:latin typeface="Calibri"/>
+              </a:rPr>
+              <a:t>Built the Streamlit login/signup screens and refined the visual system around them.</a:t>
+            </a:r>
+          </a:p>
+        </p:txBody>
+      </p:sp>
+      <p:cxnSp>
+        <p:nvCxnSpPr>
+          <p:cNvPr id="6" name="Connector 5"/>
+          <p:cNvCxnSpPr/>
+          <p:nvPr/>
+        </p:nvCxnSpPr>
+        <p:spPr>
+          <a:xfrm>
+            <a:off x="713232" y="1627632"/>
+            <a:ext cx="10808208" cy="0"/>
+          </a:xfrm>
+          <a:prstGeom prst="line">
+            <a:avLst/>
+          </a:prstGeom>
+          <a:ln w="9525">
+            <a:solidFill>
+              <a:srgbClr val="E2E8F0"/>
+            </a:solidFill>
+          </a:ln>
+        </p:spPr>
+        <p:style>
+          <a:lnRef idx="2">
+            <a:schemeClr val="accent1"/>
+          </a:lnRef>
+          <a:fillRef idx="0">
+            <a:schemeClr val="accent1"/>
+          </a:fillRef>
+          <a:effectRef idx="1">
+            <a:schemeClr val="accent1"/>
+          </a:effectRef>
+          <a:fontRef idx="minor">
+            <a:schemeClr val="tx1"/>
+          </a:fontRef>
+        </p:style>
+      </p:cxnSp>
+      <p:sp>
+        <p:nvSpPr>
+          <p:cNvPr id="7" name="Rectangle 6"/>
+          <p:cNvSpPr/>
+          <p:nvPr/>
+        </p:nvSpPr>
+        <p:spPr>
+          <a:xfrm>
+            <a:off x="0" y="6565392"/>
+            <a:ext cx="12191695" cy="292608"/>
+          </a:xfrm>
+          <a:prstGeom prst="rect">
+            <a:avLst/>
+          </a:prstGeom>
+          <a:solidFill>
+            <a:srgbClr val="F8FAFC"/>
+          </a:solidFill>
+          <a:ln>
+            <a:noFill/>
+          </a:ln>
+        </p:spPr>
+        <p:style>
+          <a:lnRef idx="1">
+            <a:schemeClr val="accent1"/>
+          </a:lnRef>
+          <a:fillRef idx="3">
+            <a:schemeClr val="accent1"/>
+          </a:fillRef>
+          <a:effectRef idx="2">
+            <a:schemeClr val="accent1"/>
+          </a:effectRef>
+          <a:fontRef idx="minor">
+            <a:schemeClr val="lt1"/>
+          </a:fontRef>
+        </p:style>
+        <p:txBody>
+          <a:bodyPr rtlCol="0" anchor="ctr"/>
+          <a:lstStyle/>
+          <a:p>
+            <a:pPr algn="ctr"/>
           </a:p>
         </p:txBody>
       </p:sp>
@@ -13151,33 +14839,28 @@
         </p:nvSpPr>
         <p:spPr>
           <a:xfrm>
-            <a:off x="640080" y="960120"/>
-            <a:ext cx="10058400" cy="1097280"/>
-          </a:xfrm>
-          <a:prstGeom prst="rect">
-            <a:avLst/>
-          </a:prstGeom>
-          <a:noFill/>
-        </p:spPr>
-        <p:txBody>
-          <a:bodyPr wrap="square" lIns="36000" rIns="36000" tIns="18000" bIns="18000" anchor="t">
-            <a:spAutoFit/>
-          </a:bodyPr>
-          <a:lstStyle/>
-          <a:p>
-            <a:pPr algn="l">
-              <a:lnSpc>
-                <a:spcPct val="120000"/>
-              </a:lnSpc>
-            </a:pPr>
-            <a:r>
-              <a:rPr sz="4400" b="1" i="0">
-                <a:solidFill>
-                  <a:srgbClr val="FFFFFF"/>
-                </a:solidFill>
-                <a:latin typeface="Calibri"/>
-              </a:rPr>
-              <a:t>That's IPCMS.</a:t>
+            <a:off x="365760" y="6601968"/>
+            <a:ext cx="8229600" cy="228600"/>
+          </a:xfrm>
+          <a:prstGeom prst="rect">
+            <a:avLst/>
+          </a:prstGeom>
+          <a:noFill/>
+        </p:spPr>
+        <p:txBody>
+          <a:bodyPr wrap="none">
+            <a:spAutoFit/>
+          </a:bodyPr>
+          <a:lstStyle/>
+          <a:p>
+            <a:r>
+              <a:rPr sz="900">
+                <a:solidFill>
+                  <a:srgbClr val="64748B"/>
+                </a:solidFill>
+                <a:latin typeface="Calibri"/>
+              </a:rPr>
+              <a:t>IPCMS — Integrated Patient Care Management System</a:t>
             </a:r>
           </a:p>
         </p:txBody>
@@ -13190,33 +14873,29 @@
         </p:nvSpPr>
         <p:spPr>
           <a:xfrm>
-            <a:off x="640080" y="2011680"/>
-            <a:ext cx="9144000" cy="822960"/>
-          </a:xfrm>
-          <a:prstGeom prst="rect">
-            <a:avLst/>
-          </a:prstGeom>
-          <a:noFill/>
-        </p:spPr>
-        <p:txBody>
-          <a:bodyPr wrap="square" lIns="36000" rIns="36000" tIns="18000" bIns="18000" anchor="t">
-            <a:spAutoFit/>
-          </a:bodyPr>
-          <a:lstStyle/>
-          <a:p>
-            <a:pPr algn="l">
-              <a:lnSpc>
-                <a:spcPct val="140000"/>
-              </a:lnSpc>
-            </a:pPr>
-            <a:r>
-              <a:rPr sz="1400" b="0" i="1">
-                <a:solidFill>
-                  <a:srgbClr val="CCFBF1"/>
-                </a:solidFill>
-                <a:latin typeface="Calibri"/>
-              </a:rPr>
-              <a:t>A patient-care app that doesn't pretend AI is magic — it just moves the right information to the right person, faster.</a:t>
+            <a:off x="10607040" y="6601968"/>
+            <a:ext cx="1280160" cy="228600"/>
+          </a:xfrm>
+          <a:prstGeom prst="rect">
+            <a:avLst/>
+          </a:prstGeom>
+          <a:noFill/>
+        </p:spPr>
+        <p:txBody>
+          <a:bodyPr wrap="none">
+            <a:spAutoFit/>
+          </a:bodyPr>
+          <a:lstStyle/>
+          <a:p>
+            <a:pPr algn="r"/>
+            <a:r>
+              <a:rPr sz="900">
+                <a:solidFill>
+                  <a:srgbClr val="64748B"/>
+                </a:solidFill>
+                <a:latin typeface="Calibri"/>
+              </a:rPr>
+              <a:t>16 / 24</a:t>
             </a:r>
           </a:p>
         </p:txBody>
@@ -13229,13 +14908,3051 @@
         </p:nvSpPr>
         <p:spPr>
           <a:xfrm>
-            <a:off x="502920" y="3520440"/>
-            <a:ext cx="3703320" cy="2788920"/>
+            <a:off x="502920" y="1828800"/>
+            <a:ext cx="5669280" cy="4206240"/>
           </a:xfrm>
           <a:prstGeom prst="roundRect">
-            <a:avLst>
-              <a:gd name="adj" fmla="val 4000"/>
-            </a:avLst>
+            <a:avLst/>
+          </a:prstGeom>
+          <a:solidFill>
+            <a:srgbClr val="F8FAFC"/>
+          </a:solidFill>
+          <a:ln w="9525">
+            <a:solidFill>
+              <a:srgbClr val="E2E8F0"/>
+            </a:solidFill>
+          </a:ln>
+          <a:effectLst/>
+        </p:spPr>
+        <p:style>
+          <a:lnRef idx="1">
+            <a:schemeClr val="accent1"/>
+          </a:lnRef>
+          <a:fillRef idx="3">
+            <a:schemeClr val="accent1"/>
+          </a:fillRef>
+          <a:effectRef idx="2">
+            <a:schemeClr val="accent1"/>
+          </a:effectRef>
+          <a:fontRef idx="minor">
+            <a:schemeClr val="lt1"/>
+          </a:fontRef>
+        </p:style>
+        <p:txBody>
+          <a:bodyPr rtlCol="0" anchor="ctr"/>
+          <a:lstStyle/>
+          <a:p>
+            <a:pPr algn="ctr"/>
+          </a:p>
+        </p:txBody>
+      </p:sp>
+      <p:sp>
+        <p:nvSpPr>
+          <p:cNvPr id="11" name="TextBox 10"/>
+          <p:cNvSpPr txBox="1"/>
+          <p:nvPr/>
+        </p:nvSpPr>
+        <p:spPr>
+          <a:xfrm>
+            <a:off x="685800" y="1920240"/>
+            <a:ext cx="5486400" cy="274320"/>
+          </a:xfrm>
+          <a:prstGeom prst="rect">
+            <a:avLst/>
+          </a:prstGeom>
+          <a:noFill/>
+        </p:spPr>
+        <p:txBody>
+          <a:bodyPr wrap="none">
+            <a:spAutoFit/>
+          </a:bodyPr>
+          <a:lstStyle/>
+          <a:p>
+            <a:r>
+              <a:rPr sz="1100" b="1">
+                <a:solidFill>
+                  <a:srgbClr val="0E4F8A"/>
+                </a:solidFill>
+                <a:latin typeface="Calibri"/>
+              </a:rPr>
+              <a:t>WHAT WAS BUILT</a:t>
+            </a:r>
+          </a:p>
+        </p:txBody>
+      </p:sp>
+      <p:sp>
+        <p:nvSpPr>
+          <p:cNvPr id="12" name="TextBox 11"/>
+          <p:cNvSpPr txBox="1"/>
+          <p:nvPr/>
+        </p:nvSpPr>
+        <p:spPr>
+          <a:xfrm>
+            <a:off x="685800" y="2331720"/>
+            <a:ext cx="5486400" cy="365760"/>
+          </a:xfrm>
+          <a:prstGeom prst="rect">
+            <a:avLst/>
+          </a:prstGeom>
+          <a:noFill/>
+        </p:spPr>
+        <p:txBody>
+          <a:bodyPr wrap="square">
+            <a:spAutoFit/>
+          </a:bodyPr>
+          <a:lstStyle/>
+          <a:p>
+            <a:r>
+              <a:rPr sz="1100" b="0">
+                <a:solidFill>
+                  <a:srgbClr val="334E68"/>
+                </a:solidFill>
+                <a:latin typeface="Calibri"/>
+              </a:rPr>
+              <a:t>•  Email + password sign-in and sign-up forms</a:t>
+            </a:r>
+          </a:p>
+        </p:txBody>
+      </p:sp>
+      <p:sp>
+        <p:nvSpPr>
+          <p:cNvPr id="13" name="TextBox 12"/>
+          <p:cNvSpPr txBox="1"/>
+          <p:nvPr/>
+        </p:nvSpPr>
+        <p:spPr>
+          <a:xfrm>
+            <a:off x="685800" y="2697480"/>
+            <a:ext cx="5486400" cy="365760"/>
+          </a:xfrm>
+          <a:prstGeom prst="rect">
+            <a:avLst/>
+          </a:prstGeom>
+          <a:noFill/>
+        </p:spPr>
+        <p:txBody>
+          <a:bodyPr wrap="square">
+            <a:spAutoFit/>
+          </a:bodyPr>
+          <a:lstStyle/>
+          <a:p>
+            <a:r>
+              <a:rPr sz="1100" b="0">
+                <a:solidFill>
+                  <a:srgbClr val="334E68"/>
+                </a:solidFill>
+                <a:latin typeface="Calibri"/>
+              </a:rPr>
+              <a:t>•  Google OAuth entry alongside classic auth</a:t>
+            </a:r>
+          </a:p>
+        </p:txBody>
+      </p:sp>
+      <p:sp>
+        <p:nvSpPr>
+          <p:cNvPr id="14" name="TextBox 13"/>
+          <p:cNvSpPr txBox="1"/>
+          <p:nvPr/>
+        </p:nvSpPr>
+        <p:spPr>
+          <a:xfrm>
+            <a:off x="685800" y="3063240"/>
+            <a:ext cx="5486400" cy="365760"/>
+          </a:xfrm>
+          <a:prstGeom prst="rect">
+            <a:avLst/>
+          </a:prstGeom>
+          <a:noFill/>
+        </p:spPr>
+        <p:txBody>
+          <a:bodyPr wrap="square">
+            <a:spAutoFit/>
+          </a:bodyPr>
+          <a:lstStyle/>
+          <a:p>
+            <a:r>
+              <a:rPr sz="1100" b="0">
+                <a:solidFill>
+                  <a:srgbClr val="334E68"/>
+                </a:solidFill>
+                <a:latin typeface="Calibri"/>
+              </a:rPr>
+              <a:t>•  Role detection on login (patient / doctor / admin)</a:t>
+            </a:r>
+          </a:p>
+        </p:txBody>
+      </p:sp>
+      <p:sp>
+        <p:nvSpPr>
+          <p:cNvPr id="15" name="TextBox 14"/>
+          <p:cNvSpPr txBox="1"/>
+          <p:nvPr/>
+        </p:nvSpPr>
+        <p:spPr>
+          <a:xfrm>
+            <a:off x="685800" y="3429000"/>
+            <a:ext cx="5486400" cy="365760"/>
+          </a:xfrm>
+          <a:prstGeom prst="rect">
+            <a:avLst/>
+          </a:prstGeom>
+          <a:noFill/>
+        </p:spPr>
+        <p:txBody>
+          <a:bodyPr wrap="square">
+            <a:spAutoFit/>
+          </a:bodyPr>
+          <a:lstStyle/>
+          <a:p>
+            <a:r>
+              <a:rPr sz="1100" b="0">
+                <a:solidFill>
+                  <a:srgbClr val="334E68"/>
+                </a:solidFill>
+                <a:latin typeface="Calibri"/>
+              </a:rPr>
+              <a:t>•  Glassmorphism cards, sticky header, custom CSS theme</a:t>
+            </a:r>
+          </a:p>
+        </p:txBody>
+      </p:sp>
+      <p:sp>
+        <p:nvSpPr>
+          <p:cNvPr id="16" name="TextBox 15"/>
+          <p:cNvSpPr txBox="1"/>
+          <p:nvPr/>
+        </p:nvSpPr>
+        <p:spPr>
+          <a:xfrm>
+            <a:off x="685800" y="3794760"/>
+            <a:ext cx="5486400" cy="365760"/>
+          </a:xfrm>
+          <a:prstGeom prst="rect">
+            <a:avLst/>
+          </a:prstGeom>
+          <a:noFill/>
+        </p:spPr>
+        <p:txBody>
+          <a:bodyPr wrap="square">
+            <a:spAutoFit/>
+          </a:bodyPr>
+          <a:lstStyle/>
+          <a:p>
+            <a:r>
+              <a:rPr sz="1100" b="0">
+                <a:solidFill>
+                  <a:srgbClr val="334E68"/>
+                </a:solidFill>
+                <a:latin typeface="Calibri"/>
+              </a:rPr>
+              <a:t>•  Responsive layout for narrow screens</a:t>
+            </a:r>
+          </a:p>
+        </p:txBody>
+      </p:sp>
+      <p:sp>
+        <p:nvSpPr>
+          <p:cNvPr id="17" name="Rounded Rectangle 16"/>
+          <p:cNvSpPr/>
+          <p:nvPr/>
+        </p:nvSpPr>
+        <p:spPr>
+          <a:xfrm>
+            <a:off x="6355080" y="1828800"/>
+            <a:ext cx="5486400" cy="2011680"/>
+          </a:xfrm>
+          <a:prstGeom prst="roundRect">
+            <a:avLst/>
+          </a:prstGeom>
+          <a:solidFill>
+            <a:srgbClr val="F8FAFC"/>
+          </a:solidFill>
+          <a:ln w="9525">
+            <a:solidFill>
+              <a:srgbClr val="E2E8F0"/>
+            </a:solidFill>
+          </a:ln>
+          <a:effectLst/>
+        </p:spPr>
+        <p:style>
+          <a:lnRef idx="1">
+            <a:schemeClr val="accent1"/>
+          </a:lnRef>
+          <a:fillRef idx="3">
+            <a:schemeClr val="accent1"/>
+          </a:fillRef>
+          <a:effectRef idx="2">
+            <a:schemeClr val="accent1"/>
+          </a:effectRef>
+          <a:fontRef idx="minor">
+            <a:schemeClr val="lt1"/>
+          </a:fontRef>
+        </p:style>
+        <p:txBody>
+          <a:bodyPr rtlCol="0" anchor="ctr"/>
+          <a:lstStyle/>
+          <a:p>
+            <a:pPr algn="ctr"/>
+          </a:p>
+        </p:txBody>
+      </p:sp>
+      <p:sp>
+        <p:nvSpPr>
+          <p:cNvPr id="18" name="TextBox 17"/>
+          <p:cNvSpPr txBox="1"/>
+          <p:nvPr/>
+        </p:nvSpPr>
+        <p:spPr>
+          <a:xfrm>
+            <a:off x="6537960" y="1920240"/>
+            <a:ext cx="5120640" cy="274320"/>
+          </a:xfrm>
+          <a:prstGeom prst="rect">
+            <a:avLst/>
+          </a:prstGeom>
+          <a:noFill/>
+        </p:spPr>
+        <p:txBody>
+          <a:bodyPr wrap="none">
+            <a:spAutoFit/>
+          </a:bodyPr>
+          <a:lstStyle/>
+          <a:p>
+            <a:r>
+              <a:rPr sz="1100" b="1">
+                <a:solidFill>
+                  <a:srgbClr val="0E4F8A"/>
+                </a:solidFill>
+                <a:latin typeface="Calibri"/>
+              </a:rPr>
+              <a:t>FILES / MODULES</a:t>
+            </a:r>
+          </a:p>
+        </p:txBody>
+      </p:sp>
+      <p:sp>
+        <p:nvSpPr>
+          <p:cNvPr id="19" name="TextBox 18"/>
+          <p:cNvSpPr txBox="1"/>
+          <p:nvPr/>
+        </p:nvSpPr>
+        <p:spPr>
+          <a:xfrm>
+            <a:off x="6537960" y="2331720"/>
+            <a:ext cx="5120640" cy="1463040"/>
+          </a:xfrm>
+          <a:prstGeom prst="rect">
+            <a:avLst/>
+          </a:prstGeom>
+          <a:noFill/>
+        </p:spPr>
+        <p:txBody>
+          <a:bodyPr wrap="square">
+            <a:spAutoFit/>
+          </a:bodyPr>
+          <a:lstStyle/>
+          <a:p>
+            <a:r>
+              <a:rPr sz="1100" b="0">
+                <a:solidFill>
+                  <a:srgbClr val="334E68"/>
+                </a:solidFill>
+                <a:latin typeface="Calibri"/>
+              </a:rPr>
+              <a:t>auth.py · app.py · pages/shared_styles.py</a:t>
+            </a:r>
+          </a:p>
+        </p:txBody>
+      </p:sp>
+      <p:sp>
+        <p:nvSpPr>
+          <p:cNvPr id="20" name="Rounded Rectangle 19"/>
+          <p:cNvSpPr/>
+          <p:nvPr/>
+        </p:nvSpPr>
+        <p:spPr>
+          <a:xfrm>
+            <a:off x="6355080" y="3977640"/>
+            <a:ext cx="5486400" cy="2057400"/>
+          </a:xfrm>
+          <a:prstGeom prst="roundRect">
+            <a:avLst/>
+          </a:prstGeom>
+          <a:solidFill>
+            <a:srgbClr val="ECFDF5"/>
+          </a:solidFill>
+          <a:ln w="9525">
+            <a:solidFill>
+              <a:srgbClr val="99E8D2"/>
+            </a:solidFill>
+          </a:ln>
+          <a:effectLst/>
+        </p:spPr>
+        <p:style>
+          <a:lnRef idx="1">
+            <a:schemeClr val="accent1"/>
+          </a:lnRef>
+          <a:fillRef idx="3">
+            <a:schemeClr val="accent1"/>
+          </a:fillRef>
+          <a:effectRef idx="2">
+            <a:schemeClr val="accent1"/>
+          </a:effectRef>
+          <a:fontRef idx="minor">
+            <a:schemeClr val="lt1"/>
+          </a:fontRef>
+        </p:style>
+        <p:txBody>
+          <a:bodyPr rtlCol="0" anchor="ctr"/>
+          <a:lstStyle/>
+          <a:p>
+            <a:pPr algn="ctr"/>
+          </a:p>
+        </p:txBody>
+      </p:sp>
+      <p:sp>
+        <p:nvSpPr>
+          <p:cNvPr id="21" name="TextBox 20"/>
+          <p:cNvSpPr txBox="1"/>
+          <p:nvPr/>
+        </p:nvSpPr>
+        <p:spPr>
+          <a:xfrm>
+            <a:off x="6537960" y="4069080"/>
+            <a:ext cx="5120640" cy="274320"/>
+          </a:xfrm>
+          <a:prstGeom prst="rect">
+            <a:avLst/>
+          </a:prstGeom>
+          <a:noFill/>
+        </p:spPr>
+        <p:txBody>
+          <a:bodyPr wrap="none">
+            <a:spAutoFit/>
+          </a:bodyPr>
+          <a:lstStyle/>
+          <a:p>
+            <a:r>
+              <a:rPr sz="1100" b="1">
+                <a:solidFill>
+                  <a:srgbClr val="0E4F8A"/>
+                </a:solidFill>
+                <a:latin typeface="Calibri"/>
+              </a:rPr>
+              <a:t>OUTCOME</a:t>
+            </a:r>
+          </a:p>
+        </p:txBody>
+      </p:sp>
+      <p:sp>
+        <p:nvSpPr>
+          <p:cNvPr id="22" name="TextBox 21"/>
+          <p:cNvSpPr txBox="1"/>
+          <p:nvPr/>
+        </p:nvSpPr>
+        <p:spPr>
+          <a:xfrm>
+            <a:off x="6537960" y="4480560"/>
+            <a:ext cx="5120640" cy="1463040"/>
+          </a:xfrm>
+          <a:prstGeom prst="rect">
+            <a:avLst/>
+          </a:prstGeom>
+          <a:noFill/>
+        </p:spPr>
+        <p:txBody>
+          <a:bodyPr wrap="square">
+            <a:spAutoFit/>
+          </a:bodyPr>
+          <a:lstStyle/>
+          <a:p>
+            <a:r>
+              <a:rPr sz="1100" b="0">
+                <a:solidFill>
+                  <a:srgbClr val="334E68"/>
+                </a:solidFill>
+                <a:latin typeface="Calibri"/>
+              </a:rPr>
+              <a:t>A polished, themed login experience that detects role and routes each user to the right dashboard without extra clicks.</a:t>
+            </a:r>
+          </a:p>
+        </p:txBody>
+      </p:sp>
+    </p:spTree>
+  </p:cSld>
+  <p:clrMapOvr>
+    <a:masterClrMapping/>
+  </p:clrMapOvr>
+</p:sld>
+</file>
+
+<file path=ppt/slides/slide16.xml><?xml version="1.0" encoding="utf-8"?>
+<p:sld xmlns:a="http://schemas.openxmlformats.org/drawingml/2006/main" xmlns:p="http://schemas.openxmlformats.org/presentationml/2006/main" xmlns:r="http://schemas.openxmlformats.org/officeDocument/2006/relationships">
+  <p:cSld>
+    <p:spTree>
+      <p:nvGrpSpPr>
+        <p:cNvPr id="1" name=""/>
+        <p:cNvGrpSpPr/>
+        <p:nvPr/>
+      </p:nvGrpSpPr>
+      <p:grpSpPr/>
+      <p:sp>
+        <p:nvSpPr>
+          <p:cNvPr id="2" name="Rectangle 1"/>
+          <p:cNvSpPr/>
+          <p:nvPr/>
+        </p:nvSpPr>
+        <p:spPr>
+          <a:xfrm>
+            <a:off x="502920" y="502920"/>
+            <a:ext cx="109728" cy="502920"/>
+          </a:xfrm>
+          <a:prstGeom prst="rect">
+            <a:avLst/>
+          </a:prstGeom>
+          <a:solidFill>
+            <a:srgbClr val="14B8A6"/>
+          </a:solidFill>
+          <a:ln>
+            <a:noFill/>
+          </a:ln>
+        </p:spPr>
+        <p:style>
+          <a:lnRef idx="1">
+            <a:schemeClr val="accent1"/>
+          </a:lnRef>
+          <a:fillRef idx="3">
+            <a:schemeClr val="accent1"/>
+          </a:fillRef>
+          <a:effectRef idx="2">
+            <a:schemeClr val="accent1"/>
+          </a:effectRef>
+          <a:fontRef idx="minor">
+            <a:schemeClr val="lt1"/>
+          </a:fontRef>
+        </p:style>
+        <p:txBody>
+          <a:bodyPr rtlCol="0" anchor="ctr"/>
+          <a:lstStyle/>
+          <a:p>
+            <a:pPr algn="ctr"/>
+          </a:p>
+        </p:txBody>
+      </p:sp>
+      <p:sp>
+        <p:nvSpPr>
+          <p:cNvPr id="3" name="TextBox 2"/>
+          <p:cNvSpPr txBox="1"/>
+          <p:nvPr/>
+        </p:nvSpPr>
+        <p:spPr>
+          <a:xfrm>
+            <a:off x="713232" y="457200"/>
+            <a:ext cx="10972800" cy="256032"/>
+          </a:xfrm>
+          <a:prstGeom prst="rect">
+            <a:avLst/>
+          </a:prstGeom>
+          <a:noFill/>
+        </p:spPr>
+        <p:txBody>
+          <a:bodyPr wrap="none">
+            <a:spAutoFit/>
+          </a:bodyPr>
+          <a:lstStyle/>
+          <a:p>
+            <a:r>
+              <a:rPr sz="1000" b="1">
+                <a:solidFill>
+                  <a:srgbClr val="14B8A6"/>
+                </a:solidFill>
+                <a:latin typeface="Calibri"/>
+              </a:rPr>
+              <a:t>MILESTONE 02</a:t>
+            </a:r>
+          </a:p>
+        </p:txBody>
+      </p:sp>
+      <p:sp>
+        <p:nvSpPr>
+          <p:cNvPr id="4" name="TextBox 3"/>
+          <p:cNvSpPr txBox="1"/>
+          <p:nvPr/>
+        </p:nvSpPr>
+        <p:spPr>
+          <a:xfrm>
+            <a:off x="713232" y="713232"/>
+            <a:ext cx="11155680" cy="502920"/>
+          </a:xfrm>
+          <a:prstGeom prst="rect">
+            <a:avLst/>
+          </a:prstGeom>
+          <a:noFill/>
+        </p:spPr>
+        <p:txBody>
+          <a:bodyPr wrap="none">
+            <a:spAutoFit/>
+          </a:bodyPr>
+          <a:lstStyle/>
+          <a:p>
+            <a:r>
+              <a:rPr sz="2600" b="1">
+                <a:solidFill>
+                  <a:srgbClr val="0F172A"/>
+                </a:solidFill>
+                <a:latin typeface="Calibri"/>
+              </a:rPr>
+              <a:t>Chatbot + appointment booking + DB link</a:t>
+            </a:r>
+          </a:p>
+        </p:txBody>
+      </p:sp>
+      <p:sp>
+        <p:nvSpPr>
+          <p:cNvPr id="5" name="TextBox 4"/>
+          <p:cNvSpPr txBox="1"/>
+          <p:nvPr/>
+        </p:nvSpPr>
+        <p:spPr>
+          <a:xfrm>
+            <a:off x="713232" y="1234440"/>
+            <a:ext cx="11155680" cy="365760"/>
+          </a:xfrm>
+          <a:prstGeom prst="rect">
+            <a:avLst/>
+          </a:prstGeom>
+          <a:noFill/>
+        </p:spPr>
+        <p:txBody>
+          <a:bodyPr wrap="none">
+            <a:spAutoFit/>
+          </a:bodyPr>
+          <a:lstStyle/>
+          <a:p>
+            <a:r>
+              <a:rPr sz="1200">
+                <a:solidFill>
+                  <a:srgbClr val="64748B"/>
+                </a:solidFill>
+                <a:latin typeface="Calibri"/>
+              </a:rPr>
+              <a:t>Installed the AI chatbot, taught it to book appointments, and wired it to the local database.</a:t>
+            </a:r>
+          </a:p>
+        </p:txBody>
+      </p:sp>
+      <p:cxnSp>
+        <p:nvCxnSpPr>
+          <p:cNvPr id="6" name="Connector 5"/>
+          <p:cNvCxnSpPr/>
+          <p:nvPr/>
+        </p:nvCxnSpPr>
+        <p:spPr>
+          <a:xfrm>
+            <a:off x="713232" y="1627632"/>
+            <a:ext cx="10808208" cy="0"/>
+          </a:xfrm>
+          <a:prstGeom prst="line">
+            <a:avLst/>
+          </a:prstGeom>
+          <a:ln w="9525">
+            <a:solidFill>
+              <a:srgbClr val="E2E8F0"/>
+            </a:solidFill>
+          </a:ln>
+        </p:spPr>
+        <p:style>
+          <a:lnRef idx="2">
+            <a:schemeClr val="accent1"/>
+          </a:lnRef>
+          <a:fillRef idx="0">
+            <a:schemeClr val="accent1"/>
+          </a:fillRef>
+          <a:effectRef idx="1">
+            <a:schemeClr val="accent1"/>
+          </a:effectRef>
+          <a:fontRef idx="minor">
+            <a:schemeClr val="tx1"/>
+          </a:fontRef>
+        </p:style>
+      </p:cxnSp>
+      <p:sp>
+        <p:nvSpPr>
+          <p:cNvPr id="7" name="Rectangle 6"/>
+          <p:cNvSpPr/>
+          <p:nvPr/>
+        </p:nvSpPr>
+        <p:spPr>
+          <a:xfrm>
+            <a:off x="0" y="6565392"/>
+            <a:ext cx="12191695" cy="292608"/>
+          </a:xfrm>
+          <a:prstGeom prst="rect">
+            <a:avLst/>
+          </a:prstGeom>
+          <a:solidFill>
+            <a:srgbClr val="F8FAFC"/>
+          </a:solidFill>
+          <a:ln>
+            <a:noFill/>
+          </a:ln>
+        </p:spPr>
+        <p:style>
+          <a:lnRef idx="1">
+            <a:schemeClr val="accent1"/>
+          </a:lnRef>
+          <a:fillRef idx="3">
+            <a:schemeClr val="accent1"/>
+          </a:fillRef>
+          <a:effectRef idx="2">
+            <a:schemeClr val="accent1"/>
+          </a:effectRef>
+          <a:fontRef idx="minor">
+            <a:schemeClr val="lt1"/>
+          </a:fontRef>
+        </p:style>
+        <p:txBody>
+          <a:bodyPr rtlCol="0" anchor="ctr"/>
+          <a:lstStyle/>
+          <a:p>
+            <a:pPr algn="ctr"/>
+          </a:p>
+        </p:txBody>
+      </p:sp>
+      <p:sp>
+        <p:nvSpPr>
+          <p:cNvPr id="8" name="TextBox 7"/>
+          <p:cNvSpPr txBox="1"/>
+          <p:nvPr/>
+        </p:nvSpPr>
+        <p:spPr>
+          <a:xfrm>
+            <a:off x="365760" y="6601968"/>
+            <a:ext cx="8229600" cy="228600"/>
+          </a:xfrm>
+          <a:prstGeom prst="rect">
+            <a:avLst/>
+          </a:prstGeom>
+          <a:noFill/>
+        </p:spPr>
+        <p:txBody>
+          <a:bodyPr wrap="none">
+            <a:spAutoFit/>
+          </a:bodyPr>
+          <a:lstStyle/>
+          <a:p>
+            <a:r>
+              <a:rPr sz="900">
+                <a:solidFill>
+                  <a:srgbClr val="64748B"/>
+                </a:solidFill>
+                <a:latin typeface="Calibri"/>
+              </a:rPr>
+              <a:t>IPCMS — Integrated Patient Care Management System</a:t>
+            </a:r>
+          </a:p>
+        </p:txBody>
+      </p:sp>
+      <p:sp>
+        <p:nvSpPr>
+          <p:cNvPr id="9" name="TextBox 8"/>
+          <p:cNvSpPr txBox="1"/>
+          <p:nvPr/>
+        </p:nvSpPr>
+        <p:spPr>
+          <a:xfrm>
+            <a:off x="10607040" y="6601968"/>
+            <a:ext cx="1280160" cy="228600"/>
+          </a:xfrm>
+          <a:prstGeom prst="rect">
+            <a:avLst/>
+          </a:prstGeom>
+          <a:noFill/>
+        </p:spPr>
+        <p:txBody>
+          <a:bodyPr wrap="none">
+            <a:spAutoFit/>
+          </a:bodyPr>
+          <a:lstStyle/>
+          <a:p>
+            <a:pPr algn="r"/>
+            <a:r>
+              <a:rPr sz="900">
+                <a:solidFill>
+                  <a:srgbClr val="64748B"/>
+                </a:solidFill>
+                <a:latin typeface="Calibri"/>
+              </a:rPr>
+              <a:t>17 / 24</a:t>
+            </a:r>
+          </a:p>
+        </p:txBody>
+      </p:sp>
+      <p:sp>
+        <p:nvSpPr>
+          <p:cNvPr id="10" name="Rounded Rectangle 9"/>
+          <p:cNvSpPr/>
+          <p:nvPr/>
+        </p:nvSpPr>
+        <p:spPr>
+          <a:xfrm>
+            <a:off x="502920" y="1828800"/>
+            <a:ext cx="5669280" cy="4206240"/>
+          </a:xfrm>
+          <a:prstGeom prst="roundRect">
+            <a:avLst/>
+          </a:prstGeom>
+          <a:solidFill>
+            <a:srgbClr val="F8FAFC"/>
+          </a:solidFill>
+          <a:ln w="9525">
+            <a:solidFill>
+              <a:srgbClr val="E2E8F0"/>
+            </a:solidFill>
+          </a:ln>
+          <a:effectLst/>
+        </p:spPr>
+        <p:style>
+          <a:lnRef idx="1">
+            <a:schemeClr val="accent1"/>
+          </a:lnRef>
+          <a:fillRef idx="3">
+            <a:schemeClr val="accent1"/>
+          </a:fillRef>
+          <a:effectRef idx="2">
+            <a:schemeClr val="accent1"/>
+          </a:effectRef>
+          <a:fontRef idx="minor">
+            <a:schemeClr val="lt1"/>
+          </a:fontRef>
+        </p:style>
+        <p:txBody>
+          <a:bodyPr rtlCol="0" anchor="ctr"/>
+          <a:lstStyle/>
+          <a:p>
+            <a:pPr algn="ctr"/>
+          </a:p>
+        </p:txBody>
+      </p:sp>
+      <p:sp>
+        <p:nvSpPr>
+          <p:cNvPr id="11" name="TextBox 10"/>
+          <p:cNvSpPr txBox="1"/>
+          <p:nvPr/>
+        </p:nvSpPr>
+        <p:spPr>
+          <a:xfrm>
+            <a:off x="685800" y="1920240"/>
+            <a:ext cx="5486400" cy="274320"/>
+          </a:xfrm>
+          <a:prstGeom prst="rect">
+            <a:avLst/>
+          </a:prstGeom>
+          <a:noFill/>
+        </p:spPr>
+        <p:txBody>
+          <a:bodyPr wrap="none">
+            <a:spAutoFit/>
+          </a:bodyPr>
+          <a:lstStyle/>
+          <a:p>
+            <a:r>
+              <a:rPr sz="1100" b="1">
+                <a:solidFill>
+                  <a:srgbClr val="0E4F8A"/>
+                </a:solidFill>
+                <a:latin typeface="Calibri"/>
+              </a:rPr>
+              <a:t>WHAT WAS BUILT</a:t>
+            </a:r>
+          </a:p>
+        </p:txBody>
+      </p:sp>
+      <p:sp>
+        <p:nvSpPr>
+          <p:cNvPr id="12" name="TextBox 11"/>
+          <p:cNvSpPr txBox="1"/>
+          <p:nvPr/>
+        </p:nvSpPr>
+        <p:spPr>
+          <a:xfrm>
+            <a:off x="685800" y="2331720"/>
+            <a:ext cx="5486400" cy="365760"/>
+          </a:xfrm>
+          <a:prstGeom prst="rect">
+            <a:avLst/>
+          </a:prstGeom>
+          <a:noFill/>
+        </p:spPr>
+        <p:txBody>
+          <a:bodyPr wrap="square">
+            <a:spAutoFit/>
+          </a:bodyPr>
+          <a:lstStyle/>
+          <a:p>
+            <a:r>
+              <a:rPr sz="1100" b="0">
+                <a:solidFill>
+                  <a:srgbClr val="334E68"/>
+                </a:solidFill>
+                <a:latin typeface="Calibri"/>
+              </a:rPr>
+              <a:t>•  Public chatbot on the home page (pre-login)</a:t>
+            </a:r>
+          </a:p>
+        </p:txBody>
+      </p:sp>
+      <p:sp>
+        <p:nvSpPr>
+          <p:cNvPr id="13" name="TextBox 12"/>
+          <p:cNvSpPr txBox="1"/>
+          <p:nvPr/>
+        </p:nvSpPr>
+        <p:spPr>
+          <a:xfrm>
+            <a:off x="685800" y="2697480"/>
+            <a:ext cx="5486400" cy="365760"/>
+          </a:xfrm>
+          <a:prstGeom prst="rect">
+            <a:avLst/>
+          </a:prstGeom>
+          <a:noFill/>
+        </p:spPr>
+        <p:txBody>
+          <a:bodyPr wrap="square">
+            <a:spAutoFit/>
+          </a:bodyPr>
+          <a:lstStyle/>
+          <a:p>
+            <a:r>
+              <a:rPr sz="1100" b="0">
+                <a:solidFill>
+                  <a:srgbClr val="334E68"/>
+                </a:solidFill>
+                <a:latin typeface="Calibri"/>
+              </a:rPr>
+              <a:t>•  Always-on voice chatbot widget pinned to every page</a:t>
+            </a:r>
+          </a:p>
+        </p:txBody>
+      </p:sp>
+      <p:sp>
+        <p:nvSpPr>
+          <p:cNvPr id="14" name="TextBox 13"/>
+          <p:cNvSpPr txBox="1"/>
+          <p:nvPr/>
+        </p:nvSpPr>
+        <p:spPr>
+          <a:xfrm>
+            <a:off x="685800" y="3063240"/>
+            <a:ext cx="5486400" cy="365760"/>
+          </a:xfrm>
+          <a:prstGeom prst="rect">
+            <a:avLst/>
+          </a:prstGeom>
+          <a:noFill/>
+        </p:spPr>
+        <p:txBody>
+          <a:bodyPr wrap="square">
+            <a:spAutoFit/>
+          </a:bodyPr>
+          <a:lstStyle/>
+          <a:p>
+            <a:r>
+              <a:rPr sz="1100" b="0">
+                <a:solidFill>
+                  <a:srgbClr val="334E68"/>
+                </a:solidFill>
+                <a:latin typeface="Calibri"/>
+              </a:rPr>
+              <a:t>•  NLP-based appointment booking through the chatbot</a:t>
+            </a:r>
+          </a:p>
+        </p:txBody>
+      </p:sp>
+      <p:sp>
+        <p:nvSpPr>
+          <p:cNvPr id="15" name="TextBox 14"/>
+          <p:cNvSpPr txBox="1"/>
+          <p:nvPr/>
+        </p:nvSpPr>
+        <p:spPr>
+          <a:xfrm>
+            <a:off x="685800" y="3429000"/>
+            <a:ext cx="5486400" cy="365760"/>
+          </a:xfrm>
+          <a:prstGeom prst="rect">
+            <a:avLst/>
+          </a:prstGeom>
+          <a:noFill/>
+        </p:spPr>
+        <p:txBody>
+          <a:bodyPr wrap="square">
+            <a:spAutoFit/>
+          </a:bodyPr>
+          <a:lstStyle/>
+          <a:p>
+            <a:r>
+              <a:rPr sz="1100" b="0">
+                <a:solidFill>
+                  <a:srgbClr val="334E68"/>
+                </a:solidFill>
+                <a:latin typeface="Calibri"/>
+              </a:rPr>
+              <a:t>•  Chatbot connected to local MySQL/SQLite DB</a:t>
+            </a:r>
+          </a:p>
+        </p:txBody>
+      </p:sp>
+      <p:sp>
+        <p:nvSpPr>
+          <p:cNvPr id="16" name="TextBox 15"/>
+          <p:cNvSpPr txBox="1"/>
+          <p:nvPr/>
+        </p:nvSpPr>
+        <p:spPr>
+          <a:xfrm>
+            <a:off x="685800" y="3794760"/>
+            <a:ext cx="5486400" cy="365760"/>
+          </a:xfrm>
+          <a:prstGeom prst="rect">
+            <a:avLst/>
+          </a:prstGeom>
+          <a:noFill/>
+        </p:spPr>
+        <p:txBody>
+          <a:bodyPr wrap="square">
+            <a:spAutoFit/>
+          </a:bodyPr>
+          <a:lstStyle/>
+          <a:p>
+            <a:r>
+              <a:rPr sz="1100" b="0">
+                <a:solidFill>
+                  <a:srgbClr val="334E68"/>
+                </a:solidFill>
+                <a:latin typeface="Calibri"/>
+              </a:rPr>
+              <a:t>•  Reads doctors, slots, and visits tables to answer in context</a:t>
+            </a:r>
+          </a:p>
+        </p:txBody>
+      </p:sp>
+      <p:sp>
+        <p:nvSpPr>
+          <p:cNvPr id="17" name="Rounded Rectangle 16"/>
+          <p:cNvSpPr/>
+          <p:nvPr/>
+        </p:nvSpPr>
+        <p:spPr>
+          <a:xfrm>
+            <a:off x="6355080" y="1828800"/>
+            <a:ext cx="5486400" cy="2011680"/>
+          </a:xfrm>
+          <a:prstGeom prst="roundRect">
+            <a:avLst/>
+          </a:prstGeom>
+          <a:solidFill>
+            <a:srgbClr val="F8FAFC"/>
+          </a:solidFill>
+          <a:ln w="9525">
+            <a:solidFill>
+              <a:srgbClr val="E2E8F0"/>
+            </a:solidFill>
+          </a:ln>
+          <a:effectLst/>
+        </p:spPr>
+        <p:style>
+          <a:lnRef idx="1">
+            <a:schemeClr val="accent1"/>
+          </a:lnRef>
+          <a:fillRef idx="3">
+            <a:schemeClr val="accent1"/>
+          </a:fillRef>
+          <a:effectRef idx="2">
+            <a:schemeClr val="accent1"/>
+          </a:effectRef>
+          <a:fontRef idx="minor">
+            <a:schemeClr val="lt1"/>
+          </a:fontRef>
+        </p:style>
+        <p:txBody>
+          <a:bodyPr rtlCol="0" anchor="ctr"/>
+          <a:lstStyle/>
+          <a:p>
+            <a:pPr algn="ctr"/>
+          </a:p>
+        </p:txBody>
+      </p:sp>
+      <p:sp>
+        <p:nvSpPr>
+          <p:cNvPr id="18" name="TextBox 17"/>
+          <p:cNvSpPr txBox="1"/>
+          <p:nvPr/>
+        </p:nvSpPr>
+        <p:spPr>
+          <a:xfrm>
+            <a:off x="6537960" y="1920240"/>
+            <a:ext cx="5120640" cy="274320"/>
+          </a:xfrm>
+          <a:prstGeom prst="rect">
+            <a:avLst/>
+          </a:prstGeom>
+          <a:noFill/>
+        </p:spPr>
+        <p:txBody>
+          <a:bodyPr wrap="none">
+            <a:spAutoFit/>
+          </a:bodyPr>
+          <a:lstStyle/>
+          <a:p>
+            <a:r>
+              <a:rPr sz="1100" b="1">
+                <a:solidFill>
+                  <a:srgbClr val="0E4F8A"/>
+                </a:solidFill>
+                <a:latin typeface="Calibri"/>
+              </a:rPr>
+              <a:t>FILES / MODULES</a:t>
+            </a:r>
+          </a:p>
+        </p:txBody>
+      </p:sp>
+      <p:sp>
+        <p:nvSpPr>
+          <p:cNvPr id="19" name="TextBox 18"/>
+          <p:cNvSpPr txBox="1"/>
+          <p:nvPr/>
+        </p:nvSpPr>
+        <p:spPr>
+          <a:xfrm>
+            <a:off x="6537960" y="2331720"/>
+            <a:ext cx="5120640" cy="1463040"/>
+          </a:xfrm>
+          <a:prstGeom prst="rect">
+            <a:avLst/>
+          </a:prstGeom>
+          <a:noFill/>
+        </p:spPr>
+        <p:txBody>
+          <a:bodyPr wrap="square">
+            <a:spAutoFit/>
+          </a:bodyPr>
+          <a:lstStyle/>
+          <a:p>
+            <a:r>
+              <a:rPr sz="1100" b="0">
+                <a:solidFill>
+                  <a:srgbClr val="334E68"/>
+                </a:solidFill>
+                <a:latin typeface="Calibri"/>
+              </a:rPr>
+              <a:t>chatbot.py · voice_chatbot.py · ai_care.py · db.py</a:t>
+            </a:r>
+          </a:p>
+        </p:txBody>
+      </p:sp>
+      <p:sp>
+        <p:nvSpPr>
+          <p:cNvPr id="20" name="Rounded Rectangle 19"/>
+          <p:cNvSpPr/>
+          <p:nvPr/>
+        </p:nvSpPr>
+        <p:spPr>
+          <a:xfrm>
+            <a:off x="6355080" y="3977640"/>
+            <a:ext cx="5486400" cy="2057400"/>
+          </a:xfrm>
+          <a:prstGeom prst="roundRect">
+            <a:avLst/>
+          </a:prstGeom>
+          <a:solidFill>
+            <a:srgbClr val="ECFDF5"/>
+          </a:solidFill>
+          <a:ln w="9525">
+            <a:solidFill>
+              <a:srgbClr val="99E8D2"/>
+            </a:solidFill>
+          </a:ln>
+          <a:effectLst/>
+        </p:spPr>
+        <p:style>
+          <a:lnRef idx="1">
+            <a:schemeClr val="accent1"/>
+          </a:lnRef>
+          <a:fillRef idx="3">
+            <a:schemeClr val="accent1"/>
+          </a:fillRef>
+          <a:effectRef idx="2">
+            <a:schemeClr val="accent1"/>
+          </a:effectRef>
+          <a:fontRef idx="minor">
+            <a:schemeClr val="lt1"/>
+          </a:fontRef>
+        </p:style>
+        <p:txBody>
+          <a:bodyPr rtlCol="0" anchor="ctr"/>
+          <a:lstStyle/>
+          <a:p>
+            <a:pPr algn="ctr"/>
+          </a:p>
+        </p:txBody>
+      </p:sp>
+      <p:sp>
+        <p:nvSpPr>
+          <p:cNvPr id="21" name="TextBox 20"/>
+          <p:cNvSpPr txBox="1"/>
+          <p:nvPr/>
+        </p:nvSpPr>
+        <p:spPr>
+          <a:xfrm>
+            <a:off x="6537960" y="4069080"/>
+            <a:ext cx="5120640" cy="274320"/>
+          </a:xfrm>
+          <a:prstGeom prst="rect">
+            <a:avLst/>
+          </a:prstGeom>
+          <a:noFill/>
+        </p:spPr>
+        <p:txBody>
+          <a:bodyPr wrap="none">
+            <a:spAutoFit/>
+          </a:bodyPr>
+          <a:lstStyle/>
+          <a:p>
+            <a:r>
+              <a:rPr sz="1100" b="1">
+                <a:solidFill>
+                  <a:srgbClr val="0E4F8A"/>
+                </a:solidFill>
+                <a:latin typeface="Calibri"/>
+              </a:rPr>
+              <a:t>OUTCOME</a:t>
+            </a:r>
+          </a:p>
+        </p:txBody>
+      </p:sp>
+      <p:sp>
+        <p:nvSpPr>
+          <p:cNvPr id="22" name="TextBox 21"/>
+          <p:cNvSpPr txBox="1"/>
+          <p:nvPr/>
+        </p:nvSpPr>
+        <p:spPr>
+          <a:xfrm>
+            <a:off x="6537960" y="4480560"/>
+            <a:ext cx="5120640" cy="1463040"/>
+          </a:xfrm>
+          <a:prstGeom prst="rect">
+            <a:avLst/>
+          </a:prstGeom>
+          <a:noFill/>
+        </p:spPr>
+        <p:txBody>
+          <a:bodyPr wrap="square">
+            <a:spAutoFit/>
+          </a:bodyPr>
+          <a:lstStyle/>
+          <a:p>
+            <a:r>
+              <a:rPr sz="1100" b="0">
+                <a:solidFill>
+                  <a:srgbClr val="334E68"/>
+                </a:solidFill>
+                <a:latin typeface="Calibri"/>
+              </a:rPr>
+              <a:t>Patients can ask in natural language — 'book Dr. Sharma tomorrow 4pm' — and the chatbot checks real DB state before confirming the slot.</a:t>
+            </a:r>
+          </a:p>
+        </p:txBody>
+      </p:sp>
+    </p:spTree>
+  </p:cSld>
+  <p:clrMapOvr>
+    <a:masterClrMapping/>
+  </p:clrMapOvr>
+</p:sld>
+</file>
+
+<file path=ppt/slides/slide17.xml><?xml version="1.0" encoding="utf-8"?>
+<p:sld xmlns:a="http://schemas.openxmlformats.org/drawingml/2006/main" xmlns:p="http://schemas.openxmlformats.org/presentationml/2006/main" xmlns:r="http://schemas.openxmlformats.org/officeDocument/2006/relationships">
+  <p:cSld>
+    <p:spTree>
+      <p:nvGrpSpPr>
+        <p:cNvPr id="1" name=""/>
+        <p:cNvGrpSpPr/>
+        <p:nvPr/>
+      </p:nvGrpSpPr>
+      <p:grpSpPr/>
+      <p:sp>
+        <p:nvSpPr>
+          <p:cNvPr id="2" name="Rectangle 1"/>
+          <p:cNvSpPr/>
+          <p:nvPr/>
+        </p:nvSpPr>
+        <p:spPr>
+          <a:xfrm>
+            <a:off x="502920" y="502920"/>
+            <a:ext cx="109728" cy="502920"/>
+          </a:xfrm>
+          <a:prstGeom prst="rect">
+            <a:avLst/>
+          </a:prstGeom>
+          <a:solidFill>
+            <a:srgbClr val="14B8A6"/>
+          </a:solidFill>
+          <a:ln>
+            <a:noFill/>
+          </a:ln>
+        </p:spPr>
+        <p:style>
+          <a:lnRef idx="1">
+            <a:schemeClr val="accent1"/>
+          </a:lnRef>
+          <a:fillRef idx="3">
+            <a:schemeClr val="accent1"/>
+          </a:fillRef>
+          <a:effectRef idx="2">
+            <a:schemeClr val="accent1"/>
+          </a:effectRef>
+          <a:fontRef idx="minor">
+            <a:schemeClr val="lt1"/>
+          </a:fontRef>
+        </p:style>
+        <p:txBody>
+          <a:bodyPr rtlCol="0" anchor="ctr"/>
+          <a:lstStyle/>
+          <a:p>
+            <a:pPr algn="ctr"/>
+          </a:p>
+        </p:txBody>
+      </p:sp>
+      <p:sp>
+        <p:nvSpPr>
+          <p:cNvPr id="3" name="TextBox 2"/>
+          <p:cNvSpPr txBox="1"/>
+          <p:nvPr/>
+        </p:nvSpPr>
+        <p:spPr>
+          <a:xfrm>
+            <a:off x="713232" y="457200"/>
+            <a:ext cx="10972800" cy="256032"/>
+          </a:xfrm>
+          <a:prstGeom prst="rect">
+            <a:avLst/>
+          </a:prstGeom>
+          <a:noFill/>
+        </p:spPr>
+        <p:txBody>
+          <a:bodyPr wrap="none">
+            <a:spAutoFit/>
+          </a:bodyPr>
+          <a:lstStyle/>
+          <a:p>
+            <a:r>
+              <a:rPr sz="1000" b="1">
+                <a:solidFill>
+                  <a:srgbClr val="14B8A6"/>
+                </a:solidFill>
+                <a:latin typeface="Calibri"/>
+              </a:rPr>
+              <a:t>MILESTONE 03</a:t>
+            </a:r>
+          </a:p>
+        </p:txBody>
+      </p:sp>
+      <p:sp>
+        <p:nvSpPr>
+          <p:cNvPr id="4" name="TextBox 3"/>
+          <p:cNvSpPr txBox="1"/>
+          <p:nvPr/>
+        </p:nvSpPr>
+        <p:spPr>
+          <a:xfrm>
+            <a:off x="713232" y="713232"/>
+            <a:ext cx="11155680" cy="502920"/>
+          </a:xfrm>
+          <a:prstGeom prst="rect">
+            <a:avLst/>
+          </a:prstGeom>
+          <a:noFill/>
+        </p:spPr>
+        <p:txBody>
+          <a:bodyPr wrap="none">
+            <a:spAutoFit/>
+          </a:bodyPr>
+          <a:lstStyle/>
+          <a:p>
+            <a:r>
+              <a:rPr sz="2600" b="1">
+                <a:solidFill>
+                  <a:srgbClr val="0F172A"/>
+                </a:solidFill>
+                <a:latin typeface="Calibri"/>
+              </a:rPr>
+              <a:t>Pharmacy, prescriptions &amp; patient purchases</a:t>
+            </a:r>
+          </a:p>
+        </p:txBody>
+      </p:sp>
+      <p:sp>
+        <p:nvSpPr>
+          <p:cNvPr id="5" name="TextBox 4"/>
+          <p:cNvSpPr txBox="1"/>
+          <p:nvPr/>
+        </p:nvSpPr>
+        <p:spPr>
+          <a:xfrm>
+            <a:off x="713232" y="1234440"/>
+            <a:ext cx="11155680" cy="365760"/>
+          </a:xfrm>
+          <a:prstGeom prst="rect">
+            <a:avLst/>
+          </a:prstGeom>
+          <a:noFill/>
+        </p:spPr>
+        <p:txBody>
+          <a:bodyPr wrap="none">
+            <a:spAutoFit/>
+          </a:bodyPr>
+          <a:lstStyle/>
+          <a:p>
+            <a:r>
+              <a:rPr sz="1200">
+                <a:solidFill>
+                  <a:srgbClr val="64748B"/>
+                </a:solidFill>
+                <a:latin typeface="Calibri"/>
+              </a:rPr>
+              <a:t>Added a digital pharmacy with admin-side medicine CRUD and a patient purchase flow.</a:t>
+            </a:r>
+          </a:p>
+        </p:txBody>
+      </p:sp>
+      <p:cxnSp>
+        <p:nvCxnSpPr>
+          <p:cNvPr id="6" name="Connector 5"/>
+          <p:cNvCxnSpPr/>
+          <p:nvPr/>
+        </p:nvCxnSpPr>
+        <p:spPr>
+          <a:xfrm>
+            <a:off x="713232" y="1627632"/>
+            <a:ext cx="10808208" cy="0"/>
+          </a:xfrm>
+          <a:prstGeom prst="line">
+            <a:avLst/>
+          </a:prstGeom>
+          <a:ln w="9525">
+            <a:solidFill>
+              <a:srgbClr val="E2E8F0"/>
+            </a:solidFill>
+          </a:ln>
+        </p:spPr>
+        <p:style>
+          <a:lnRef idx="2">
+            <a:schemeClr val="accent1"/>
+          </a:lnRef>
+          <a:fillRef idx="0">
+            <a:schemeClr val="accent1"/>
+          </a:fillRef>
+          <a:effectRef idx="1">
+            <a:schemeClr val="accent1"/>
+          </a:effectRef>
+          <a:fontRef idx="minor">
+            <a:schemeClr val="tx1"/>
+          </a:fontRef>
+        </p:style>
+      </p:cxnSp>
+      <p:sp>
+        <p:nvSpPr>
+          <p:cNvPr id="7" name="Rectangle 6"/>
+          <p:cNvSpPr/>
+          <p:nvPr/>
+        </p:nvSpPr>
+        <p:spPr>
+          <a:xfrm>
+            <a:off x="0" y="6565392"/>
+            <a:ext cx="12191695" cy="292608"/>
+          </a:xfrm>
+          <a:prstGeom prst="rect">
+            <a:avLst/>
+          </a:prstGeom>
+          <a:solidFill>
+            <a:srgbClr val="F8FAFC"/>
+          </a:solidFill>
+          <a:ln>
+            <a:noFill/>
+          </a:ln>
+        </p:spPr>
+        <p:style>
+          <a:lnRef idx="1">
+            <a:schemeClr val="accent1"/>
+          </a:lnRef>
+          <a:fillRef idx="3">
+            <a:schemeClr val="accent1"/>
+          </a:fillRef>
+          <a:effectRef idx="2">
+            <a:schemeClr val="accent1"/>
+          </a:effectRef>
+          <a:fontRef idx="minor">
+            <a:schemeClr val="lt1"/>
+          </a:fontRef>
+        </p:style>
+        <p:txBody>
+          <a:bodyPr rtlCol="0" anchor="ctr"/>
+          <a:lstStyle/>
+          <a:p>
+            <a:pPr algn="ctr"/>
+          </a:p>
+        </p:txBody>
+      </p:sp>
+      <p:sp>
+        <p:nvSpPr>
+          <p:cNvPr id="8" name="TextBox 7"/>
+          <p:cNvSpPr txBox="1"/>
+          <p:nvPr/>
+        </p:nvSpPr>
+        <p:spPr>
+          <a:xfrm>
+            <a:off x="365760" y="6601968"/>
+            <a:ext cx="8229600" cy="228600"/>
+          </a:xfrm>
+          <a:prstGeom prst="rect">
+            <a:avLst/>
+          </a:prstGeom>
+          <a:noFill/>
+        </p:spPr>
+        <p:txBody>
+          <a:bodyPr wrap="none">
+            <a:spAutoFit/>
+          </a:bodyPr>
+          <a:lstStyle/>
+          <a:p>
+            <a:r>
+              <a:rPr sz="900">
+                <a:solidFill>
+                  <a:srgbClr val="64748B"/>
+                </a:solidFill>
+                <a:latin typeface="Calibri"/>
+              </a:rPr>
+              <a:t>IPCMS — Integrated Patient Care Management System</a:t>
+            </a:r>
+          </a:p>
+        </p:txBody>
+      </p:sp>
+      <p:sp>
+        <p:nvSpPr>
+          <p:cNvPr id="9" name="TextBox 8"/>
+          <p:cNvSpPr txBox="1"/>
+          <p:nvPr/>
+        </p:nvSpPr>
+        <p:spPr>
+          <a:xfrm>
+            <a:off x="10607040" y="6601968"/>
+            <a:ext cx="1280160" cy="228600"/>
+          </a:xfrm>
+          <a:prstGeom prst="rect">
+            <a:avLst/>
+          </a:prstGeom>
+          <a:noFill/>
+        </p:spPr>
+        <p:txBody>
+          <a:bodyPr wrap="none">
+            <a:spAutoFit/>
+          </a:bodyPr>
+          <a:lstStyle/>
+          <a:p>
+            <a:pPr algn="r"/>
+            <a:r>
+              <a:rPr sz="900">
+                <a:solidFill>
+                  <a:srgbClr val="64748B"/>
+                </a:solidFill>
+                <a:latin typeface="Calibri"/>
+              </a:rPr>
+              <a:t>18 / 24</a:t>
+            </a:r>
+          </a:p>
+        </p:txBody>
+      </p:sp>
+      <p:sp>
+        <p:nvSpPr>
+          <p:cNvPr id="10" name="Rounded Rectangle 9"/>
+          <p:cNvSpPr/>
+          <p:nvPr/>
+        </p:nvSpPr>
+        <p:spPr>
+          <a:xfrm>
+            <a:off x="502920" y="1828800"/>
+            <a:ext cx="5669280" cy="4206240"/>
+          </a:xfrm>
+          <a:prstGeom prst="roundRect">
+            <a:avLst/>
+          </a:prstGeom>
+          <a:solidFill>
+            <a:srgbClr val="F8FAFC"/>
+          </a:solidFill>
+          <a:ln w="9525">
+            <a:solidFill>
+              <a:srgbClr val="E2E8F0"/>
+            </a:solidFill>
+          </a:ln>
+          <a:effectLst/>
+        </p:spPr>
+        <p:style>
+          <a:lnRef idx="1">
+            <a:schemeClr val="accent1"/>
+          </a:lnRef>
+          <a:fillRef idx="3">
+            <a:schemeClr val="accent1"/>
+          </a:fillRef>
+          <a:effectRef idx="2">
+            <a:schemeClr val="accent1"/>
+          </a:effectRef>
+          <a:fontRef idx="minor">
+            <a:schemeClr val="lt1"/>
+          </a:fontRef>
+        </p:style>
+        <p:txBody>
+          <a:bodyPr rtlCol="0" anchor="ctr"/>
+          <a:lstStyle/>
+          <a:p>
+            <a:pPr algn="ctr"/>
+          </a:p>
+        </p:txBody>
+      </p:sp>
+      <p:sp>
+        <p:nvSpPr>
+          <p:cNvPr id="11" name="TextBox 10"/>
+          <p:cNvSpPr txBox="1"/>
+          <p:nvPr/>
+        </p:nvSpPr>
+        <p:spPr>
+          <a:xfrm>
+            <a:off x="685800" y="1920240"/>
+            <a:ext cx="5486400" cy="274320"/>
+          </a:xfrm>
+          <a:prstGeom prst="rect">
+            <a:avLst/>
+          </a:prstGeom>
+          <a:noFill/>
+        </p:spPr>
+        <p:txBody>
+          <a:bodyPr wrap="none">
+            <a:spAutoFit/>
+          </a:bodyPr>
+          <a:lstStyle/>
+          <a:p>
+            <a:r>
+              <a:rPr sz="1100" b="1">
+                <a:solidFill>
+                  <a:srgbClr val="0E4F8A"/>
+                </a:solidFill>
+                <a:latin typeface="Calibri"/>
+              </a:rPr>
+              <a:t>WHAT WAS BUILT</a:t>
+            </a:r>
+          </a:p>
+        </p:txBody>
+      </p:sp>
+      <p:sp>
+        <p:nvSpPr>
+          <p:cNvPr id="12" name="TextBox 11"/>
+          <p:cNvSpPr txBox="1"/>
+          <p:nvPr/>
+        </p:nvSpPr>
+        <p:spPr>
+          <a:xfrm>
+            <a:off x="685800" y="2331720"/>
+            <a:ext cx="5486400" cy="365760"/>
+          </a:xfrm>
+          <a:prstGeom prst="rect">
+            <a:avLst/>
+          </a:prstGeom>
+          <a:noFill/>
+        </p:spPr>
+        <p:txBody>
+          <a:bodyPr wrap="square">
+            <a:spAutoFit/>
+          </a:bodyPr>
+          <a:lstStyle/>
+          <a:p>
+            <a:r>
+              <a:rPr sz="1100" b="0">
+                <a:solidFill>
+                  <a:srgbClr val="334E68"/>
+                </a:solidFill>
+                <a:latin typeface="Calibri"/>
+              </a:rPr>
+              <a:t>•  Medicine catalogue with images (Medicine_Images/)</a:t>
+            </a:r>
+          </a:p>
+        </p:txBody>
+      </p:sp>
+      <p:sp>
+        <p:nvSpPr>
+          <p:cNvPr id="13" name="TextBox 12"/>
+          <p:cNvSpPr txBox="1"/>
+          <p:nvPr/>
+        </p:nvSpPr>
+        <p:spPr>
+          <a:xfrm>
+            <a:off x="685800" y="2697480"/>
+            <a:ext cx="5486400" cy="365760"/>
+          </a:xfrm>
+          <a:prstGeom prst="rect">
+            <a:avLst/>
+          </a:prstGeom>
+          <a:noFill/>
+        </p:spPr>
+        <p:txBody>
+          <a:bodyPr wrap="square">
+            <a:spAutoFit/>
+          </a:bodyPr>
+          <a:lstStyle/>
+          <a:p>
+            <a:r>
+              <a:rPr sz="1100" b="0">
+                <a:solidFill>
+                  <a:srgbClr val="334E68"/>
+                </a:solidFill>
+                <a:latin typeface="Calibri"/>
+              </a:rPr>
+              <a:t>•  Admin-side CRUD: add, edit, delete medicines</a:t>
+            </a:r>
+          </a:p>
+        </p:txBody>
+      </p:sp>
+      <p:sp>
+        <p:nvSpPr>
+          <p:cNvPr id="14" name="TextBox 13"/>
+          <p:cNvSpPr txBox="1"/>
+          <p:nvPr/>
+        </p:nvSpPr>
+        <p:spPr>
+          <a:xfrm>
+            <a:off x="685800" y="3063240"/>
+            <a:ext cx="5486400" cy="365760"/>
+          </a:xfrm>
+          <a:prstGeom prst="rect">
+            <a:avLst/>
+          </a:prstGeom>
+          <a:noFill/>
+        </p:spPr>
+        <p:txBody>
+          <a:bodyPr wrap="square">
+            <a:spAutoFit/>
+          </a:bodyPr>
+          <a:lstStyle/>
+          <a:p>
+            <a:r>
+              <a:rPr sz="1100" b="0">
+                <a:solidFill>
+                  <a:srgbClr val="334E68"/>
+                </a:solidFill>
+                <a:latin typeface="Calibri"/>
+              </a:rPr>
+              <a:t>•  Doctor writes prescriptions during consultation</a:t>
+            </a:r>
+          </a:p>
+        </p:txBody>
+      </p:sp>
+      <p:sp>
+        <p:nvSpPr>
+          <p:cNvPr id="15" name="TextBox 14"/>
+          <p:cNvSpPr txBox="1"/>
+          <p:nvPr/>
+        </p:nvSpPr>
+        <p:spPr>
+          <a:xfrm>
+            <a:off x="685800" y="3429000"/>
+            <a:ext cx="5486400" cy="365760"/>
+          </a:xfrm>
+          <a:prstGeom prst="rect">
+            <a:avLst/>
+          </a:prstGeom>
+          <a:noFill/>
+        </p:spPr>
+        <p:txBody>
+          <a:bodyPr wrap="square">
+            <a:spAutoFit/>
+          </a:bodyPr>
+          <a:lstStyle/>
+          <a:p>
+            <a:r>
+              <a:rPr sz="1100" b="0">
+                <a:solidFill>
+                  <a:srgbClr val="334E68"/>
+                </a:solidFill>
+                <a:latin typeface="Calibri"/>
+              </a:rPr>
+              <a:t>•  Auto-generated e-prescription PDF (ReportLab)</a:t>
+            </a:r>
+          </a:p>
+        </p:txBody>
+      </p:sp>
+      <p:sp>
+        <p:nvSpPr>
+          <p:cNvPr id="16" name="TextBox 15"/>
+          <p:cNvSpPr txBox="1"/>
+          <p:nvPr/>
+        </p:nvSpPr>
+        <p:spPr>
+          <a:xfrm>
+            <a:off x="685800" y="3794760"/>
+            <a:ext cx="5486400" cy="365760"/>
+          </a:xfrm>
+          <a:prstGeom prst="rect">
+            <a:avLst/>
+          </a:prstGeom>
+          <a:noFill/>
+        </p:spPr>
+        <p:txBody>
+          <a:bodyPr wrap="square">
+            <a:spAutoFit/>
+          </a:bodyPr>
+          <a:lstStyle/>
+          <a:p>
+            <a:r>
+              <a:rPr sz="1100" b="0">
+                <a:solidFill>
+                  <a:srgbClr val="334E68"/>
+                </a:solidFill>
+                <a:latin typeface="Calibri"/>
+              </a:rPr>
+              <a:t>•  Patient can browse, book and buy medicines in-app</a:t>
+            </a:r>
+          </a:p>
+        </p:txBody>
+      </p:sp>
+      <p:sp>
+        <p:nvSpPr>
+          <p:cNvPr id="17" name="Rounded Rectangle 16"/>
+          <p:cNvSpPr/>
+          <p:nvPr/>
+        </p:nvSpPr>
+        <p:spPr>
+          <a:xfrm>
+            <a:off x="6355080" y="1828800"/>
+            <a:ext cx="5486400" cy="2011680"/>
+          </a:xfrm>
+          <a:prstGeom prst="roundRect">
+            <a:avLst/>
+          </a:prstGeom>
+          <a:solidFill>
+            <a:srgbClr val="F8FAFC"/>
+          </a:solidFill>
+          <a:ln w="9525">
+            <a:solidFill>
+              <a:srgbClr val="E2E8F0"/>
+            </a:solidFill>
+          </a:ln>
+          <a:effectLst/>
+        </p:spPr>
+        <p:style>
+          <a:lnRef idx="1">
+            <a:schemeClr val="accent1"/>
+          </a:lnRef>
+          <a:fillRef idx="3">
+            <a:schemeClr val="accent1"/>
+          </a:fillRef>
+          <a:effectRef idx="2">
+            <a:schemeClr val="accent1"/>
+          </a:effectRef>
+          <a:fontRef idx="minor">
+            <a:schemeClr val="lt1"/>
+          </a:fontRef>
+        </p:style>
+        <p:txBody>
+          <a:bodyPr rtlCol="0" anchor="ctr"/>
+          <a:lstStyle/>
+          <a:p>
+            <a:pPr algn="ctr"/>
+          </a:p>
+        </p:txBody>
+      </p:sp>
+      <p:sp>
+        <p:nvSpPr>
+          <p:cNvPr id="18" name="TextBox 17"/>
+          <p:cNvSpPr txBox="1"/>
+          <p:nvPr/>
+        </p:nvSpPr>
+        <p:spPr>
+          <a:xfrm>
+            <a:off x="6537960" y="1920240"/>
+            <a:ext cx="5120640" cy="274320"/>
+          </a:xfrm>
+          <a:prstGeom prst="rect">
+            <a:avLst/>
+          </a:prstGeom>
+          <a:noFill/>
+        </p:spPr>
+        <p:txBody>
+          <a:bodyPr wrap="none">
+            <a:spAutoFit/>
+          </a:bodyPr>
+          <a:lstStyle/>
+          <a:p>
+            <a:r>
+              <a:rPr sz="1100" b="1">
+                <a:solidFill>
+                  <a:srgbClr val="0E4F8A"/>
+                </a:solidFill>
+                <a:latin typeface="Calibri"/>
+              </a:rPr>
+              <a:t>FILES / MODULES</a:t>
+            </a:r>
+          </a:p>
+        </p:txBody>
+      </p:sp>
+      <p:sp>
+        <p:nvSpPr>
+          <p:cNvPr id="19" name="TextBox 18"/>
+          <p:cNvSpPr txBox="1"/>
+          <p:nvPr/>
+        </p:nvSpPr>
+        <p:spPr>
+          <a:xfrm>
+            <a:off x="6537960" y="2331720"/>
+            <a:ext cx="5120640" cy="1463040"/>
+          </a:xfrm>
+          <a:prstGeom prst="rect">
+            <a:avLst/>
+          </a:prstGeom>
+          <a:noFill/>
+        </p:spPr>
+        <p:txBody>
+          <a:bodyPr wrap="square">
+            <a:spAutoFit/>
+          </a:bodyPr>
+          <a:lstStyle/>
+          <a:p>
+            <a:r>
+              <a:rPr sz="1100" b="0">
+                <a:solidFill>
+                  <a:srgbClr val="334E68"/>
+                </a:solidFill>
+                <a:latin typeface="Calibri"/>
+              </a:rPr>
+              <a:t>add_medicines_admin.py · pages/admin_dashboard.py · pages/patient_dashboard.py · pages/doctor_dashboard.py</a:t>
+            </a:r>
+          </a:p>
+        </p:txBody>
+      </p:sp>
+      <p:sp>
+        <p:nvSpPr>
+          <p:cNvPr id="20" name="Rounded Rectangle 19"/>
+          <p:cNvSpPr/>
+          <p:nvPr/>
+        </p:nvSpPr>
+        <p:spPr>
+          <a:xfrm>
+            <a:off x="6355080" y="3977640"/>
+            <a:ext cx="5486400" cy="2057400"/>
+          </a:xfrm>
+          <a:prstGeom prst="roundRect">
+            <a:avLst/>
+          </a:prstGeom>
+          <a:solidFill>
+            <a:srgbClr val="ECFDF5"/>
+          </a:solidFill>
+          <a:ln w="9525">
+            <a:solidFill>
+              <a:srgbClr val="99E8D2"/>
+            </a:solidFill>
+          </a:ln>
+          <a:effectLst/>
+        </p:spPr>
+        <p:style>
+          <a:lnRef idx="1">
+            <a:schemeClr val="accent1"/>
+          </a:lnRef>
+          <a:fillRef idx="3">
+            <a:schemeClr val="accent1"/>
+          </a:fillRef>
+          <a:effectRef idx="2">
+            <a:schemeClr val="accent1"/>
+          </a:effectRef>
+          <a:fontRef idx="minor">
+            <a:schemeClr val="lt1"/>
+          </a:fontRef>
+        </p:style>
+        <p:txBody>
+          <a:bodyPr rtlCol="0" anchor="ctr"/>
+          <a:lstStyle/>
+          <a:p>
+            <a:pPr algn="ctr"/>
+          </a:p>
+        </p:txBody>
+      </p:sp>
+      <p:sp>
+        <p:nvSpPr>
+          <p:cNvPr id="21" name="TextBox 20"/>
+          <p:cNvSpPr txBox="1"/>
+          <p:nvPr/>
+        </p:nvSpPr>
+        <p:spPr>
+          <a:xfrm>
+            <a:off x="6537960" y="4069080"/>
+            <a:ext cx="5120640" cy="274320"/>
+          </a:xfrm>
+          <a:prstGeom prst="rect">
+            <a:avLst/>
+          </a:prstGeom>
+          <a:noFill/>
+        </p:spPr>
+        <p:txBody>
+          <a:bodyPr wrap="none">
+            <a:spAutoFit/>
+          </a:bodyPr>
+          <a:lstStyle/>
+          <a:p>
+            <a:r>
+              <a:rPr sz="1100" b="1">
+                <a:solidFill>
+                  <a:srgbClr val="0E4F8A"/>
+                </a:solidFill>
+                <a:latin typeface="Calibri"/>
+              </a:rPr>
+              <a:t>OUTCOME</a:t>
+            </a:r>
+          </a:p>
+        </p:txBody>
+      </p:sp>
+      <p:sp>
+        <p:nvSpPr>
+          <p:cNvPr id="22" name="TextBox 21"/>
+          <p:cNvSpPr txBox="1"/>
+          <p:nvPr/>
+        </p:nvSpPr>
+        <p:spPr>
+          <a:xfrm>
+            <a:off x="6537960" y="4480560"/>
+            <a:ext cx="5120640" cy="1463040"/>
+          </a:xfrm>
+          <a:prstGeom prst="rect">
+            <a:avLst/>
+          </a:prstGeom>
+          <a:noFill/>
+        </p:spPr>
+        <p:txBody>
+          <a:bodyPr wrap="square">
+            <a:spAutoFit/>
+          </a:bodyPr>
+          <a:lstStyle/>
+          <a:p>
+            <a:r>
+              <a:rPr sz="1100" b="0">
+                <a:solidFill>
+                  <a:srgbClr val="334E68"/>
+                </a:solidFill>
+                <a:latin typeface="Calibri"/>
+              </a:rPr>
+              <a:t>A closed loop: doctor prescribes → patient sees it → patient can buy the same medicines through the pharmacy, all from one DB.</a:t>
+            </a:r>
+          </a:p>
+        </p:txBody>
+      </p:sp>
+    </p:spTree>
+  </p:cSld>
+  <p:clrMapOvr>
+    <a:masterClrMapping/>
+  </p:clrMapOvr>
+</p:sld>
+</file>
+
+<file path=ppt/slides/slide18.xml><?xml version="1.0" encoding="utf-8"?>
+<p:sld xmlns:a="http://schemas.openxmlformats.org/drawingml/2006/main" xmlns:p="http://schemas.openxmlformats.org/presentationml/2006/main" xmlns:r="http://schemas.openxmlformats.org/officeDocument/2006/relationships">
+  <p:cSld>
+    <p:spTree>
+      <p:nvGrpSpPr>
+        <p:cNvPr id="1" name=""/>
+        <p:cNvGrpSpPr/>
+        <p:nvPr/>
+      </p:nvGrpSpPr>
+      <p:grpSpPr/>
+      <p:sp>
+        <p:nvSpPr>
+          <p:cNvPr id="2" name="Rectangle 1"/>
+          <p:cNvSpPr/>
+          <p:nvPr/>
+        </p:nvSpPr>
+        <p:spPr>
+          <a:xfrm>
+            <a:off x="502920" y="502920"/>
+            <a:ext cx="109728" cy="502920"/>
+          </a:xfrm>
+          <a:prstGeom prst="rect">
+            <a:avLst/>
+          </a:prstGeom>
+          <a:solidFill>
+            <a:srgbClr val="14B8A6"/>
+          </a:solidFill>
+          <a:ln>
+            <a:noFill/>
+          </a:ln>
+        </p:spPr>
+        <p:style>
+          <a:lnRef idx="1">
+            <a:schemeClr val="accent1"/>
+          </a:lnRef>
+          <a:fillRef idx="3">
+            <a:schemeClr val="accent1"/>
+          </a:fillRef>
+          <a:effectRef idx="2">
+            <a:schemeClr val="accent1"/>
+          </a:effectRef>
+          <a:fontRef idx="minor">
+            <a:schemeClr val="lt1"/>
+          </a:fontRef>
+        </p:style>
+        <p:txBody>
+          <a:bodyPr rtlCol="0" anchor="ctr"/>
+          <a:lstStyle/>
+          <a:p>
+            <a:pPr algn="ctr"/>
+          </a:p>
+        </p:txBody>
+      </p:sp>
+      <p:sp>
+        <p:nvSpPr>
+          <p:cNvPr id="3" name="TextBox 2"/>
+          <p:cNvSpPr txBox="1"/>
+          <p:nvPr/>
+        </p:nvSpPr>
+        <p:spPr>
+          <a:xfrm>
+            <a:off x="713232" y="457200"/>
+            <a:ext cx="10972800" cy="256032"/>
+          </a:xfrm>
+          <a:prstGeom prst="rect">
+            <a:avLst/>
+          </a:prstGeom>
+          <a:noFill/>
+        </p:spPr>
+        <p:txBody>
+          <a:bodyPr wrap="none">
+            <a:spAutoFit/>
+          </a:bodyPr>
+          <a:lstStyle/>
+          <a:p>
+            <a:r>
+              <a:rPr sz="1000" b="1">
+                <a:solidFill>
+                  <a:srgbClr val="14B8A6"/>
+                </a:solidFill>
+                <a:latin typeface="Calibri"/>
+              </a:rPr>
+              <a:t>MILESTONE 04</a:t>
+            </a:r>
+          </a:p>
+        </p:txBody>
+      </p:sp>
+      <p:sp>
+        <p:nvSpPr>
+          <p:cNvPr id="4" name="TextBox 3"/>
+          <p:cNvSpPr txBox="1"/>
+          <p:nvPr/>
+        </p:nvSpPr>
+        <p:spPr>
+          <a:xfrm>
+            <a:off x="713232" y="713232"/>
+            <a:ext cx="11155680" cy="502920"/>
+          </a:xfrm>
+          <a:prstGeom prst="rect">
+            <a:avLst/>
+          </a:prstGeom>
+          <a:noFill/>
+        </p:spPr>
+        <p:txBody>
+          <a:bodyPr wrap="none">
+            <a:spAutoFit/>
+          </a:bodyPr>
+          <a:lstStyle/>
+          <a:p>
+            <a:r>
+              <a:rPr sz="2600" b="1">
+                <a:solidFill>
+                  <a:srgbClr val="0F172A"/>
+                </a:solidFill>
+                <a:latin typeface="Calibri"/>
+              </a:rPr>
+              <a:t>OCR, external sources &amp; doctor email onboarding</a:t>
+            </a:r>
+          </a:p>
+        </p:txBody>
+      </p:sp>
+      <p:sp>
+        <p:nvSpPr>
+          <p:cNvPr id="5" name="TextBox 4"/>
+          <p:cNvSpPr txBox="1"/>
+          <p:nvPr/>
+        </p:nvSpPr>
+        <p:spPr>
+          <a:xfrm>
+            <a:off x="713232" y="1234440"/>
+            <a:ext cx="11155680" cy="365760"/>
+          </a:xfrm>
+          <a:prstGeom prst="rect">
+            <a:avLst/>
+          </a:prstGeom>
+          <a:noFill/>
+        </p:spPr>
+        <p:txBody>
+          <a:bodyPr wrap="none">
+            <a:spAutoFit/>
+          </a:bodyPr>
+          <a:lstStyle/>
+          <a:p>
+            <a:r>
+              <a:rPr sz="1200">
+                <a:solidFill>
+                  <a:srgbClr val="64748B"/>
+                </a:solidFill>
+                <a:latin typeface="Calibri"/>
+              </a:rPr>
+              <a:t>Brought external data in (OCR) and pushed notifications out (email credentials).</a:t>
+            </a:r>
+          </a:p>
+        </p:txBody>
+      </p:sp>
+      <p:cxnSp>
+        <p:nvCxnSpPr>
+          <p:cNvPr id="6" name="Connector 5"/>
+          <p:cNvCxnSpPr/>
+          <p:nvPr/>
+        </p:nvCxnSpPr>
+        <p:spPr>
+          <a:xfrm>
+            <a:off x="713232" y="1627632"/>
+            <a:ext cx="10808208" cy="0"/>
+          </a:xfrm>
+          <a:prstGeom prst="line">
+            <a:avLst/>
+          </a:prstGeom>
+          <a:ln w="9525">
+            <a:solidFill>
+              <a:srgbClr val="E2E8F0"/>
+            </a:solidFill>
+          </a:ln>
+        </p:spPr>
+        <p:style>
+          <a:lnRef idx="2">
+            <a:schemeClr val="accent1"/>
+          </a:lnRef>
+          <a:fillRef idx="0">
+            <a:schemeClr val="accent1"/>
+          </a:fillRef>
+          <a:effectRef idx="1">
+            <a:schemeClr val="accent1"/>
+          </a:effectRef>
+          <a:fontRef idx="minor">
+            <a:schemeClr val="tx1"/>
+          </a:fontRef>
+        </p:style>
+      </p:cxnSp>
+      <p:sp>
+        <p:nvSpPr>
+          <p:cNvPr id="7" name="Rectangle 6"/>
+          <p:cNvSpPr/>
+          <p:nvPr/>
+        </p:nvSpPr>
+        <p:spPr>
+          <a:xfrm>
+            <a:off x="0" y="6565392"/>
+            <a:ext cx="12191695" cy="292608"/>
+          </a:xfrm>
+          <a:prstGeom prst="rect">
+            <a:avLst/>
+          </a:prstGeom>
+          <a:solidFill>
+            <a:srgbClr val="F8FAFC"/>
+          </a:solidFill>
+          <a:ln>
+            <a:noFill/>
+          </a:ln>
+        </p:spPr>
+        <p:style>
+          <a:lnRef idx="1">
+            <a:schemeClr val="accent1"/>
+          </a:lnRef>
+          <a:fillRef idx="3">
+            <a:schemeClr val="accent1"/>
+          </a:fillRef>
+          <a:effectRef idx="2">
+            <a:schemeClr val="accent1"/>
+          </a:effectRef>
+          <a:fontRef idx="minor">
+            <a:schemeClr val="lt1"/>
+          </a:fontRef>
+        </p:style>
+        <p:txBody>
+          <a:bodyPr rtlCol="0" anchor="ctr"/>
+          <a:lstStyle/>
+          <a:p>
+            <a:pPr algn="ctr"/>
+          </a:p>
+        </p:txBody>
+      </p:sp>
+      <p:sp>
+        <p:nvSpPr>
+          <p:cNvPr id="8" name="TextBox 7"/>
+          <p:cNvSpPr txBox="1"/>
+          <p:nvPr/>
+        </p:nvSpPr>
+        <p:spPr>
+          <a:xfrm>
+            <a:off x="365760" y="6601968"/>
+            <a:ext cx="8229600" cy="228600"/>
+          </a:xfrm>
+          <a:prstGeom prst="rect">
+            <a:avLst/>
+          </a:prstGeom>
+          <a:noFill/>
+        </p:spPr>
+        <p:txBody>
+          <a:bodyPr wrap="none">
+            <a:spAutoFit/>
+          </a:bodyPr>
+          <a:lstStyle/>
+          <a:p>
+            <a:r>
+              <a:rPr sz="900">
+                <a:solidFill>
+                  <a:srgbClr val="64748B"/>
+                </a:solidFill>
+                <a:latin typeface="Calibri"/>
+              </a:rPr>
+              <a:t>IPCMS — Integrated Patient Care Management System</a:t>
+            </a:r>
+          </a:p>
+        </p:txBody>
+      </p:sp>
+      <p:sp>
+        <p:nvSpPr>
+          <p:cNvPr id="9" name="TextBox 8"/>
+          <p:cNvSpPr txBox="1"/>
+          <p:nvPr/>
+        </p:nvSpPr>
+        <p:spPr>
+          <a:xfrm>
+            <a:off x="10607040" y="6601968"/>
+            <a:ext cx="1280160" cy="228600"/>
+          </a:xfrm>
+          <a:prstGeom prst="rect">
+            <a:avLst/>
+          </a:prstGeom>
+          <a:noFill/>
+        </p:spPr>
+        <p:txBody>
+          <a:bodyPr wrap="none">
+            <a:spAutoFit/>
+          </a:bodyPr>
+          <a:lstStyle/>
+          <a:p>
+            <a:pPr algn="r"/>
+            <a:r>
+              <a:rPr sz="900">
+                <a:solidFill>
+                  <a:srgbClr val="64748B"/>
+                </a:solidFill>
+                <a:latin typeface="Calibri"/>
+              </a:rPr>
+              <a:t>19 / 24</a:t>
+            </a:r>
+          </a:p>
+        </p:txBody>
+      </p:sp>
+      <p:sp>
+        <p:nvSpPr>
+          <p:cNvPr id="10" name="Rounded Rectangle 9"/>
+          <p:cNvSpPr/>
+          <p:nvPr/>
+        </p:nvSpPr>
+        <p:spPr>
+          <a:xfrm>
+            <a:off x="502920" y="1828800"/>
+            <a:ext cx="5669280" cy="4206240"/>
+          </a:xfrm>
+          <a:prstGeom prst="roundRect">
+            <a:avLst/>
+          </a:prstGeom>
+          <a:solidFill>
+            <a:srgbClr val="F8FAFC"/>
+          </a:solidFill>
+          <a:ln w="9525">
+            <a:solidFill>
+              <a:srgbClr val="E2E8F0"/>
+            </a:solidFill>
+          </a:ln>
+          <a:effectLst/>
+        </p:spPr>
+        <p:style>
+          <a:lnRef idx="1">
+            <a:schemeClr val="accent1"/>
+          </a:lnRef>
+          <a:fillRef idx="3">
+            <a:schemeClr val="accent1"/>
+          </a:fillRef>
+          <a:effectRef idx="2">
+            <a:schemeClr val="accent1"/>
+          </a:effectRef>
+          <a:fontRef idx="minor">
+            <a:schemeClr val="lt1"/>
+          </a:fontRef>
+        </p:style>
+        <p:txBody>
+          <a:bodyPr rtlCol="0" anchor="ctr"/>
+          <a:lstStyle/>
+          <a:p>
+            <a:pPr algn="ctr"/>
+          </a:p>
+        </p:txBody>
+      </p:sp>
+      <p:sp>
+        <p:nvSpPr>
+          <p:cNvPr id="11" name="TextBox 10"/>
+          <p:cNvSpPr txBox="1"/>
+          <p:nvPr/>
+        </p:nvSpPr>
+        <p:spPr>
+          <a:xfrm>
+            <a:off x="685800" y="1920240"/>
+            <a:ext cx="5486400" cy="274320"/>
+          </a:xfrm>
+          <a:prstGeom prst="rect">
+            <a:avLst/>
+          </a:prstGeom>
+          <a:noFill/>
+        </p:spPr>
+        <p:txBody>
+          <a:bodyPr wrap="none">
+            <a:spAutoFit/>
+          </a:bodyPr>
+          <a:lstStyle/>
+          <a:p>
+            <a:r>
+              <a:rPr sz="1100" b="1">
+                <a:solidFill>
+                  <a:srgbClr val="0E4F8A"/>
+                </a:solidFill>
+                <a:latin typeface="Calibri"/>
+              </a:rPr>
+              <a:t>WHAT WAS BUILT</a:t>
+            </a:r>
+          </a:p>
+        </p:txBody>
+      </p:sp>
+      <p:sp>
+        <p:nvSpPr>
+          <p:cNvPr id="12" name="TextBox 11"/>
+          <p:cNvSpPr txBox="1"/>
+          <p:nvPr/>
+        </p:nvSpPr>
+        <p:spPr>
+          <a:xfrm>
+            <a:off x="685800" y="2331720"/>
+            <a:ext cx="5486400" cy="365760"/>
+          </a:xfrm>
+          <a:prstGeom prst="rect">
+            <a:avLst/>
+          </a:prstGeom>
+          <a:noFill/>
+        </p:spPr>
+        <p:txBody>
+          <a:bodyPr wrap="square">
+            <a:spAutoFit/>
+          </a:bodyPr>
+          <a:lstStyle/>
+          <a:p>
+            <a:r>
+              <a:rPr sz="1100" b="0">
+                <a:solidFill>
+                  <a:srgbClr val="334E68"/>
+                </a:solidFill>
+                <a:latin typeface="Calibri"/>
+              </a:rPr>
+              <a:t>•  OCR module to read uploaded medical / lab reports</a:t>
+            </a:r>
+          </a:p>
+        </p:txBody>
+      </p:sp>
+      <p:sp>
+        <p:nvSpPr>
+          <p:cNvPr id="13" name="TextBox 12"/>
+          <p:cNvSpPr txBox="1"/>
+          <p:nvPr/>
+        </p:nvSpPr>
+        <p:spPr>
+          <a:xfrm>
+            <a:off x="685800" y="2697480"/>
+            <a:ext cx="5486400" cy="365760"/>
+          </a:xfrm>
+          <a:prstGeom prst="rect">
+            <a:avLst/>
+          </a:prstGeom>
+          <a:noFill/>
+        </p:spPr>
+        <p:txBody>
+          <a:bodyPr wrap="square">
+            <a:spAutoFit/>
+          </a:bodyPr>
+          <a:lstStyle/>
+          <a:p>
+            <a:r>
+              <a:rPr sz="1100" b="0">
+                <a:solidFill>
+                  <a:srgbClr val="334E68"/>
+                </a:solidFill>
+                <a:latin typeface="Calibri"/>
+              </a:rPr>
+              <a:t>•  Connection to an external data source for richer context</a:t>
+            </a:r>
+          </a:p>
+        </p:txBody>
+      </p:sp>
+      <p:sp>
+        <p:nvSpPr>
+          <p:cNvPr id="14" name="TextBox 13"/>
+          <p:cNvSpPr txBox="1"/>
+          <p:nvPr/>
+        </p:nvSpPr>
+        <p:spPr>
+          <a:xfrm>
+            <a:off x="685800" y="3063240"/>
+            <a:ext cx="5486400" cy="365760"/>
+          </a:xfrm>
+          <a:prstGeom prst="rect">
+            <a:avLst/>
+          </a:prstGeom>
+          <a:noFill/>
+        </p:spPr>
+        <p:txBody>
+          <a:bodyPr wrap="square">
+            <a:spAutoFit/>
+          </a:bodyPr>
+          <a:lstStyle/>
+          <a:p>
+            <a:r>
+              <a:rPr sz="1100" b="0">
+                <a:solidFill>
+                  <a:srgbClr val="334E68"/>
+                </a:solidFill>
+                <a:latin typeface="Calibri"/>
+              </a:rPr>
+              <a:t>•  Admin can create a doctor login from the dashboard</a:t>
+            </a:r>
+          </a:p>
+        </p:txBody>
+      </p:sp>
+      <p:sp>
+        <p:nvSpPr>
+          <p:cNvPr id="15" name="TextBox 14"/>
+          <p:cNvSpPr txBox="1"/>
+          <p:nvPr/>
+        </p:nvSpPr>
+        <p:spPr>
+          <a:xfrm>
+            <a:off x="685800" y="3429000"/>
+            <a:ext cx="5486400" cy="365760"/>
+          </a:xfrm>
+          <a:prstGeom prst="rect">
+            <a:avLst/>
+          </a:prstGeom>
+          <a:noFill/>
+        </p:spPr>
+        <p:txBody>
+          <a:bodyPr wrap="square">
+            <a:spAutoFit/>
+          </a:bodyPr>
+          <a:lstStyle/>
+          <a:p>
+            <a:r>
+              <a:rPr sz="1100" b="0">
+                <a:solidFill>
+                  <a:srgbClr val="334E68"/>
+                </a:solidFill>
+                <a:latin typeface="Calibri"/>
+              </a:rPr>
+              <a:t>•  Generated credentials are auto-mailed to that doctor</a:t>
+            </a:r>
+          </a:p>
+        </p:txBody>
+      </p:sp>
+      <p:sp>
+        <p:nvSpPr>
+          <p:cNvPr id="16" name="TextBox 15"/>
+          <p:cNvSpPr txBox="1"/>
+          <p:nvPr/>
+        </p:nvSpPr>
+        <p:spPr>
+          <a:xfrm>
+            <a:off x="685800" y="3794760"/>
+            <a:ext cx="5486400" cy="365760"/>
+          </a:xfrm>
+          <a:prstGeom prst="rect">
+            <a:avLst/>
+          </a:prstGeom>
+          <a:noFill/>
+        </p:spPr>
+        <p:txBody>
+          <a:bodyPr wrap="square">
+            <a:spAutoFit/>
+          </a:bodyPr>
+          <a:lstStyle/>
+          <a:p>
+            <a:r>
+              <a:rPr sz="1100" b="0">
+                <a:solidFill>
+                  <a:srgbClr val="334E68"/>
+                </a:solidFill>
+                <a:latin typeface="Calibri"/>
+              </a:rPr>
+              <a:t>•  Doctor uses the emailed credentials for first sign-in</a:t>
+            </a:r>
+          </a:p>
+        </p:txBody>
+      </p:sp>
+      <p:sp>
+        <p:nvSpPr>
+          <p:cNvPr id="17" name="Rounded Rectangle 16"/>
+          <p:cNvSpPr/>
+          <p:nvPr/>
+        </p:nvSpPr>
+        <p:spPr>
+          <a:xfrm>
+            <a:off x="6355080" y="1828800"/>
+            <a:ext cx="5486400" cy="2011680"/>
+          </a:xfrm>
+          <a:prstGeom prst="roundRect">
+            <a:avLst/>
+          </a:prstGeom>
+          <a:solidFill>
+            <a:srgbClr val="F8FAFC"/>
+          </a:solidFill>
+          <a:ln w="9525">
+            <a:solidFill>
+              <a:srgbClr val="E2E8F0"/>
+            </a:solidFill>
+          </a:ln>
+          <a:effectLst/>
+        </p:spPr>
+        <p:style>
+          <a:lnRef idx="1">
+            <a:schemeClr val="accent1"/>
+          </a:lnRef>
+          <a:fillRef idx="3">
+            <a:schemeClr val="accent1"/>
+          </a:fillRef>
+          <a:effectRef idx="2">
+            <a:schemeClr val="accent1"/>
+          </a:effectRef>
+          <a:fontRef idx="minor">
+            <a:schemeClr val="lt1"/>
+          </a:fontRef>
+        </p:style>
+        <p:txBody>
+          <a:bodyPr rtlCol="0" anchor="ctr"/>
+          <a:lstStyle/>
+          <a:p>
+            <a:pPr algn="ctr"/>
+          </a:p>
+        </p:txBody>
+      </p:sp>
+      <p:sp>
+        <p:nvSpPr>
+          <p:cNvPr id="18" name="TextBox 17"/>
+          <p:cNvSpPr txBox="1"/>
+          <p:nvPr/>
+        </p:nvSpPr>
+        <p:spPr>
+          <a:xfrm>
+            <a:off x="6537960" y="1920240"/>
+            <a:ext cx="5120640" cy="274320"/>
+          </a:xfrm>
+          <a:prstGeom prst="rect">
+            <a:avLst/>
+          </a:prstGeom>
+          <a:noFill/>
+        </p:spPr>
+        <p:txBody>
+          <a:bodyPr wrap="none">
+            <a:spAutoFit/>
+          </a:bodyPr>
+          <a:lstStyle/>
+          <a:p>
+            <a:r>
+              <a:rPr sz="1100" b="1">
+                <a:solidFill>
+                  <a:srgbClr val="0E4F8A"/>
+                </a:solidFill>
+                <a:latin typeface="Calibri"/>
+              </a:rPr>
+              <a:t>FILES / MODULES</a:t>
+            </a:r>
+          </a:p>
+        </p:txBody>
+      </p:sp>
+      <p:sp>
+        <p:nvSpPr>
+          <p:cNvPr id="19" name="TextBox 18"/>
+          <p:cNvSpPr txBox="1"/>
+          <p:nvPr/>
+        </p:nvSpPr>
+        <p:spPr>
+          <a:xfrm>
+            <a:off x="6537960" y="2331720"/>
+            <a:ext cx="5120640" cy="1463040"/>
+          </a:xfrm>
+          <a:prstGeom prst="rect">
+            <a:avLst/>
+          </a:prstGeom>
+          <a:noFill/>
+        </p:spPr>
+        <p:txBody>
+          <a:bodyPr wrap="square">
+            <a:spAutoFit/>
+          </a:bodyPr>
+          <a:lstStyle/>
+          <a:p>
+            <a:r>
+              <a:rPr sz="1100" b="0">
+                <a:solidFill>
+                  <a:srgbClr val="334E68"/>
+                </a:solidFill>
+                <a:latin typeface="Calibri"/>
+              </a:rPr>
+              <a:t>email_service.py · auth.py · pages/admin_dashboard.py · pages/doctor_dashboard.py</a:t>
+            </a:r>
+          </a:p>
+        </p:txBody>
+      </p:sp>
+      <p:sp>
+        <p:nvSpPr>
+          <p:cNvPr id="20" name="Rounded Rectangle 19"/>
+          <p:cNvSpPr/>
+          <p:nvPr/>
+        </p:nvSpPr>
+        <p:spPr>
+          <a:xfrm>
+            <a:off x="6355080" y="3977640"/>
+            <a:ext cx="5486400" cy="2057400"/>
+          </a:xfrm>
+          <a:prstGeom prst="roundRect">
+            <a:avLst/>
+          </a:prstGeom>
+          <a:solidFill>
+            <a:srgbClr val="ECFDF5"/>
+          </a:solidFill>
+          <a:ln w="9525">
+            <a:solidFill>
+              <a:srgbClr val="99E8D2"/>
+            </a:solidFill>
+          </a:ln>
+          <a:effectLst/>
+        </p:spPr>
+        <p:style>
+          <a:lnRef idx="1">
+            <a:schemeClr val="accent1"/>
+          </a:lnRef>
+          <a:fillRef idx="3">
+            <a:schemeClr val="accent1"/>
+          </a:fillRef>
+          <a:effectRef idx="2">
+            <a:schemeClr val="accent1"/>
+          </a:effectRef>
+          <a:fontRef idx="minor">
+            <a:schemeClr val="lt1"/>
+          </a:fontRef>
+        </p:style>
+        <p:txBody>
+          <a:bodyPr rtlCol="0" anchor="ctr"/>
+          <a:lstStyle/>
+          <a:p>
+            <a:pPr algn="ctr"/>
+          </a:p>
+        </p:txBody>
+      </p:sp>
+      <p:sp>
+        <p:nvSpPr>
+          <p:cNvPr id="21" name="TextBox 20"/>
+          <p:cNvSpPr txBox="1"/>
+          <p:nvPr/>
+        </p:nvSpPr>
+        <p:spPr>
+          <a:xfrm>
+            <a:off x="6537960" y="4069080"/>
+            <a:ext cx="5120640" cy="274320"/>
+          </a:xfrm>
+          <a:prstGeom prst="rect">
+            <a:avLst/>
+          </a:prstGeom>
+          <a:noFill/>
+        </p:spPr>
+        <p:txBody>
+          <a:bodyPr wrap="none">
+            <a:spAutoFit/>
+          </a:bodyPr>
+          <a:lstStyle/>
+          <a:p>
+            <a:r>
+              <a:rPr sz="1100" b="1">
+                <a:solidFill>
+                  <a:srgbClr val="0E4F8A"/>
+                </a:solidFill>
+                <a:latin typeface="Calibri"/>
+              </a:rPr>
+              <a:t>OUTCOME</a:t>
+            </a:r>
+          </a:p>
+        </p:txBody>
+      </p:sp>
+      <p:sp>
+        <p:nvSpPr>
+          <p:cNvPr id="22" name="TextBox 21"/>
+          <p:cNvSpPr txBox="1"/>
+          <p:nvPr/>
+        </p:nvSpPr>
+        <p:spPr>
+          <a:xfrm>
+            <a:off x="6537960" y="4480560"/>
+            <a:ext cx="5120640" cy="1463040"/>
+          </a:xfrm>
+          <a:prstGeom prst="rect">
+            <a:avLst/>
+          </a:prstGeom>
+          <a:noFill/>
+        </p:spPr>
+        <p:txBody>
+          <a:bodyPr wrap="square">
+            <a:spAutoFit/>
+          </a:bodyPr>
+          <a:lstStyle/>
+          <a:p>
+            <a:r>
+              <a:rPr sz="1100" b="0">
+                <a:solidFill>
+                  <a:srgbClr val="334E68"/>
+                </a:solidFill>
+                <a:latin typeface="Calibri"/>
+              </a:rPr>
+              <a:t>Hospitals can onboard doctors in one click, patients can upload paper reports, and the system stays the single source of truth for everyone.</a:t>
+            </a:r>
+          </a:p>
+        </p:txBody>
+      </p:sp>
+    </p:spTree>
+  </p:cSld>
+  <p:clrMapOvr>
+    <a:masterClrMapping/>
+  </p:clrMapOvr>
+</p:sld>
+</file>
+
+<file path=ppt/slides/slide19.xml><?xml version="1.0" encoding="utf-8"?>
+<p:sld xmlns:a="http://schemas.openxmlformats.org/drawingml/2006/main" xmlns:p="http://schemas.openxmlformats.org/presentationml/2006/main" xmlns:r="http://schemas.openxmlformats.org/officeDocument/2006/relationships">
+  <p:cSld>
+    <p:spTree>
+      <p:nvGrpSpPr>
+        <p:cNvPr id="1" name=""/>
+        <p:cNvGrpSpPr/>
+        <p:nvPr/>
+      </p:nvGrpSpPr>
+      <p:grpSpPr/>
+      <p:sp>
+        <p:nvSpPr>
+          <p:cNvPr id="2" name="Rectangle 1"/>
+          <p:cNvSpPr/>
+          <p:nvPr/>
+        </p:nvSpPr>
+        <p:spPr>
+          <a:xfrm>
+            <a:off x="502920" y="502920"/>
+            <a:ext cx="109728" cy="502920"/>
+          </a:xfrm>
+          <a:prstGeom prst="rect">
+            <a:avLst/>
+          </a:prstGeom>
+          <a:solidFill>
+            <a:srgbClr val="14B8A6"/>
+          </a:solidFill>
+          <a:ln>
+            <a:noFill/>
+          </a:ln>
+        </p:spPr>
+        <p:style>
+          <a:lnRef idx="1">
+            <a:schemeClr val="accent1"/>
+          </a:lnRef>
+          <a:fillRef idx="3">
+            <a:schemeClr val="accent1"/>
+          </a:fillRef>
+          <a:effectRef idx="2">
+            <a:schemeClr val="accent1"/>
+          </a:effectRef>
+          <a:fontRef idx="minor">
+            <a:schemeClr val="lt1"/>
+          </a:fontRef>
+        </p:style>
+        <p:txBody>
+          <a:bodyPr rtlCol="0" anchor="ctr"/>
+          <a:lstStyle/>
+          <a:p>
+            <a:pPr algn="ctr"/>
+          </a:p>
+        </p:txBody>
+      </p:sp>
+      <p:sp>
+        <p:nvSpPr>
+          <p:cNvPr id="3" name="TextBox 2"/>
+          <p:cNvSpPr txBox="1"/>
+          <p:nvPr/>
+        </p:nvSpPr>
+        <p:spPr>
+          <a:xfrm>
+            <a:off x="713232" y="457200"/>
+            <a:ext cx="10972800" cy="256032"/>
+          </a:xfrm>
+          <a:prstGeom prst="rect">
+            <a:avLst/>
+          </a:prstGeom>
+          <a:noFill/>
+        </p:spPr>
+        <p:txBody>
+          <a:bodyPr wrap="none">
+            <a:spAutoFit/>
+          </a:bodyPr>
+          <a:lstStyle/>
+          <a:p>
+            <a:r>
+              <a:rPr sz="1000" b="1">
+                <a:solidFill>
+                  <a:srgbClr val="14B8A6"/>
+                </a:solidFill>
+                <a:latin typeface="Calibri"/>
+              </a:rPr>
+              <a:t>SCREENSHOT 01</a:t>
+            </a:r>
+          </a:p>
+        </p:txBody>
+      </p:sp>
+      <p:sp>
+        <p:nvSpPr>
+          <p:cNvPr id="4" name="TextBox 3"/>
+          <p:cNvSpPr txBox="1"/>
+          <p:nvPr/>
+        </p:nvSpPr>
+        <p:spPr>
+          <a:xfrm>
+            <a:off x="713232" y="713232"/>
+            <a:ext cx="11155680" cy="502920"/>
+          </a:xfrm>
+          <a:prstGeom prst="rect">
+            <a:avLst/>
+          </a:prstGeom>
+          <a:noFill/>
+        </p:spPr>
+        <p:txBody>
+          <a:bodyPr wrap="none">
+            <a:spAutoFit/>
+          </a:bodyPr>
+          <a:lstStyle/>
+          <a:p>
+            <a:r>
+              <a:rPr sz="2600" b="1">
+                <a:solidFill>
+                  <a:srgbClr val="0F172A"/>
+                </a:solidFill>
+                <a:latin typeface="Calibri"/>
+              </a:rPr>
+              <a:t>Application login interface</a:t>
+            </a:r>
+          </a:p>
+        </p:txBody>
+      </p:sp>
+      <p:sp>
+        <p:nvSpPr>
+          <p:cNvPr id="5" name="TextBox 4"/>
+          <p:cNvSpPr txBox="1"/>
+          <p:nvPr/>
+        </p:nvSpPr>
+        <p:spPr>
+          <a:xfrm>
+            <a:off x="713232" y="1234440"/>
+            <a:ext cx="11155680" cy="365760"/>
+          </a:xfrm>
+          <a:prstGeom prst="rect">
+            <a:avLst/>
+          </a:prstGeom>
+          <a:noFill/>
+        </p:spPr>
+        <p:txBody>
+          <a:bodyPr wrap="none">
+            <a:spAutoFit/>
+          </a:bodyPr>
+          <a:lstStyle/>
+          <a:p>
+            <a:r>
+              <a:rPr sz="1200">
+                <a:solidFill>
+                  <a:srgbClr val="64748B"/>
+                </a:solidFill>
+                <a:latin typeface="Calibri"/>
+              </a:rPr>
+              <a:t>Polished email + password and Google OAuth sign-in flow with role detection and the glassmorphism theme.</a:t>
+            </a:r>
+          </a:p>
+        </p:txBody>
+      </p:sp>
+      <p:cxnSp>
+        <p:nvCxnSpPr>
+          <p:cNvPr id="6" name="Connector 5"/>
+          <p:cNvCxnSpPr/>
+          <p:nvPr/>
+        </p:nvCxnSpPr>
+        <p:spPr>
+          <a:xfrm>
+            <a:off x="713232" y="1627632"/>
+            <a:ext cx="10808208" cy="0"/>
+          </a:xfrm>
+          <a:prstGeom prst="line">
+            <a:avLst/>
+          </a:prstGeom>
+          <a:ln w="9525">
+            <a:solidFill>
+              <a:srgbClr val="E2E8F0"/>
+            </a:solidFill>
+          </a:ln>
+        </p:spPr>
+        <p:style>
+          <a:lnRef idx="2">
+            <a:schemeClr val="accent1"/>
+          </a:lnRef>
+          <a:fillRef idx="0">
+            <a:schemeClr val="accent1"/>
+          </a:fillRef>
+          <a:effectRef idx="1">
+            <a:schemeClr val="accent1"/>
+          </a:effectRef>
+          <a:fontRef idx="minor">
+            <a:schemeClr val="tx1"/>
+          </a:fontRef>
+        </p:style>
+      </p:cxnSp>
+      <p:sp>
+        <p:nvSpPr>
+          <p:cNvPr id="7" name="Rounded Rectangle 6"/>
+          <p:cNvSpPr/>
+          <p:nvPr/>
+        </p:nvSpPr>
+        <p:spPr>
+          <a:xfrm>
+            <a:off x="502920" y="1783080"/>
+            <a:ext cx="11155680" cy="4023360"/>
+          </a:xfrm>
+          <a:prstGeom prst="roundRect">
+            <a:avLst/>
           </a:prstGeom>
           <a:solidFill>
             <a:srgbClr val="FFFFFF"/>
@@ -13269,218 +17986,46 @@
           </a:p>
         </p:txBody>
       </p:sp>
-      <p:sp>
-        <p:nvSpPr>
-          <p:cNvPr id="11" name="Rectangle 10"/>
+      <p:pic>
+        <p:nvPicPr>
+          <p:cNvPr id="8" name="Picture 7" descr="Screenshot 2026-08-20 211903.png"/>
+          <p:cNvPicPr>
+            <a:picLocks noChangeAspect="1"/>
+          </p:cNvPicPr>
+          <p:nvPr/>
+        </p:nvPicPr>
+        <p:blipFill>
+          <a:blip r:embed="rId2"/>
+          <a:stretch>
+            <a:fillRect/>
+          </a:stretch>
+        </p:blipFill>
+        <p:spPr>
+          <a:xfrm>
+            <a:off x="1983871" y="1920240"/>
+            <a:ext cx="8193778" cy="3749040"/>
+          </a:xfrm>
+          <a:prstGeom prst="rect">
+            <a:avLst/>
+          </a:prstGeom>
+        </p:spPr>
+      </p:pic>
+      <p:sp>
+        <p:nvSpPr>
+          <p:cNvPr id="9" name="Rounded Rectangle 8"/>
           <p:cNvSpPr/>
           <p:nvPr/>
         </p:nvSpPr>
         <p:spPr>
           <a:xfrm>
-            <a:off x="502920" y="3520440"/>
-            <a:ext cx="3703320" cy="502920"/>
-          </a:xfrm>
-          <a:prstGeom prst="rect">
+            <a:off x="502920" y="5897880"/>
+            <a:ext cx="11155680" cy="594360"/>
+          </a:xfrm>
+          <a:prstGeom prst="roundRect">
             <a:avLst/>
           </a:prstGeom>
           <a:solidFill>
-            <a:srgbClr val="0E4F8A"/>
-          </a:solidFill>
-          <a:ln>
-            <a:noFill/>
-          </a:ln>
-          <a:effectLst/>
-        </p:spPr>
-        <p:style>
-          <a:lnRef idx="1">
-            <a:schemeClr val="accent1"/>
-          </a:lnRef>
-          <a:fillRef idx="3">
-            <a:schemeClr val="accent1"/>
-          </a:fillRef>
-          <a:effectRef idx="2">
-            <a:schemeClr val="accent1"/>
-          </a:effectRef>
-          <a:fontRef idx="minor">
-            <a:schemeClr val="lt1"/>
-          </a:fontRef>
-        </p:style>
-        <p:txBody>
-          <a:bodyPr rtlCol="0" anchor="ctr"/>
-          <a:lstStyle/>
-          <a:p>
-            <a:pPr algn="ctr"/>
-          </a:p>
-        </p:txBody>
-      </p:sp>
-      <p:sp>
-        <p:nvSpPr>
-          <p:cNvPr id="12" name="TextBox 11"/>
-          <p:cNvSpPr txBox="1"/>
-          <p:nvPr/>
-        </p:nvSpPr>
-        <p:spPr>
-          <a:xfrm>
-            <a:off x="777240" y="3520440"/>
-            <a:ext cx="3154680" cy="502920"/>
-          </a:xfrm>
-          <a:prstGeom prst="rect">
-            <a:avLst/>
-          </a:prstGeom>
-          <a:noFill/>
-        </p:spPr>
-        <p:txBody>
-          <a:bodyPr wrap="square" lIns="36000" rIns="36000" tIns="18000" bIns="18000" anchor="ctr">
-            <a:spAutoFit/>
-          </a:bodyPr>
-          <a:lstStyle/>
-          <a:p>
-            <a:pPr algn="l">
-              <a:lnSpc>
-                <a:spcPct val="120000"/>
-              </a:lnSpc>
-            </a:pPr>
-            <a:r>
-              <a:rPr sz="1300" b="1" i="0">
-                <a:solidFill>
-                  <a:srgbClr val="FFFFFF"/>
-                </a:solidFill>
-                <a:latin typeface="Calibri"/>
-              </a:rPr>
-              <a:t>What you'd build next</a:t>
-            </a:r>
-          </a:p>
-        </p:txBody>
-      </p:sp>
-      <p:sp>
-        <p:nvSpPr>
-          <p:cNvPr id="13" name="TextBox 12"/>
-          <p:cNvSpPr txBox="1"/>
-          <p:nvPr/>
-        </p:nvSpPr>
-        <p:spPr>
-          <a:xfrm>
-            <a:off x="777240" y="4206240"/>
-            <a:ext cx="3246120" cy="1965960"/>
-          </a:xfrm>
-          <a:prstGeom prst="rect">
-            <a:avLst/>
-          </a:prstGeom>
-          <a:noFill/>
-        </p:spPr>
-        <p:txBody>
-          <a:bodyPr wrap="square" lIns="36000" rIns="36000" tIns="18000" bIns="18000">
-            <a:spAutoFit/>
-          </a:bodyPr>
-          <a:lstStyle/>
-          <a:p>
-            <a:pPr algn="l">
-              <a:lnSpc>
-                <a:spcPct val="140000"/>
-              </a:lnSpc>
-              <a:spcBef>
-                <a:spcPts val="300"/>
-              </a:spcBef>
-              <a:spcAft>
-                <a:spcPts val="200"/>
-              </a:spcAft>
-            </a:pPr>
-            <a:r>
-              <a:rPr sz="1050">
-                <a:solidFill>
-                  <a:srgbClr val="334E68"/>
-                </a:solidFill>
-                <a:latin typeface="Calibri"/>
-              </a:rPr>
-              <a:t>•  Multi-language chatbot (Hindi, Spanish).</a:t>
-            </a:r>
-          </a:p>
-          <a:p>
-            <a:pPr algn="l">
-              <a:lnSpc>
-                <a:spcPct val="140000"/>
-              </a:lnSpc>
-              <a:spcBef>
-                <a:spcPts val="300"/>
-              </a:spcBef>
-              <a:spcAft>
-                <a:spcPts val="200"/>
-              </a:spcAft>
-            </a:pPr>
-            <a:r>
-              <a:rPr sz="1050">
-                <a:solidFill>
-                  <a:srgbClr val="334E68"/>
-                </a:solidFill>
-                <a:latin typeface="Calibri"/>
-              </a:rPr>
-              <a:t>•  Doctor-side calendar sync (Google Calendar).</a:t>
-            </a:r>
-          </a:p>
-          <a:p>
-            <a:pPr algn="l">
-              <a:lnSpc>
-                <a:spcPct val="140000"/>
-              </a:lnSpc>
-              <a:spcBef>
-                <a:spcPts val="300"/>
-              </a:spcBef>
-              <a:spcAft>
-                <a:spcPts val="200"/>
-              </a:spcAft>
-            </a:pPr>
-            <a:r>
-              <a:rPr sz="1050">
-                <a:solidFill>
-                  <a:srgbClr val="334E68"/>
-                </a:solidFill>
-                <a:latin typeface="Calibri"/>
-              </a:rPr>
-              <a:t>•  Insurance + billing module.</a:t>
-            </a:r>
-          </a:p>
-          <a:p>
-            <a:pPr algn="l">
-              <a:lnSpc>
-                <a:spcPct val="140000"/>
-              </a:lnSpc>
-              <a:spcBef>
-                <a:spcPts val="300"/>
-              </a:spcBef>
-              <a:spcAft>
-                <a:spcPts val="200"/>
-              </a:spcAft>
-            </a:pPr>
-            <a:r>
-              <a:rPr sz="1050">
-                <a:solidFill>
-                  <a:srgbClr val="334E68"/>
-                </a:solidFill>
-                <a:latin typeface="Calibri"/>
-              </a:rPr>
-              <a:t>•  Mobile-first layout (current is desktop-tuned).</a:t>
-            </a:r>
-          </a:p>
-        </p:txBody>
-      </p:sp>
-      <p:sp>
-        <p:nvSpPr>
-          <p:cNvPr id="14" name="Rounded Rectangle 13"/>
-          <p:cNvSpPr/>
-          <p:nvPr/>
-        </p:nvSpPr>
-        <p:spPr>
-          <a:xfrm>
-            <a:off x="4343400" y="3520440"/>
-            <a:ext cx="3703320" cy="2788920"/>
-          </a:xfrm>
-          <a:prstGeom prst="roundRect">
-            <a:avLst>
-              <a:gd name="adj" fmla="val 4000"/>
-            </a:avLst>
-          </a:prstGeom>
-          <a:solidFill>
-            <a:srgbClr val="FFFFFF"/>
+            <a:srgbClr val="F1F5F9"/>
           </a:solidFill>
           <a:ln w="9525">
             <a:solidFill>
@@ -13513,558 +18058,34 @@
       </p:sp>
       <p:sp>
         <p:nvSpPr>
-          <p:cNvPr id="15" name="Rectangle 14"/>
-          <p:cNvSpPr/>
-          <p:nvPr/>
-        </p:nvSpPr>
-        <p:spPr>
-          <a:xfrm>
-            <a:off x="4343400" y="3520440"/>
-            <a:ext cx="3703320" cy="502920"/>
-          </a:xfrm>
-          <a:prstGeom prst="rect">
-            <a:avLst/>
-          </a:prstGeom>
-          <a:solidFill>
-            <a:srgbClr val="EA580C"/>
-          </a:solidFill>
-          <a:ln>
-            <a:noFill/>
-          </a:ln>
-          <a:effectLst/>
-        </p:spPr>
-        <p:style>
-          <a:lnRef idx="1">
-            <a:schemeClr val="accent1"/>
-          </a:lnRef>
-          <a:fillRef idx="3">
-            <a:schemeClr val="accent1"/>
-          </a:fillRef>
-          <a:effectRef idx="2">
-            <a:schemeClr val="accent1"/>
-          </a:effectRef>
-          <a:fontRef idx="minor">
-            <a:schemeClr val="lt1"/>
-          </a:fontRef>
-        </p:style>
-        <p:txBody>
-          <a:bodyPr rtlCol="0" anchor="ctr"/>
-          <a:lstStyle/>
-          <a:p>
-            <a:pPr algn="ctr"/>
-          </a:p>
-        </p:txBody>
-      </p:sp>
-      <p:sp>
-        <p:nvSpPr>
-          <p:cNvPr id="16" name="TextBox 15"/>
-          <p:cNvSpPr txBox="1"/>
-          <p:nvPr/>
-        </p:nvSpPr>
-        <p:spPr>
-          <a:xfrm>
-            <a:off x="4617720" y="3520440"/>
-            <a:ext cx="3154680" cy="502920"/>
-          </a:xfrm>
-          <a:prstGeom prst="rect">
-            <a:avLst/>
-          </a:prstGeom>
-          <a:noFill/>
-        </p:spPr>
-        <p:txBody>
-          <a:bodyPr wrap="square" lIns="36000" rIns="36000" tIns="18000" bIns="18000" anchor="ctr">
-            <a:spAutoFit/>
-          </a:bodyPr>
-          <a:lstStyle/>
-          <a:p>
-            <a:pPr algn="l">
-              <a:lnSpc>
-                <a:spcPct val="120000"/>
-              </a:lnSpc>
-            </a:pPr>
-            <a:r>
-              <a:rPr sz="1300" b="1" i="0">
-                <a:solidFill>
-                  <a:srgbClr val="FFFFFF"/>
-                </a:solidFill>
-                <a:latin typeface="Calibri"/>
-              </a:rPr>
-              <a:t>What I'd watch</a:t>
-            </a:r>
-          </a:p>
-        </p:txBody>
-      </p:sp>
-      <p:sp>
-        <p:nvSpPr>
-          <p:cNvPr id="17" name="TextBox 16"/>
-          <p:cNvSpPr txBox="1"/>
-          <p:nvPr/>
-        </p:nvSpPr>
-        <p:spPr>
-          <a:xfrm>
-            <a:off x="4617720" y="4206240"/>
-            <a:ext cx="3246120" cy="1965960"/>
-          </a:xfrm>
-          <a:prstGeom prst="rect">
-            <a:avLst/>
-          </a:prstGeom>
-          <a:noFill/>
-        </p:spPr>
-        <p:txBody>
-          <a:bodyPr wrap="square" lIns="36000" rIns="36000" tIns="18000" bIns="18000">
-            <a:spAutoFit/>
-          </a:bodyPr>
-          <a:lstStyle/>
-          <a:p>
-            <a:pPr algn="l">
-              <a:lnSpc>
-                <a:spcPct val="140000"/>
-              </a:lnSpc>
-              <a:spcBef>
-                <a:spcPts val="300"/>
-              </a:spcBef>
-              <a:spcAft>
-                <a:spcPts val="200"/>
-              </a:spcAft>
-            </a:pPr>
-            <a:r>
-              <a:rPr sz="1050">
+          <p:cNvPr id="10" name="TextBox 9"/>
+          <p:cNvSpPr txBox="1"/>
+          <p:nvPr/>
+        </p:nvSpPr>
+        <p:spPr>
+          <a:xfrm>
+            <a:off x="685800" y="5943600"/>
+            <a:ext cx="10789920" cy="502920"/>
+          </a:xfrm>
+          <a:prstGeom prst="rect">
+            <a:avLst/>
+          </a:prstGeom>
+          <a:noFill/>
+        </p:spPr>
+        <p:txBody>
+          <a:bodyPr wrap="square">
+            <a:spAutoFit/>
+          </a:bodyPr>
+          <a:lstStyle/>
+          <a:p>
+            <a:r>
+              <a:rPr sz="1100" b="0">
                 <a:solidFill>
                   <a:srgbClr val="334E68"/>
                 </a:solidFill>
                 <a:latin typeface="Calibri"/>
               </a:rPr>
-              <a:t>•  LLM cost scaling with concurrent doctors.</a:t>
-            </a:r>
-          </a:p>
-          <a:p>
-            <a:pPr algn="l">
-              <a:lnSpc>
-                <a:spcPct val="140000"/>
-              </a:lnSpc>
-              <a:spcBef>
-                <a:spcPts val="300"/>
-              </a:spcBef>
-              <a:spcAft>
-                <a:spcPts val="200"/>
-              </a:spcAft>
-            </a:pPr>
-            <a:r>
-              <a:rPr sz="1050">
-                <a:solidFill>
-                  <a:srgbClr val="334E68"/>
-                </a:solidFill>
-                <a:latin typeface="Calibri"/>
-              </a:rPr>
-              <a:t>•  MySQL connection pool under load.</a:t>
-            </a:r>
-          </a:p>
-          <a:p>
-            <a:pPr algn="l">
-              <a:lnSpc>
-                <a:spcPct val="140000"/>
-              </a:lnSpc>
-              <a:spcBef>
-                <a:spcPts val="300"/>
-              </a:spcBef>
-              <a:spcAft>
-                <a:spcPts val="200"/>
-              </a:spcAft>
-            </a:pPr>
-            <a:r>
-              <a:rPr sz="1050">
-                <a:solidFill>
-                  <a:srgbClr val="334E68"/>
-                </a:solidFill>
-                <a:latin typeface="Calibri"/>
-              </a:rPr>
-              <a:t>•  PII safety in AI prompts — no raw history leaks.</a:t>
-            </a:r>
-          </a:p>
-          <a:p>
-            <a:pPr algn="l">
-              <a:lnSpc>
-                <a:spcPct val="140000"/>
-              </a:lnSpc>
-              <a:spcBef>
-                <a:spcPts val="300"/>
-              </a:spcBef>
-              <a:spcAft>
-                <a:spcPts val="200"/>
-              </a:spcAft>
-            </a:pPr>
-            <a:r>
-              <a:rPr sz="1050">
-                <a:solidFill>
-                  <a:srgbClr val="334E68"/>
-                </a:solidFill>
-                <a:latin typeface="Calibri"/>
-              </a:rPr>
-              <a:t>•  Voice latency on low-end devices.</a:t>
-            </a:r>
-          </a:p>
-        </p:txBody>
-      </p:sp>
-      <p:sp>
-        <p:nvSpPr>
-          <p:cNvPr id="18" name="Rounded Rectangle 17"/>
-          <p:cNvSpPr/>
-          <p:nvPr/>
-        </p:nvSpPr>
-        <p:spPr>
-          <a:xfrm>
-            <a:off x="8183880" y="3520440"/>
-            <a:ext cx="3703320" cy="2788920"/>
-          </a:xfrm>
-          <a:prstGeom prst="roundRect">
-            <a:avLst>
-              <a:gd name="adj" fmla="val 4000"/>
-            </a:avLst>
-          </a:prstGeom>
-          <a:solidFill>
-            <a:srgbClr val="FFFFFF"/>
-          </a:solidFill>
-          <a:ln w="9525">
-            <a:solidFill>
-              <a:srgbClr val="CBD5E1"/>
-            </a:solidFill>
-          </a:ln>
-          <a:effectLst/>
-        </p:spPr>
-        <p:style>
-          <a:lnRef idx="1">
-            <a:schemeClr val="accent1"/>
-          </a:lnRef>
-          <a:fillRef idx="3">
-            <a:schemeClr val="accent1"/>
-          </a:fillRef>
-          <a:effectRef idx="2">
-            <a:schemeClr val="accent1"/>
-          </a:effectRef>
-          <a:fontRef idx="minor">
-            <a:schemeClr val="lt1"/>
-          </a:fontRef>
-        </p:style>
-        <p:txBody>
-          <a:bodyPr rtlCol="0" anchor="ctr"/>
-          <a:lstStyle/>
-          <a:p>
-            <a:pPr algn="ctr"/>
-          </a:p>
-        </p:txBody>
-      </p:sp>
-      <p:sp>
-        <p:nvSpPr>
-          <p:cNvPr id="19" name="Rectangle 18"/>
-          <p:cNvSpPr/>
-          <p:nvPr/>
-        </p:nvSpPr>
-        <p:spPr>
-          <a:xfrm>
-            <a:off x="8183880" y="3520440"/>
-            <a:ext cx="3703320" cy="502920"/>
-          </a:xfrm>
-          <a:prstGeom prst="rect">
-            <a:avLst/>
-          </a:prstGeom>
-          <a:solidFill>
-            <a:srgbClr val="14B8A6"/>
-          </a:solidFill>
-          <a:ln>
-            <a:noFill/>
-          </a:ln>
-          <a:effectLst/>
-        </p:spPr>
-        <p:style>
-          <a:lnRef idx="1">
-            <a:schemeClr val="accent1"/>
-          </a:lnRef>
-          <a:fillRef idx="3">
-            <a:schemeClr val="accent1"/>
-          </a:fillRef>
-          <a:effectRef idx="2">
-            <a:schemeClr val="accent1"/>
-          </a:effectRef>
-          <a:fontRef idx="minor">
-            <a:schemeClr val="lt1"/>
-          </a:fontRef>
-        </p:style>
-        <p:txBody>
-          <a:bodyPr rtlCol="0" anchor="ctr"/>
-          <a:lstStyle/>
-          <a:p>
-            <a:pPr algn="ctr"/>
-          </a:p>
-        </p:txBody>
-      </p:sp>
-      <p:sp>
-        <p:nvSpPr>
-          <p:cNvPr id="20" name="TextBox 19"/>
-          <p:cNvSpPr txBox="1"/>
-          <p:nvPr/>
-        </p:nvSpPr>
-        <p:spPr>
-          <a:xfrm>
-            <a:off x="8458200" y="3520440"/>
-            <a:ext cx="3154680" cy="502920"/>
-          </a:xfrm>
-          <a:prstGeom prst="rect">
-            <a:avLst/>
-          </a:prstGeom>
-          <a:noFill/>
-        </p:spPr>
-        <p:txBody>
-          <a:bodyPr wrap="square" lIns="36000" rIns="36000" tIns="18000" bIns="18000" anchor="ctr">
-            <a:spAutoFit/>
-          </a:bodyPr>
-          <a:lstStyle/>
-          <a:p>
-            <a:pPr algn="l">
-              <a:lnSpc>
-                <a:spcPct val="120000"/>
-              </a:lnSpc>
-            </a:pPr>
-            <a:r>
-              <a:rPr sz="1300" b="1" i="0">
-                <a:solidFill>
-                  <a:srgbClr val="FFFFFF"/>
-                </a:solidFill>
-                <a:latin typeface="Calibri"/>
-              </a:rPr>
-              <a:t>Where to look first</a:t>
-            </a:r>
-          </a:p>
-        </p:txBody>
-      </p:sp>
-      <p:sp>
-        <p:nvSpPr>
-          <p:cNvPr id="21" name="TextBox 20"/>
-          <p:cNvSpPr txBox="1"/>
-          <p:nvPr/>
-        </p:nvSpPr>
-        <p:spPr>
-          <a:xfrm>
-            <a:off x="8458200" y="4206240"/>
-            <a:ext cx="3246120" cy="1965960"/>
-          </a:xfrm>
-          <a:prstGeom prst="rect">
-            <a:avLst/>
-          </a:prstGeom>
-          <a:noFill/>
-        </p:spPr>
-        <p:txBody>
-          <a:bodyPr wrap="square" lIns="36000" rIns="36000" tIns="18000" bIns="18000">
-            <a:spAutoFit/>
-          </a:bodyPr>
-          <a:lstStyle/>
-          <a:p>
-            <a:pPr algn="l">
-              <a:lnSpc>
-                <a:spcPct val="140000"/>
-              </a:lnSpc>
-              <a:spcBef>
-                <a:spcPts val="300"/>
-              </a:spcBef>
-              <a:spcAft>
-                <a:spcPts val="200"/>
-              </a:spcAft>
-            </a:pPr>
-            <a:r>
-              <a:rPr sz="1050">
-                <a:solidFill>
-                  <a:srgbClr val="334E68"/>
-                </a:solidFill>
-                <a:latin typeface="Calibri"/>
-              </a:rPr>
-              <a:t>•  app.py — the entry point &amp; theme.</a:t>
-            </a:r>
-          </a:p>
-          <a:p>
-            <a:pPr algn="l">
-              <a:lnSpc>
-                <a:spcPct val="140000"/>
-              </a:lnSpc>
-              <a:spcBef>
-                <a:spcPts val="300"/>
-              </a:spcBef>
-              <a:spcAft>
-                <a:spcPts val="200"/>
-              </a:spcAft>
-            </a:pPr>
-            <a:r>
-              <a:rPr sz="1050">
-                <a:solidFill>
-                  <a:srgbClr val="334E68"/>
-                </a:solidFill>
-                <a:latin typeface="Calibri"/>
-              </a:rPr>
-              <a:t>•  pages/ai_care.py — the AI brain.</a:t>
-            </a:r>
-          </a:p>
-          <a:p>
-            <a:pPr algn="l">
-              <a:lnSpc>
-                <a:spcPct val="140000"/>
-              </a:lnSpc>
-              <a:spcBef>
-                <a:spcPts val="300"/>
-              </a:spcBef>
-              <a:spcAft>
-                <a:spcPts val="200"/>
-              </a:spcAft>
-            </a:pPr>
-            <a:r>
-              <a:rPr sz="1050">
-                <a:solidFill>
-                  <a:srgbClr val="334E68"/>
-                </a:solidFill>
-                <a:latin typeface="Calibri"/>
-              </a:rPr>
-              <a:t>•  db.py — schema and dialect switching.</a:t>
-            </a:r>
-          </a:p>
-          <a:p>
-            <a:pPr algn="l">
-              <a:lnSpc>
-                <a:spcPct val="140000"/>
-              </a:lnSpc>
-              <a:spcBef>
-                <a:spcPts val="300"/>
-              </a:spcBef>
-              <a:spcAft>
-                <a:spcPts val="200"/>
-              </a:spcAft>
-            </a:pPr>
-            <a:r>
-              <a:rPr sz="1050">
-                <a:solidFill>
-                  <a:srgbClr val="334E68"/>
-                </a:solidFill>
-                <a:latin typeface="Calibri"/>
-              </a:rPr>
-              <a:t>•  .env.example — keys to bring your own.</a:t>
-            </a:r>
-          </a:p>
-        </p:txBody>
-      </p:sp>
-      <p:sp>
-        <p:nvSpPr>
-          <p:cNvPr id="22" name="Rectangle 21"/>
-          <p:cNvSpPr/>
-          <p:nvPr/>
-        </p:nvSpPr>
-        <p:spPr>
-          <a:xfrm>
-            <a:off x="0" y="6565392"/>
-            <a:ext cx="12191695" cy="292608"/>
-          </a:xfrm>
-          <a:prstGeom prst="rect">
-            <a:avLst/>
-          </a:prstGeom>
-          <a:solidFill>
-            <a:srgbClr val="F1F5F9"/>
-          </a:solidFill>
-          <a:ln>
-            <a:noFill/>
-          </a:ln>
-          <a:effectLst/>
-        </p:spPr>
-        <p:style>
-          <a:lnRef idx="1">
-            <a:schemeClr val="accent1"/>
-          </a:lnRef>
-          <a:fillRef idx="3">
-            <a:schemeClr val="accent1"/>
-          </a:fillRef>
-          <a:effectRef idx="2">
-            <a:schemeClr val="accent1"/>
-          </a:effectRef>
-          <a:fontRef idx="minor">
-            <a:schemeClr val="lt1"/>
-          </a:fontRef>
-        </p:style>
-        <p:txBody>
-          <a:bodyPr rtlCol="0" anchor="ctr"/>
-          <a:lstStyle/>
-          <a:p>
-            <a:pPr algn="ctr"/>
-          </a:p>
-        </p:txBody>
-      </p:sp>
-      <p:sp>
-        <p:nvSpPr>
-          <p:cNvPr id="23" name="TextBox 22"/>
-          <p:cNvSpPr txBox="1"/>
-          <p:nvPr/>
-        </p:nvSpPr>
-        <p:spPr>
-          <a:xfrm>
-            <a:off x="365760" y="6601968"/>
-            <a:ext cx="8229600" cy="228600"/>
-          </a:xfrm>
-          <a:prstGeom prst="rect">
-            <a:avLst/>
-          </a:prstGeom>
-          <a:noFill/>
-        </p:spPr>
-        <p:txBody>
-          <a:bodyPr wrap="square" lIns="36000" rIns="36000" tIns="18000" bIns="18000" anchor="t">
-            <a:spAutoFit/>
-          </a:bodyPr>
-          <a:lstStyle/>
-          <a:p>
-            <a:pPr algn="l">
-              <a:lnSpc>
-                <a:spcPct val="120000"/>
-              </a:lnSpc>
-            </a:pPr>
-            <a:r>
-              <a:rPr sz="900" b="0" i="1">
-                <a:solidFill>
-                  <a:srgbClr val="64748B"/>
-                </a:solidFill>
-                <a:latin typeface="Calibri"/>
-              </a:rPr>
-              <a:t>IPCMS — Integrated Patient Care Management System</a:t>
-            </a:r>
-          </a:p>
-        </p:txBody>
-      </p:sp>
-      <p:sp>
-        <p:nvSpPr>
-          <p:cNvPr id="24" name="TextBox 23"/>
-          <p:cNvSpPr txBox="1"/>
-          <p:nvPr/>
-        </p:nvSpPr>
-        <p:spPr>
-          <a:xfrm>
-            <a:off x="10607040" y="6601968"/>
-            <a:ext cx="1280160" cy="228600"/>
-          </a:xfrm>
-          <a:prstGeom prst="rect">
-            <a:avLst/>
-          </a:prstGeom>
-          <a:noFill/>
-        </p:spPr>
-        <p:txBody>
-          <a:bodyPr wrap="square" lIns="36000" rIns="36000" tIns="18000" bIns="18000" anchor="t">
-            <a:spAutoFit/>
-          </a:bodyPr>
-          <a:lstStyle/>
-          <a:p>
-            <a:pPr algn="r">
-              <a:lnSpc>
-                <a:spcPct val="120000"/>
-              </a:lnSpc>
-            </a:pPr>
-            <a:r>
-              <a:rPr sz="900" b="0" i="0">
-                <a:solidFill>
-                  <a:srgbClr val="64748B"/>
-                </a:solidFill>
-                <a:latin typeface="Calibri"/>
-              </a:rPr>
-              <a:t>14 / 14</a:t>
+              <a:t>Polished email + password and Google OAuth sign-in flow with role detection and the glassmorphism theme.</a:t>
             </a:r>
           </a:p>
         </p:txBody>
@@ -15660,7 +19681,2602 @@
                 </a:solidFill>
                 <a:latin typeface="Calibri"/>
               </a:rPr>
-              <a:t>2 / 14</a:t>
+              <a:t>2 / 24</a:t>
+            </a:r>
+          </a:p>
+        </p:txBody>
+      </p:sp>
+    </p:spTree>
+  </p:cSld>
+  <p:clrMapOvr>
+    <a:masterClrMapping/>
+  </p:clrMapOvr>
+</p:sld>
+</file>
+
+<file path=ppt/slides/slide20.xml><?xml version="1.0" encoding="utf-8"?>
+<p:sld xmlns:a="http://schemas.openxmlformats.org/drawingml/2006/main" xmlns:p="http://schemas.openxmlformats.org/presentationml/2006/main" xmlns:r="http://schemas.openxmlformats.org/officeDocument/2006/relationships">
+  <p:cSld>
+    <p:spTree>
+      <p:nvGrpSpPr>
+        <p:cNvPr id="1" name=""/>
+        <p:cNvGrpSpPr/>
+        <p:nvPr/>
+      </p:nvGrpSpPr>
+      <p:grpSpPr/>
+      <p:sp>
+        <p:nvSpPr>
+          <p:cNvPr id="2" name="Rectangle 1"/>
+          <p:cNvSpPr/>
+          <p:nvPr/>
+        </p:nvSpPr>
+        <p:spPr>
+          <a:xfrm>
+            <a:off x="502920" y="502920"/>
+            <a:ext cx="109728" cy="502920"/>
+          </a:xfrm>
+          <a:prstGeom prst="rect">
+            <a:avLst/>
+          </a:prstGeom>
+          <a:solidFill>
+            <a:srgbClr val="14B8A6"/>
+          </a:solidFill>
+          <a:ln>
+            <a:noFill/>
+          </a:ln>
+        </p:spPr>
+        <p:style>
+          <a:lnRef idx="1">
+            <a:schemeClr val="accent1"/>
+          </a:lnRef>
+          <a:fillRef idx="3">
+            <a:schemeClr val="accent1"/>
+          </a:fillRef>
+          <a:effectRef idx="2">
+            <a:schemeClr val="accent1"/>
+          </a:effectRef>
+          <a:fontRef idx="minor">
+            <a:schemeClr val="lt1"/>
+          </a:fontRef>
+        </p:style>
+        <p:txBody>
+          <a:bodyPr rtlCol="0" anchor="ctr"/>
+          <a:lstStyle/>
+          <a:p>
+            <a:pPr algn="ctr"/>
+          </a:p>
+        </p:txBody>
+      </p:sp>
+      <p:sp>
+        <p:nvSpPr>
+          <p:cNvPr id="3" name="TextBox 2"/>
+          <p:cNvSpPr txBox="1"/>
+          <p:nvPr/>
+        </p:nvSpPr>
+        <p:spPr>
+          <a:xfrm>
+            <a:off x="713232" y="457200"/>
+            <a:ext cx="10972800" cy="256032"/>
+          </a:xfrm>
+          <a:prstGeom prst="rect">
+            <a:avLst/>
+          </a:prstGeom>
+          <a:noFill/>
+        </p:spPr>
+        <p:txBody>
+          <a:bodyPr wrap="none">
+            <a:spAutoFit/>
+          </a:bodyPr>
+          <a:lstStyle/>
+          <a:p>
+            <a:r>
+              <a:rPr sz="1000" b="1">
+                <a:solidFill>
+                  <a:srgbClr val="14B8A6"/>
+                </a:solidFill>
+                <a:latin typeface="Calibri"/>
+              </a:rPr>
+              <a:t>SCREENSHOT 05</a:t>
+            </a:r>
+          </a:p>
+        </p:txBody>
+      </p:sp>
+      <p:sp>
+        <p:nvSpPr>
+          <p:cNvPr id="4" name="TextBox 3"/>
+          <p:cNvSpPr txBox="1"/>
+          <p:nvPr/>
+        </p:nvSpPr>
+        <p:spPr>
+          <a:xfrm>
+            <a:off x="713232" y="713232"/>
+            <a:ext cx="11155680" cy="502920"/>
+          </a:xfrm>
+          <a:prstGeom prst="rect">
+            <a:avLst/>
+          </a:prstGeom>
+          <a:noFill/>
+        </p:spPr>
+        <p:txBody>
+          <a:bodyPr wrap="none">
+            <a:spAutoFit/>
+          </a:bodyPr>
+          <a:lstStyle/>
+          <a:p>
+            <a:r>
+              <a:rPr sz="2600" b="1">
+                <a:solidFill>
+                  <a:srgbClr val="0F172A"/>
+                </a:solidFill>
+                <a:latin typeface="Calibri"/>
+              </a:rPr>
+              <a:t>Admin analytics dashboard</a:t>
+            </a:r>
+          </a:p>
+        </p:txBody>
+      </p:sp>
+      <p:sp>
+        <p:nvSpPr>
+          <p:cNvPr id="5" name="TextBox 4"/>
+          <p:cNvSpPr txBox="1"/>
+          <p:nvPr/>
+        </p:nvSpPr>
+        <p:spPr>
+          <a:xfrm>
+            <a:off x="713232" y="1234440"/>
+            <a:ext cx="11155680" cy="365760"/>
+          </a:xfrm>
+          <a:prstGeom prst="rect">
+            <a:avLst/>
+          </a:prstGeom>
+          <a:noFill/>
+        </p:spPr>
+        <p:txBody>
+          <a:bodyPr wrap="none">
+            <a:spAutoFit/>
+          </a:bodyPr>
+          <a:lstStyle/>
+          <a:p>
+            <a:r>
+              <a:rPr sz="1200">
+                <a:solidFill>
+                  <a:srgbClr val="64748B"/>
+                </a:solidFill>
+                <a:latin typeface="Calibri"/>
+              </a:rPr>
+              <a:t>Admin analytics: visits, revenue, doctor load — backed by pandas DataFrames from the same MySQL DB.</a:t>
+            </a:r>
+          </a:p>
+        </p:txBody>
+      </p:sp>
+      <p:cxnSp>
+        <p:nvCxnSpPr>
+          <p:cNvPr id="6" name="Connector 5"/>
+          <p:cNvCxnSpPr/>
+          <p:nvPr/>
+        </p:nvCxnSpPr>
+        <p:spPr>
+          <a:xfrm>
+            <a:off x="713232" y="1627632"/>
+            <a:ext cx="10808208" cy="0"/>
+          </a:xfrm>
+          <a:prstGeom prst="line">
+            <a:avLst/>
+          </a:prstGeom>
+          <a:ln w="9525">
+            <a:solidFill>
+              <a:srgbClr val="E2E8F0"/>
+            </a:solidFill>
+          </a:ln>
+        </p:spPr>
+        <p:style>
+          <a:lnRef idx="2">
+            <a:schemeClr val="accent1"/>
+          </a:lnRef>
+          <a:fillRef idx="0">
+            <a:schemeClr val="accent1"/>
+          </a:fillRef>
+          <a:effectRef idx="1">
+            <a:schemeClr val="accent1"/>
+          </a:effectRef>
+          <a:fontRef idx="minor">
+            <a:schemeClr val="tx1"/>
+          </a:fontRef>
+        </p:style>
+      </p:cxnSp>
+      <p:sp>
+        <p:nvSpPr>
+          <p:cNvPr id="7" name="Rounded Rectangle 6"/>
+          <p:cNvSpPr/>
+          <p:nvPr/>
+        </p:nvSpPr>
+        <p:spPr>
+          <a:xfrm>
+            <a:off x="502920" y="1783080"/>
+            <a:ext cx="11155680" cy="4023360"/>
+          </a:xfrm>
+          <a:prstGeom prst="roundRect">
+            <a:avLst/>
+          </a:prstGeom>
+          <a:solidFill>
+            <a:srgbClr val="FFFFFF"/>
+          </a:solidFill>
+          <a:ln w="9525">
+            <a:solidFill>
+              <a:srgbClr val="CBD5E1"/>
+            </a:solidFill>
+          </a:ln>
+          <a:effectLst/>
+        </p:spPr>
+        <p:style>
+          <a:lnRef idx="1">
+            <a:schemeClr val="accent1"/>
+          </a:lnRef>
+          <a:fillRef idx="3">
+            <a:schemeClr val="accent1"/>
+          </a:fillRef>
+          <a:effectRef idx="2">
+            <a:schemeClr val="accent1"/>
+          </a:effectRef>
+          <a:fontRef idx="minor">
+            <a:schemeClr val="lt1"/>
+          </a:fontRef>
+        </p:style>
+        <p:txBody>
+          <a:bodyPr rtlCol="0" anchor="ctr"/>
+          <a:lstStyle/>
+          <a:p>
+            <a:pPr algn="ctr"/>
+          </a:p>
+        </p:txBody>
+      </p:sp>
+      <p:pic>
+        <p:nvPicPr>
+          <p:cNvPr id="8" name="Picture 7" descr="Screenshot 2026-08-20 231138.png"/>
+          <p:cNvPicPr>
+            <a:picLocks noChangeAspect="1"/>
+          </p:cNvPicPr>
+          <p:nvPr/>
+        </p:nvPicPr>
+        <p:blipFill>
+          <a:blip r:embed="rId2"/>
+          <a:stretch>
+            <a:fillRect/>
+          </a:stretch>
+        </p:blipFill>
+        <p:spPr>
+          <a:xfrm>
+            <a:off x="1931736" y="1920240"/>
+            <a:ext cx="8298048" cy="3749040"/>
+          </a:xfrm>
+          <a:prstGeom prst="rect">
+            <a:avLst/>
+          </a:prstGeom>
+        </p:spPr>
+      </p:pic>
+      <p:sp>
+        <p:nvSpPr>
+          <p:cNvPr id="9" name="Rounded Rectangle 8"/>
+          <p:cNvSpPr/>
+          <p:nvPr/>
+        </p:nvSpPr>
+        <p:spPr>
+          <a:xfrm>
+            <a:off x="502920" y="5897880"/>
+            <a:ext cx="11155680" cy="594360"/>
+          </a:xfrm>
+          <a:prstGeom prst="roundRect">
+            <a:avLst/>
+          </a:prstGeom>
+          <a:solidFill>
+            <a:srgbClr val="F1F5F9"/>
+          </a:solidFill>
+          <a:ln w="9525">
+            <a:solidFill>
+              <a:srgbClr val="CBD5E1"/>
+            </a:solidFill>
+          </a:ln>
+          <a:effectLst/>
+        </p:spPr>
+        <p:style>
+          <a:lnRef idx="1">
+            <a:schemeClr val="accent1"/>
+          </a:lnRef>
+          <a:fillRef idx="3">
+            <a:schemeClr val="accent1"/>
+          </a:fillRef>
+          <a:effectRef idx="2">
+            <a:schemeClr val="accent1"/>
+          </a:effectRef>
+          <a:fontRef idx="minor">
+            <a:schemeClr val="lt1"/>
+          </a:fontRef>
+        </p:style>
+        <p:txBody>
+          <a:bodyPr rtlCol="0" anchor="ctr"/>
+          <a:lstStyle/>
+          <a:p>
+            <a:pPr algn="ctr"/>
+          </a:p>
+        </p:txBody>
+      </p:sp>
+      <p:sp>
+        <p:nvSpPr>
+          <p:cNvPr id="10" name="TextBox 9"/>
+          <p:cNvSpPr txBox="1"/>
+          <p:nvPr/>
+        </p:nvSpPr>
+        <p:spPr>
+          <a:xfrm>
+            <a:off x="685800" y="5943600"/>
+            <a:ext cx="10789920" cy="502920"/>
+          </a:xfrm>
+          <a:prstGeom prst="rect">
+            <a:avLst/>
+          </a:prstGeom>
+          <a:noFill/>
+        </p:spPr>
+        <p:txBody>
+          <a:bodyPr wrap="square">
+            <a:spAutoFit/>
+          </a:bodyPr>
+          <a:lstStyle/>
+          <a:p>
+            <a:r>
+              <a:rPr sz="1100" b="0">
+                <a:solidFill>
+                  <a:srgbClr val="334E68"/>
+                </a:solidFill>
+                <a:latin typeface="Calibri"/>
+              </a:rPr>
+              <a:t>Admin analytics: visits, revenue, doctor load — backed by pandas DataFrames from the same MySQL DB.</a:t>
+            </a:r>
+          </a:p>
+        </p:txBody>
+      </p:sp>
+    </p:spTree>
+  </p:cSld>
+  <p:clrMapOvr>
+    <a:masterClrMapping/>
+  </p:clrMapOvr>
+</p:sld>
+</file>
+
+<file path=ppt/slides/slide21.xml><?xml version="1.0" encoding="utf-8"?>
+<p:sld xmlns:a="http://schemas.openxmlformats.org/drawingml/2006/main" xmlns:p="http://schemas.openxmlformats.org/presentationml/2006/main" xmlns:r="http://schemas.openxmlformats.org/officeDocument/2006/relationships">
+  <p:cSld>
+    <p:spTree>
+      <p:nvGrpSpPr>
+        <p:cNvPr id="1" name=""/>
+        <p:cNvGrpSpPr/>
+        <p:nvPr/>
+      </p:nvGrpSpPr>
+      <p:grpSpPr/>
+      <p:sp>
+        <p:nvSpPr>
+          <p:cNvPr id="2" name="Rectangle 1"/>
+          <p:cNvSpPr/>
+          <p:nvPr/>
+        </p:nvSpPr>
+        <p:spPr>
+          <a:xfrm>
+            <a:off x="502920" y="502920"/>
+            <a:ext cx="109728" cy="502920"/>
+          </a:xfrm>
+          <a:prstGeom prst="rect">
+            <a:avLst/>
+          </a:prstGeom>
+          <a:solidFill>
+            <a:srgbClr val="14B8A6"/>
+          </a:solidFill>
+          <a:ln>
+            <a:noFill/>
+          </a:ln>
+        </p:spPr>
+        <p:style>
+          <a:lnRef idx="1">
+            <a:schemeClr val="accent1"/>
+          </a:lnRef>
+          <a:fillRef idx="3">
+            <a:schemeClr val="accent1"/>
+          </a:fillRef>
+          <a:effectRef idx="2">
+            <a:schemeClr val="accent1"/>
+          </a:effectRef>
+          <a:fontRef idx="minor">
+            <a:schemeClr val="lt1"/>
+          </a:fontRef>
+        </p:style>
+        <p:txBody>
+          <a:bodyPr rtlCol="0" anchor="ctr"/>
+          <a:lstStyle/>
+          <a:p>
+            <a:pPr algn="ctr"/>
+          </a:p>
+        </p:txBody>
+      </p:sp>
+      <p:sp>
+        <p:nvSpPr>
+          <p:cNvPr id="3" name="TextBox 2"/>
+          <p:cNvSpPr txBox="1"/>
+          <p:nvPr/>
+        </p:nvSpPr>
+        <p:spPr>
+          <a:xfrm>
+            <a:off x="713232" y="457200"/>
+            <a:ext cx="10972800" cy="256032"/>
+          </a:xfrm>
+          <a:prstGeom prst="rect">
+            <a:avLst/>
+          </a:prstGeom>
+          <a:noFill/>
+        </p:spPr>
+        <p:txBody>
+          <a:bodyPr wrap="none">
+            <a:spAutoFit/>
+          </a:bodyPr>
+          <a:lstStyle/>
+          <a:p>
+            <a:r>
+              <a:rPr sz="1000" b="1">
+                <a:solidFill>
+                  <a:srgbClr val="14B8A6"/>
+                </a:solidFill>
+                <a:latin typeface="Calibri"/>
+              </a:rPr>
+              <a:t>SCREENSHOT 03</a:t>
+            </a:r>
+          </a:p>
+        </p:txBody>
+      </p:sp>
+      <p:sp>
+        <p:nvSpPr>
+          <p:cNvPr id="4" name="TextBox 3"/>
+          <p:cNvSpPr txBox="1"/>
+          <p:nvPr/>
+        </p:nvSpPr>
+        <p:spPr>
+          <a:xfrm>
+            <a:off x="713232" y="713232"/>
+            <a:ext cx="11155680" cy="502920"/>
+          </a:xfrm>
+          <a:prstGeom prst="rect">
+            <a:avLst/>
+          </a:prstGeom>
+          <a:noFill/>
+        </p:spPr>
+        <p:txBody>
+          <a:bodyPr wrap="none">
+            <a:spAutoFit/>
+          </a:bodyPr>
+          <a:lstStyle/>
+          <a:p>
+            <a:r>
+              <a:rPr sz="2600" b="1">
+                <a:solidFill>
+                  <a:srgbClr val="0F172A"/>
+                </a:solidFill>
+                <a:latin typeface="Calibri"/>
+              </a:rPr>
+              <a:t>Doctor consultation view</a:t>
+            </a:r>
+          </a:p>
+        </p:txBody>
+      </p:sp>
+      <p:sp>
+        <p:nvSpPr>
+          <p:cNvPr id="5" name="TextBox 4"/>
+          <p:cNvSpPr txBox="1"/>
+          <p:nvPr/>
+        </p:nvSpPr>
+        <p:spPr>
+          <a:xfrm>
+            <a:off x="713232" y="1234440"/>
+            <a:ext cx="11155680" cy="365760"/>
+          </a:xfrm>
+          <a:prstGeom prst="rect">
+            <a:avLst/>
+          </a:prstGeom>
+          <a:noFill/>
+        </p:spPr>
+        <p:txBody>
+          <a:bodyPr wrap="none">
+            <a:spAutoFit/>
+          </a:bodyPr>
+          <a:lstStyle/>
+          <a:p>
+            <a:r>
+              <a:rPr sz="1200">
+                <a:solidFill>
+                  <a:srgbClr val="64748B"/>
+                </a:solidFill>
+                <a:latin typeface="Calibri"/>
+              </a:rPr>
+              <a:t>Doctor-side schedule, AI-generated pre-visit brief, vitals, notes, and prescription writer.</a:t>
+            </a:r>
+          </a:p>
+        </p:txBody>
+      </p:sp>
+      <p:cxnSp>
+        <p:nvCxnSpPr>
+          <p:cNvPr id="6" name="Connector 5"/>
+          <p:cNvCxnSpPr/>
+          <p:nvPr/>
+        </p:nvCxnSpPr>
+        <p:spPr>
+          <a:xfrm>
+            <a:off x="713232" y="1627632"/>
+            <a:ext cx="10808208" cy="0"/>
+          </a:xfrm>
+          <a:prstGeom prst="line">
+            <a:avLst/>
+          </a:prstGeom>
+          <a:ln w="9525">
+            <a:solidFill>
+              <a:srgbClr val="E2E8F0"/>
+            </a:solidFill>
+          </a:ln>
+        </p:spPr>
+        <p:style>
+          <a:lnRef idx="2">
+            <a:schemeClr val="accent1"/>
+          </a:lnRef>
+          <a:fillRef idx="0">
+            <a:schemeClr val="accent1"/>
+          </a:fillRef>
+          <a:effectRef idx="1">
+            <a:schemeClr val="accent1"/>
+          </a:effectRef>
+          <a:fontRef idx="minor">
+            <a:schemeClr val="tx1"/>
+          </a:fontRef>
+        </p:style>
+      </p:cxnSp>
+      <p:sp>
+        <p:nvSpPr>
+          <p:cNvPr id="7" name="Rounded Rectangle 6"/>
+          <p:cNvSpPr/>
+          <p:nvPr/>
+        </p:nvSpPr>
+        <p:spPr>
+          <a:xfrm>
+            <a:off x="502920" y="1783080"/>
+            <a:ext cx="11155680" cy="4023360"/>
+          </a:xfrm>
+          <a:prstGeom prst="roundRect">
+            <a:avLst/>
+          </a:prstGeom>
+          <a:solidFill>
+            <a:srgbClr val="FFFFFF"/>
+          </a:solidFill>
+          <a:ln w="9525">
+            <a:solidFill>
+              <a:srgbClr val="CBD5E1"/>
+            </a:solidFill>
+          </a:ln>
+          <a:effectLst/>
+        </p:spPr>
+        <p:style>
+          <a:lnRef idx="1">
+            <a:schemeClr val="accent1"/>
+          </a:lnRef>
+          <a:fillRef idx="3">
+            <a:schemeClr val="accent1"/>
+          </a:fillRef>
+          <a:effectRef idx="2">
+            <a:schemeClr val="accent1"/>
+          </a:effectRef>
+          <a:fontRef idx="minor">
+            <a:schemeClr val="lt1"/>
+          </a:fontRef>
+        </p:style>
+        <p:txBody>
+          <a:bodyPr rtlCol="0" anchor="ctr"/>
+          <a:lstStyle/>
+          <a:p>
+            <a:pPr algn="ctr"/>
+          </a:p>
+        </p:txBody>
+      </p:sp>
+      <p:pic>
+        <p:nvPicPr>
+          <p:cNvPr id="8" name="Picture 7" descr="Screenshot 2026-08-20 211956.png"/>
+          <p:cNvPicPr>
+            <a:picLocks noChangeAspect="1"/>
+          </p:cNvPicPr>
+          <p:nvPr/>
+        </p:nvPicPr>
+        <p:blipFill>
+          <a:blip r:embed="rId2"/>
+          <a:stretch>
+            <a:fillRect/>
+          </a:stretch>
+        </p:blipFill>
+        <p:spPr>
+          <a:xfrm>
+            <a:off x="1979576" y="1920240"/>
+            <a:ext cx="8202367" cy="3749040"/>
+          </a:xfrm>
+          <a:prstGeom prst="rect">
+            <a:avLst/>
+          </a:prstGeom>
+        </p:spPr>
+      </p:pic>
+      <p:sp>
+        <p:nvSpPr>
+          <p:cNvPr id="9" name="Rounded Rectangle 8"/>
+          <p:cNvSpPr/>
+          <p:nvPr/>
+        </p:nvSpPr>
+        <p:spPr>
+          <a:xfrm>
+            <a:off x="502920" y="5897880"/>
+            <a:ext cx="11155680" cy="594360"/>
+          </a:xfrm>
+          <a:prstGeom prst="roundRect">
+            <a:avLst/>
+          </a:prstGeom>
+          <a:solidFill>
+            <a:srgbClr val="F1F5F9"/>
+          </a:solidFill>
+          <a:ln w="9525">
+            <a:solidFill>
+              <a:srgbClr val="CBD5E1"/>
+            </a:solidFill>
+          </a:ln>
+          <a:effectLst/>
+        </p:spPr>
+        <p:style>
+          <a:lnRef idx="1">
+            <a:schemeClr val="accent1"/>
+          </a:lnRef>
+          <a:fillRef idx="3">
+            <a:schemeClr val="accent1"/>
+          </a:fillRef>
+          <a:effectRef idx="2">
+            <a:schemeClr val="accent1"/>
+          </a:effectRef>
+          <a:fontRef idx="minor">
+            <a:schemeClr val="lt1"/>
+          </a:fontRef>
+        </p:style>
+        <p:txBody>
+          <a:bodyPr rtlCol="0" anchor="ctr"/>
+          <a:lstStyle/>
+          <a:p>
+            <a:pPr algn="ctr"/>
+          </a:p>
+        </p:txBody>
+      </p:sp>
+      <p:sp>
+        <p:nvSpPr>
+          <p:cNvPr id="10" name="TextBox 9"/>
+          <p:cNvSpPr txBox="1"/>
+          <p:nvPr/>
+        </p:nvSpPr>
+        <p:spPr>
+          <a:xfrm>
+            <a:off x="685800" y="5943600"/>
+            <a:ext cx="10789920" cy="502920"/>
+          </a:xfrm>
+          <a:prstGeom prst="rect">
+            <a:avLst/>
+          </a:prstGeom>
+          <a:noFill/>
+        </p:spPr>
+        <p:txBody>
+          <a:bodyPr wrap="square">
+            <a:spAutoFit/>
+          </a:bodyPr>
+          <a:lstStyle/>
+          <a:p>
+            <a:r>
+              <a:rPr sz="1100" b="0">
+                <a:solidFill>
+                  <a:srgbClr val="334E68"/>
+                </a:solidFill>
+                <a:latin typeface="Calibri"/>
+              </a:rPr>
+              <a:t>Doctor-side schedule, AI-generated pre-visit brief, vitals, notes, and prescription writer.</a:t>
+            </a:r>
+          </a:p>
+        </p:txBody>
+      </p:sp>
+    </p:spTree>
+  </p:cSld>
+  <p:clrMapOvr>
+    <a:masterClrMapping/>
+  </p:clrMapOvr>
+</p:sld>
+</file>
+
+<file path=ppt/slides/slide22.xml><?xml version="1.0" encoding="utf-8"?>
+<p:sld xmlns:a="http://schemas.openxmlformats.org/drawingml/2006/main" xmlns:p="http://schemas.openxmlformats.org/presentationml/2006/main" xmlns:r="http://schemas.openxmlformats.org/officeDocument/2006/relationships">
+  <p:cSld>
+    <p:spTree>
+      <p:nvGrpSpPr>
+        <p:cNvPr id="1" name=""/>
+        <p:cNvGrpSpPr/>
+        <p:nvPr/>
+      </p:nvGrpSpPr>
+      <p:grpSpPr/>
+      <p:sp>
+        <p:nvSpPr>
+          <p:cNvPr id="2" name="Rectangle 1"/>
+          <p:cNvSpPr/>
+          <p:nvPr/>
+        </p:nvSpPr>
+        <p:spPr>
+          <a:xfrm>
+            <a:off x="0" y="0"/>
+            <a:ext cx="12191695" cy="6858000"/>
+          </a:xfrm>
+          <a:prstGeom prst="rect">
+            <a:avLst/>
+          </a:prstGeom>
+          <a:solidFill>
+            <a:srgbClr val="FBFCFD"/>
+          </a:solidFill>
+          <a:ln>
+            <a:noFill/>
+          </a:ln>
+          <a:effectLst/>
+        </p:spPr>
+        <p:style>
+          <a:lnRef idx="1">
+            <a:schemeClr val="accent1"/>
+          </a:lnRef>
+          <a:fillRef idx="3">
+            <a:schemeClr val="accent1"/>
+          </a:fillRef>
+          <a:effectRef idx="2">
+            <a:schemeClr val="accent1"/>
+          </a:effectRef>
+          <a:fontRef idx="minor">
+            <a:schemeClr val="lt1"/>
+          </a:fontRef>
+        </p:style>
+        <p:txBody>
+          <a:bodyPr rtlCol="0" anchor="ctr"/>
+          <a:lstStyle/>
+          <a:p>
+            <a:pPr algn="ctr"/>
+          </a:p>
+        </p:txBody>
+      </p:sp>
+      <p:sp>
+        <p:nvSpPr>
+          <p:cNvPr id="3" name="Rectangle 2"/>
+          <p:cNvSpPr/>
+          <p:nvPr/>
+        </p:nvSpPr>
+        <p:spPr>
+          <a:xfrm>
+            <a:off x="0" y="0"/>
+            <a:ext cx="12191695" cy="3200400"/>
+          </a:xfrm>
+          <a:prstGeom prst="rect">
+            <a:avLst/>
+          </a:prstGeom>
+          <a:solidFill>
+            <a:srgbClr val="0E4F8A"/>
+          </a:solidFill>
+          <a:ln>
+            <a:noFill/>
+          </a:ln>
+          <a:effectLst/>
+        </p:spPr>
+        <p:style>
+          <a:lnRef idx="1">
+            <a:schemeClr val="accent1"/>
+          </a:lnRef>
+          <a:fillRef idx="3">
+            <a:schemeClr val="accent1"/>
+          </a:fillRef>
+          <a:effectRef idx="2">
+            <a:schemeClr val="accent1"/>
+          </a:effectRef>
+          <a:fontRef idx="minor">
+            <a:schemeClr val="lt1"/>
+          </a:fontRef>
+        </p:style>
+        <p:txBody>
+          <a:bodyPr rtlCol="0" anchor="ctr"/>
+          <a:lstStyle/>
+          <a:p>
+            <a:pPr algn="ctr"/>
+          </a:p>
+        </p:txBody>
+      </p:sp>
+      <p:sp>
+        <p:nvSpPr>
+          <p:cNvPr id="4" name="Rectangle 3"/>
+          <p:cNvSpPr/>
+          <p:nvPr/>
+        </p:nvSpPr>
+        <p:spPr>
+          <a:xfrm>
+            <a:off x="0" y="3200400"/>
+            <a:ext cx="12191695" cy="54864"/>
+          </a:xfrm>
+          <a:prstGeom prst="rect">
+            <a:avLst/>
+          </a:prstGeom>
+          <a:solidFill>
+            <a:srgbClr val="14B8A6"/>
+          </a:solidFill>
+          <a:ln>
+            <a:noFill/>
+          </a:ln>
+          <a:effectLst/>
+        </p:spPr>
+        <p:style>
+          <a:lnRef idx="1">
+            <a:schemeClr val="accent1"/>
+          </a:lnRef>
+          <a:fillRef idx="3">
+            <a:schemeClr val="accent1"/>
+          </a:fillRef>
+          <a:effectRef idx="2">
+            <a:schemeClr val="accent1"/>
+          </a:effectRef>
+          <a:fontRef idx="minor">
+            <a:schemeClr val="lt1"/>
+          </a:fontRef>
+        </p:style>
+        <p:txBody>
+          <a:bodyPr rtlCol="0" anchor="ctr"/>
+          <a:lstStyle/>
+          <a:p>
+            <a:pPr algn="ctr"/>
+          </a:p>
+        </p:txBody>
+      </p:sp>
+      <p:sp>
+        <p:nvSpPr>
+          <p:cNvPr id="5" name="Oval 4"/>
+          <p:cNvSpPr/>
+          <p:nvPr/>
+        </p:nvSpPr>
+        <p:spPr>
+          <a:xfrm>
+            <a:off x="9601200" y="-1371600"/>
+            <a:ext cx="3200400" cy="3200400"/>
+          </a:xfrm>
+          <a:prstGeom prst="ellipse">
+            <a:avLst/>
+          </a:prstGeom>
+          <a:solidFill>
+            <a:srgbClr val="066FA8"/>
+          </a:solidFill>
+          <a:ln>
+            <a:noFill/>
+          </a:ln>
+          <a:effectLst/>
+        </p:spPr>
+        <p:style>
+          <a:lnRef idx="1">
+            <a:schemeClr val="accent1"/>
+          </a:lnRef>
+          <a:fillRef idx="3">
+            <a:schemeClr val="accent1"/>
+          </a:fillRef>
+          <a:effectRef idx="2">
+            <a:schemeClr val="accent1"/>
+          </a:effectRef>
+          <a:fontRef idx="minor">
+            <a:schemeClr val="lt1"/>
+          </a:fontRef>
+        </p:style>
+        <p:txBody>
+          <a:bodyPr rtlCol="0" anchor="ctr"/>
+          <a:lstStyle/>
+          <a:p>
+            <a:pPr algn="ctr"/>
+          </a:p>
+        </p:txBody>
+      </p:sp>
+      <p:sp>
+        <p:nvSpPr>
+          <p:cNvPr id="6" name="Oval 5"/>
+          <p:cNvSpPr/>
+          <p:nvPr/>
+        </p:nvSpPr>
+        <p:spPr>
+          <a:xfrm>
+            <a:off x="10789920" y="731520"/>
+            <a:ext cx="1828800" cy="1828800"/>
+          </a:xfrm>
+          <a:prstGeom prst="ellipse">
+            <a:avLst/>
+          </a:prstGeom>
+          <a:solidFill>
+            <a:srgbClr val="14B8A6"/>
+          </a:solidFill>
+          <a:ln>
+            <a:noFill/>
+          </a:ln>
+          <a:effectLst/>
+        </p:spPr>
+        <p:style>
+          <a:lnRef idx="1">
+            <a:schemeClr val="accent1"/>
+          </a:lnRef>
+          <a:fillRef idx="3">
+            <a:schemeClr val="accent1"/>
+          </a:fillRef>
+          <a:effectRef idx="2">
+            <a:schemeClr val="accent1"/>
+          </a:effectRef>
+          <a:fontRef idx="minor">
+            <a:schemeClr val="lt1"/>
+          </a:fontRef>
+        </p:style>
+        <p:txBody>
+          <a:bodyPr rtlCol="0" anchor="ctr"/>
+          <a:lstStyle/>
+          <a:p>
+            <a:pPr algn="ctr"/>
+          </a:p>
+        </p:txBody>
+      </p:sp>
+      <p:sp>
+        <p:nvSpPr>
+          <p:cNvPr id="7" name="TextBox 6"/>
+          <p:cNvSpPr txBox="1"/>
+          <p:nvPr/>
+        </p:nvSpPr>
+        <p:spPr>
+          <a:xfrm>
+            <a:off x="640080" y="640080"/>
+            <a:ext cx="10058400" cy="365760"/>
+          </a:xfrm>
+          <a:prstGeom prst="rect">
+            <a:avLst/>
+          </a:prstGeom>
+          <a:noFill/>
+        </p:spPr>
+        <p:txBody>
+          <a:bodyPr wrap="square" lIns="36000" rIns="36000" tIns="18000" bIns="18000" anchor="t">
+            <a:spAutoFit/>
+          </a:bodyPr>
+          <a:lstStyle/>
+          <a:p>
+            <a:pPr algn="l">
+              <a:lnSpc>
+                <a:spcPct val="120000"/>
+              </a:lnSpc>
+            </a:pPr>
+            <a:r>
+              <a:rPr sz="1400" b="1" i="0">
+                <a:solidFill>
+                  <a:srgbClr val="14B8A6"/>
+                </a:solidFill>
+                <a:latin typeface="Calibri"/>
+              </a:rPr>
+              <a:t>THANK YOU</a:t>
+            </a:r>
+          </a:p>
+        </p:txBody>
+      </p:sp>
+      <p:sp>
+        <p:nvSpPr>
+          <p:cNvPr id="8" name="TextBox 7"/>
+          <p:cNvSpPr txBox="1"/>
+          <p:nvPr/>
+        </p:nvSpPr>
+        <p:spPr>
+          <a:xfrm>
+            <a:off x="640080" y="960120"/>
+            <a:ext cx="10058400" cy="1097280"/>
+          </a:xfrm>
+          <a:prstGeom prst="rect">
+            <a:avLst/>
+          </a:prstGeom>
+          <a:noFill/>
+        </p:spPr>
+        <p:txBody>
+          <a:bodyPr wrap="square" lIns="36000" rIns="36000" tIns="18000" bIns="18000" anchor="t">
+            <a:spAutoFit/>
+          </a:bodyPr>
+          <a:lstStyle/>
+          <a:p>
+            <a:pPr algn="l">
+              <a:lnSpc>
+                <a:spcPct val="120000"/>
+              </a:lnSpc>
+            </a:pPr>
+            <a:r>
+              <a:rPr sz="4400" b="1" i="0">
+                <a:solidFill>
+                  <a:srgbClr val="FFFFFF"/>
+                </a:solidFill>
+                <a:latin typeface="Calibri"/>
+              </a:rPr>
+              <a:t>That's IPCMS.</a:t>
+            </a:r>
+          </a:p>
+        </p:txBody>
+      </p:sp>
+      <p:sp>
+        <p:nvSpPr>
+          <p:cNvPr id="9" name="TextBox 8"/>
+          <p:cNvSpPr txBox="1"/>
+          <p:nvPr/>
+        </p:nvSpPr>
+        <p:spPr>
+          <a:xfrm>
+            <a:off x="640080" y="2011680"/>
+            <a:ext cx="9144000" cy="822960"/>
+          </a:xfrm>
+          <a:prstGeom prst="rect">
+            <a:avLst/>
+          </a:prstGeom>
+          <a:noFill/>
+        </p:spPr>
+        <p:txBody>
+          <a:bodyPr wrap="square" lIns="36000" rIns="36000" tIns="18000" bIns="18000" anchor="t">
+            <a:spAutoFit/>
+          </a:bodyPr>
+          <a:lstStyle/>
+          <a:p>
+            <a:pPr algn="l">
+              <a:lnSpc>
+                <a:spcPct val="140000"/>
+              </a:lnSpc>
+            </a:pPr>
+            <a:r>
+              <a:rPr sz="1400" b="0" i="1">
+                <a:solidFill>
+                  <a:srgbClr val="CCFBF1"/>
+                </a:solidFill>
+                <a:latin typeface="Calibri"/>
+              </a:rPr>
+              <a:t>A patient-care app that doesn't pretend AI is magic — it just moves the right information to the right person, faster.</a:t>
+            </a:r>
+          </a:p>
+        </p:txBody>
+      </p:sp>
+      <p:sp>
+        <p:nvSpPr>
+          <p:cNvPr id="10" name="Rounded Rectangle 9"/>
+          <p:cNvSpPr/>
+          <p:nvPr/>
+        </p:nvSpPr>
+        <p:spPr>
+          <a:xfrm>
+            <a:off x="502920" y="3520440"/>
+            <a:ext cx="3703320" cy="2788920"/>
+          </a:xfrm>
+          <a:prstGeom prst="roundRect">
+            <a:avLst>
+              <a:gd name="adj" fmla="val 4000"/>
+            </a:avLst>
+          </a:prstGeom>
+          <a:solidFill>
+            <a:srgbClr val="FFFFFF"/>
+          </a:solidFill>
+          <a:ln w="9525">
+            <a:solidFill>
+              <a:srgbClr val="CBD5E1"/>
+            </a:solidFill>
+          </a:ln>
+          <a:effectLst/>
+        </p:spPr>
+        <p:style>
+          <a:lnRef idx="1">
+            <a:schemeClr val="accent1"/>
+          </a:lnRef>
+          <a:fillRef idx="3">
+            <a:schemeClr val="accent1"/>
+          </a:fillRef>
+          <a:effectRef idx="2">
+            <a:schemeClr val="accent1"/>
+          </a:effectRef>
+          <a:fontRef idx="minor">
+            <a:schemeClr val="lt1"/>
+          </a:fontRef>
+        </p:style>
+        <p:txBody>
+          <a:bodyPr rtlCol="0" anchor="ctr"/>
+          <a:lstStyle/>
+          <a:p>
+            <a:pPr algn="ctr"/>
+          </a:p>
+        </p:txBody>
+      </p:sp>
+      <p:sp>
+        <p:nvSpPr>
+          <p:cNvPr id="11" name="Rectangle 10"/>
+          <p:cNvSpPr/>
+          <p:nvPr/>
+        </p:nvSpPr>
+        <p:spPr>
+          <a:xfrm>
+            <a:off x="502920" y="3520440"/>
+            <a:ext cx="3703320" cy="502920"/>
+          </a:xfrm>
+          <a:prstGeom prst="rect">
+            <a:avLst/>
+          </a:prstGeom>
+          <a:solidFill>
+            <a:srgbClr val="0E4F8A"/>
+          </a:solidFill>
+          <a:ln>
+            <a:noFill/>
+          </a:ln>
+          <a:effectLst/>
+        </p:spPr>
+        <p:style>
+          <a:lnRef idx="1">
+            <a:schemeClr val="accent1"/>
+          </a:lnRef>
+          <a:fillRef idx="3">
+            <a:schemeClr val="accent1"/>
+          </a:fillRef>
+          <a:effectRef idx="2">
+            <a:schemeClr val="accent1"/>
+          </a:effectRef>
+          <a:fontRef idx="minor">
+            <a:schemeClr val="lt1"/>
+          </a:fontRef>
+        </p:style>
+        <p:txBody>
+          <a:bodyPr rtlCol="0" anchor="ctr"/>
+          <a:lstStyle/>
+          <a:p>
+            <a:pPr algn="ctr"/>
+          </a:p>
+        </p:txBody>
+      </p:sp>
+      <p:sp>
+        <p:nvSpPr>
+          <p:cNvPr id="12" name="TextBox 11"/>
+          <p:cNvSpPr txBox="1"/>
+          <p:nvPr/>
+        </p:nvSpPr>
+        <p:spPr>
+          <a:xfrm>
+            <a:off x="777240" y="3520440"/>
+            <a:ext cx="3154680" cy="502920"/>
+          </a:xfrm>
+          <a:prstGeom prst="rect">
+            <a:avLst/>
+          </a:prstGeom>
+          <a:noFill/>
+        </p:spPr>
+        <p:txBody>
+          <a:bodyPr wrap="square" lIns="36000" rIns="36000" tIns="18000" bIns="18000" anchor="ctr">
+            <a:spAutoFit/>
+          </a:bodyPr>
+          <a:lstStyle/>
+          <a:p>
+            <a:pPr algn="l">
+              <a:lnSpc>
+                <a:spcPct val="120000"/>
+              </a:lnSpc>
+            </a:pPr>
+            <a:r>
+              <a:rPr sz="1300" b="1" i="0">
+                <a:solidFill>
+                  <a:srgbClr val="FFFFFF"/>
+                </a:solidFill>
+                <a:latin typeface="Calibri"/>
+              </a:rPr>
+              <a:t>What you'd build next</a:t>
+            </a:r>
+          </a:p>
+        </p:txBody>
+      </p:sp>
+      <p:sp>
+        <p:nvSpPr>
+          <p:cNvPr id="13" name="TextBox 12"/>
+          <p:cNvSpPr txBox="1"/>
+          <p:nvPr/>
+        </p:nvSpPr>
+        <p:spPr>
+          <a:xfrm>
+            <a:off x="777240" y="4206240"/>
+            <a:ext cx="3246120" cy="1965960"/>
+          </a:xfrm>
+          <a:prstGeom prst="rect">
+            <a:avLst/>
+          </a:prstGeom>
+          <a:noFill/>
+        </p:spPr>
+        <p:txBody>
+          <a:bodyPr wrap="square" lIns="36000" rIns="36000" tIns="18000" bIns="18000">
+            <a:spAutoFit/>
+          </a:bodyPr>
+          <a:lstStyle/>
+          <a:p>
+            <a:pPr algn="l">
+              <a:lnSpc>
+                <a:spcPct val="140000"/>
+              </a:lnSpc>
+              <a:spcBef>
+                <a:spcPts val="300"/>
+              </a:spcBef>
+              <a:spcAft>
+                <a:spcPts val="200"/>
+              </a:spcAft>
+            </a:pPr>
+            <a:r>
+              <a:rPr sz="1050">
+                <a:solidFill>
+                  <a:srgbClr val="334E68"/>
+                </a:solidFill>
+                <a:latin typeface="Calibri"/>
+              </a:rPr>
+              <a:t>•  Multi-language chatbot (Hindi, Spanish).</a:t>
+            </a:r>
+          </a:p>
+          <a:p>
+            <a:pPr algn="l">
+              <a:lnSpc>
+                <a:spcPct val="140000"/>
+              </a:lnSpc>
+              <a:spcBef>
+                <a:spcPts val="300"/>
+              </a:spcBef>
+              <a:spcAft>
+                <a:spcPts val="200"/>
+              </a:spcAft>
+            </a:pPr>
+            <a:r>
+              <a:rPr sz="1050">
+                <a:solidFill>
+                  <a:srgbClr val="334E68"/>
+                </a:solidFill>
+                <a:latin typeface="Calibri"/>
+              </a:rPr>
+              <a:t>•  Doctor-side calendar sync (Google Calendar).</a:t>
+            </a:r>
+          </a:p>
+          <a:p>
+            <a:pPr algn="l">
+              <a:lnSpc>
+                <a:spcPct val="140000"/>
+              </a:lnSpc>
+              <a:spcBef>
+                <a:spcPts val="300"/>
+              </a:spcBef>
+              <a:spcAft>
+                <a:spcPts val="200"/>
+              </a:spcAft>
+            </a:pPr>
+            <a:r>
+              <a:rPr sz="1050">
+                <a:solidFill>
+                  <a:srgbClr val="334E68"/>
+                </a:solidFill>
+                <a:latin typeface="Calibri"/>
+              </a:rPr>
+              <a:t>•  Insurance + billing module.</a:t>
+            </a:r>
+          </a:p>
+          <a:p>
+            <a:pPr algn="l">
+              <a:lnSpc>
+                <a:spcPct val="140000"/>
+              </a:lnSpc>
+              <a:spcBef>
+                <a:spcPts val="300"/>
+              </a:spcBef>
+              <a:spcAft>
+                <a:spcPts val="200"/>
+              </a:spcAft>
+            </a:pPr>
+            <a:r>
+              <a:rPr sz="1050">
+                <a:solidFill>
+                  <a:srgbClr val="334E68"/>
+                </a:solidFill>
+                <a:latin typeface="Calibri"/>
+              </a:rPr>
+              <a:t>•  Mobile-first layout (current is desktop-tuned).</a:t>
+            </a:r>
+          </a:p>
+        </p:txBody>
+      </p:sp>
+      <p:sp>
+        <p:nvSpPr>
+          <p:cNvPr id="14" name="Rounded Rectangle 13"/>
+          <p:cNvSpPr/>
+          <p:nvPr/>
+        </p:nvSpPr>
+        <p:spPr>
+          <a:xfrm>
+            <a:off x="4343400" y="3520440"/>
+            <a:ext cx="3703320" cy="2788920"/>
+          </a:xfrm>
+          <a:prstGeom prst="roundRect">
+            <a:avLst>
+              <a:gd name="adj" fmla="val 4000"/>
+            </a:avLst>
+          </a:prstGeom>
+          <a:solidFill>
+            <a:srgbClr val="FFFFFF"/>
+          </a:solidFill>
+          <a:ln w="9525">
+            <a:solidFill>
+              <a:srgbClr val="CBD5E1"/>
+            </a:solidFill>
+          </a:ln>
+          <a:effectLst/>
+        </p:spPr>
+        <p:style>
+          <a:lnRef idx="1">
+            <a:schemeClr val="accent1"/>
+          </a:lnRef>
+          <a:fillRef idx="3">
+            <a:schemeClr val="accent1"/>
+          </a:fillRef>
+          <a:effectRef idx="2">
+            <a:schemeClr val="accent1"/>
+          </a:effectRef>
+          <a:fontRef idx="minor">
+            <a:schemeClr val="lt1"/>
+          </a:fontRef>
+        </p:style>
+        <p:txBody>
+          <a:bodyPr rtlCol="0" anchor="ctr"/>
+          <a:lstStyle/>
+          <a:p>
+            <a:pPr algn="ctr"/>
+          </a:p>
+        </p:txBody>
+      </p:sp>
+      <p:sp>
+        <p:nvSpPr>
+          <p:cNvPr id="15" name="Rectangle 14"/>
+          <p:cNvSpPr/>
+          <p:nvPr/>
+        </p:nvSpPr>
+        <p:spPr>
+          <a:xfrm>
+            <a:off x="4343400" y="3520440"/>
+            <a:ext cx="3703320" cy="502920"/>
+          </a:xfrm>
+          <a:prstGeom prst="rect">
+            <a:avLst/>
+          </a:prstGeom>
+          <a:solidFill>
+            <a:srgbClr val="EA580C"/>
+          </a:solidFill>
+          <a:ln>
+            <a:noFill/>
+          </a:ln>
+          <a:effectLst/>
+        </p:spPr>
+        <p:style>
+          <a:lnRef idx="1">
+            <a:schemeClr val="accent1"/>
+          </a:lnRef>
+          <a:fillRef idx="3">
+            <a:schemeClr val="accent1"/>
+          </a:fillRef>
+          <a:effectRef idx="2">
+            <a:schemeClr val="accent1"/>
+          </a:effectRef>
+          <a:fontRef idx="minor">
+            <a:schemeClr val="lt1"/>
+          </a:fontRef>
+        </p:style>
+        <p:txBody>
+          <a:bodyPr rtlCol="0" anchor="ctr"/>
+          <a:lstStyle/>
+          <a:p>
+            <a:pPr algn="ctr"/>
+          </a:p>
+        </p:txBody>
+      </p:sp>
+      <p:sp>
+        <p:nvSpPr>
+          <p:cNvPr id="16" name="TextBox 15"/>
+          <p:cNvSpPr txBox="1"/>
+          <p:nvPr/>
+        </p:nvSpPr>
+        <p:spPr>
+          <a:xfrm>
+            <a:off x="4617720" y="3520440"/>
+            <a:ext cx="3154680" cy="502920"/>
+          </a:xfrm>
+          <a:prstGeom prst="rect">
+            <a:avLst/>
+          </a:prstGeom>
+          <a:noFill/>
+        </p:spPr>
+        <p:txBody>
+          <a:bodyPr wrap="square" lIns="36000" rIns="36000" tIns="18000" bIns="18000" anchor="ctr">
+            <a:spAutoFit/>
+          </a:bodyPr>
+          <a:lstStyle/>
+          <a:p>
+            <a:pPr algn="l">
+              <a:lnSpc>
+                <a:spcPct val="120000"/>
+              </a:lnSpc>
+            </a:pPr>
+            <a:r>
+              <a:rPr sz="1300" b="1" i="0">
+                <a:solidFill>
+                  <a:srgbClr val="FFFFFF"/>
+                </a:solidFill>
+                <a:latin typeface="Calibri"/>
+              </a:rPr>
+              <a:t>What I'd watch</a:t>
+            </a:r>
+          </a:p>
+        </p:txBody>
+      </p:sp>
+      <p:sp>
+        <p:nvSpPr>
+          <p:cNvPr id="17" name="TextBox 16"/>
+          <p:cNvSpPr txBox="1"/>
+          <p:nvPr/>
+        </p:nvSpPr>
+        <p:spPr>
+          <a:xfrm>
+            <a:off x="4617720" y="4206240"/>
+            <a:ext cx="3246120" cy="1965960"/>
+          </a:xfrm>
+          <a:prstGeom prst="rect">
+            <a:avLst/>
+          </a:prstGeom>
+          <a:noFill/>
+        </p:spPr>
+        <p:txBody>
+          <a:bodyPr wrap="square" lIns="36000" rIns="36000" tIns="18000" bIns="18000">
+            <a:spAutoFit/>
+          </a:bodyPr>
+          <a:lstStyle/>
+          <a:p>
+            <a:pPr algn="l">
+              <a:lnSpc>
+                <a:spcPct val="140000"/>
+              </a:lnSpc>
+              <a:spcBef>
+                <a:spcPts val="300"/>
+              </a:spcBef>
+              <a:spcAft>
+                <a:spcPts val="200"/>
+              </a:spcAft>
+            </a:pPr>
+            <a:r>
+              <a:rPr sz="1050">
+                <a:solidFill>
+                  <a:srgbClr val="334E68"/>
+                </a:solidFill>
+                <a:latin typeface="Calibri"/>
+              </a:rPr>
+              <a:t>•  LLM cost scaling with concurrent doctors.</a:t>
+            </a:r>
+          </a:p>
+          <a:p>
+            <a:pPr algn="l">
+              <a:lnSpc>
+                <a:spcPct val="140000"/>
+              </a:lnSpc>
+              <a:spcBef>
+                <a:spcPts val="300"/>
+              </a:spcBef>
+              <a:spcAft>
+                <a:spcPts val="200"/>
+              </a:spcAft>
+            </a:pPr>
+            <a:r>
+              <a:rPr sz="1050">
+                <a:solidFill>
+                  <a:srgbClr val="334E68"/>
+                </a:solidFill>
+                <a:latin typeface="Calibri"/>
+              </a:rPr>
+              <a:t>•  MySQL connection pool under load.</a:t>
+            </a:r>
+          </a:p>
+          <a:p>
+            <a:pPr algn="l">
+              <a:lnSpc>
+                <a:spcPct val="140000"/>
+              </a:lnSpc>
+              <a:spcBef>
+                <a:spcPts val="300"/>
+              </a:spcBef>
+              <a:spcAft>
+                <a:spcPts val="200"/>
+              </a:spcAft>
+            </a:pPr>
+            <a:r>
+              <a:rPr sz="1050">
+                <a:solidFill>
+                  <a:srgbClr val="334E68"/>
+                </a:solidFill>
+                <a:latin typeface="Calibri"/>
+              </a:rPr>
+              <a:t>•  PII safety in AI prompts — no raw history leaks.</a:t>
+            </a:r>
+          </a:p>
+          <a:p>
+            <a:pPr algn="l">
+              <a:lnSpc>
+                <a:spcPct val="140000"/>
+              </a:lnSpc>
+              <a:spcBef>
+                <a:spcPts val="300"/>
+              </a:spcBef>
+              <a:spcAft>
+                <a:spcPts val="200"/>
+              </a:spcAft>
+            </a:pPr>
+            <a:r>
+              <a:rPr sz="1050">
+                <a:solidFill>
+                  <a:srgbClr val="334E68"/>
+                </a:solidFill>
+                <a:latin typeface="Calibri"/>
+              </a:rPr>
+              <a:t>•  Voice latency on low-end devices.</a:t>
+            </a:r>
+          </a:p>
+        </p:txBody>
+      </p:sp>
+      <p:sp>
+        <p:nvSpPr>
+          <p:cNvPr id="18" name="Rounded Rectangle 17"/>
+          <p:cNvSpPr/>
+          <p:nvPr/>
+        </p:nvSpPr>
+        <p:spPr>
+          <a:xfrm>
+            <a:off x="8183880" y="3520440"/>
+            <a:ext cx="3703320" cy="2788920"/>
+          </a:xfrm>
+          <a:prstGeom prst="roundRect">
+            <a:avLst>
+              <a:gd name="adj" fmla="val 4000"/>
+            </a:avLst>
+          </a:prstGeom>
+          <a:solidFill>
+            <a:srgbClr val="FFFFFF"/>
+          </a:solidFill>
+          <a:ln w="9525">
+            <a:solidFill>
+              <a:srgbClr val="CBD5E1"/>
+            </a:solidFill>
+          </a:ln>
+          <a:effectLst/>
+        </p:spPr>
+        <p:style>
+          <a:lnRef idx="1">
+            <a:schemeClr val="accent1"/>
+          </a:lnRef>
+          <a:fillRef idx="3">
+            <a:schemeClr val="accent1"/>
+          </a:fillRef>
+          <a:effectRef idx="2">
+            <a:schemeClr val="accent1"/>
+          </a:effectRef>
+          <a:fontRef idx="minor">
+            <a:schemeClr val="lt1"/>
+          </a:fontRef>
+        </p:style>
+        <p:txBody>
+          <a:bodyPr rtlCol="0" anchor="ctr"/>
+          <a:lstStyle/>
+          <a:p>
+            <a:pPr algn="ctr"/>
+          </a:p>
+        </p:txBody>
+      </p:sp>
+      <p:sp>
+        <p:nvSpPr>
+          <p:cNvPr id="19" name="Rectangle 18"/>
+          <p:cNvSpPr/>
+          <p:nvPr/>
+        </p:nvSpPr>
+        <p:spPr>
+          <a:xfrm>
+            <a:off x="8183880" y="3520440"/>
+            <a:ext cx="3703320" cy="502920"/>
+          </a:xfrm>
+          <a:prstGeom prst="rect">
+            <a:avLst/>
+          </a:prstGeom>
+          <a:solidFill>
+            <a:srgbClr val="14B8A6"/>
+          </a:solidFill>
+          <a:ln>
+            <a:noFill/>
+          </a:ln>
+          <a:effectLst/>
+        </p:spPr>
+        <p:style>
+          <a:lnRef idx="1">
+            <a:schemeClr val="accent1"/>
+          </a:lnRef>
+          <a:fillRef idx="3">
+            <a:schemeClr val="accent1"/>
+          </a:fillRef>
+          <a:effectRef idx="2">
+            <a:schemeClr val="accent1"/>
+          </a:effectRef>
+          <a:fontRef idx="minor">
+            <a:schemeClr val="lt1"/>
+          </a:fontRef>
+        </p:style>
+        <p:txBody>
+          <a:bodyPr rtlCol="0" anchor="ctr"/>
+          <a:lstStyle/>
+          <a:p>
+            <a:pPr algn="ctr"/>
+          </a:p>
+        </p:txBody>
+      </p:sp>
+      <p:sp>
+        <p:nvSpPr>
+          <p:cNvPr id="20" name="TextBox 19"/>
+          <p:cNvSpPr txBox="1"/>
+          <p:nvPr/>
+        </p:nvSpPr>
+        <p:spPr>
+          <a:xfrm>
+            <a:off x="8458200" y="3520440"/>
+            <a:ext cx="3154680" cy="502920"/>
+          </a:xfrm>
+          <a:prstGeom prst="rect">
+            <a:avLst/>
+          </a:prstGeom>
+          <a:noFill/>
+        </p:spPr>
+        <p:txBody>
+          <a:bodyPr wrap="square" lIns="36000" rIns="36000" tIns="18000" bIns="18000" anchor="ctr">
+            <a:spAutoFit/>
+          </a:bodyPr>
+          <a:lstStyle/>
+          <a:p>
+            <a:pPr algn="l">
+              <a:lnSpc>
+                <a:spcPct val="120000"/>
+              </a:lnSpc>
+            </a:pPr>
+            <a:r>
+              <a:rPr sz="1300" b="1" i="0">
+                <a:solidFill>
+                  <a:srgbClr val="FFFFFF"/>
+                </a:solidFill>
+                <a:latin typeface="Calibri"/>
+              </a:rPr>
+              <a:t>Where to look first</a:t>
+            </a:r>
+          </a:p>
+        </p:txBody>
+      </p:sp>
+      <p:sp>
+        <p:nvSpPr>
+          <p:cNvPr id="21" name="TextBox 20"/>
+          <p:cNvSpPr txBox="1"/>
+          <p:nvPr/>
+        </p:nvSpPr>
+        <p:spPr>
+          <a:xfrm>
+            <a:off x="8458200" y="4206240"/>
+            <a:ext cx="3246120" cy="1965960"/>
+          </a:xfrm>
+          <a:prstGeom prst="rect">
+            <a:avLst/>
+          </a:prstGeom>
+          <a:noFill/>
+        </p:spPr>
+        <p:txBody>
+          <a:bodyPr wrap="square" lIns="36000" rIns="36000" tIns="18000" bIns="18000">
+            <a:spAutoFit/>
+          </a:bodyPr>
+          <a:lstStyle/>
+          <a:p>
+            <a:pPr algn="l">
+              <a:lnSpc>
+                <a:spcPct val="140000"/>
+              </a:lnSpc>
+              <a:spcBef>
+                <a:spcPts val="300"/>
+              </a:spcBef>
+              <a:spcAft>
+                <a:spcPts val="200"/>
+              </a:spcAft>
+            </a:pPr>
+            <a:r>
+              <a:rPr sz="1050">
+                <a:solidFill>
+                  <a:srgbClr val="334E68"/>
+                </a:solidFill>
+                <a:latin typeface="Calibri"/>
+              </a:rPr>
+              <a:t>•  app.py — the entry point &amp; theme.</a:t>
+            </a:r>
+          </a:p>
+          <a:p>
+            <a:pPr algn="l">
+              <a:lnSpc>
+                <a:spcPct val="140000"/>
+              </a:lnSpc>
+              <a:spcBef>
+                <a:spcPts val="300"/>
+              </a:spcBef>
+              <a:spcAft>
+                <a:spcPts val="200"/>
+              </a:spcAft>
+            </a:pPr>
+            <a:r>
+              <a:rPr sz="1050">
+                <a:solidFill>
+                  <a:srgbClr val="334E68"/>
+                </a:solidFill>
+                <a:latin typeface="Calibri"/>
+              </a:rPr>
+              <a:t>•  pages/ai_care.py — the AI brain.</a:t>
+            </a:r>
+          </a:p>
+          <a:p>
+            <a:pPr algn="l">
+              <a:lnSpc>
+                <a:spcPct val="140000"/>
+              </a:lnSpc>
+              <a:spcBef>
+                <a:spcPts val="300"/>
+              </a:spcBef>
+              <a:spcAft>
+                <a:spcPts val="200"/>
+              </a:spcAft>
+            </a:pPr>
+            <a:r>
+              <a:rPr sz="1050">
+                <a:solidFill>
+                  <a:srgbClr val="334E68"/>
+                </a:solidFill>
+                <a:latin typeface="Calibri"/>
+              </a:rPr>
+              <a:t>•  db.py — schema and dialect switching.</a:t>
+            </a:r>
+          </a:p>
+          <a:p>
+            <a:pPr algn="l">
+              <a:lnSpc>
+                <a:spcPct val="140000"/>
+              </a:lnSpc>
+              <a:spcBef>
+                <a:spcPts val="300"/>
+              </a:spcBef>
+              <a:spcAft>
+                <a:spcPts val="200"/>
+              </a:spcAft>
+            </a:pPr>
+            <a:r>
+              <a:rPr sz="1050">
+                <a:solidFill>
+                  <a:srgbClr val="334E68"/>
+                </a:solidFill>
+                <a:latin typeface="Calibri"/>
+              </a:rPr>
+              <a:t>•  .env.example — keys to bring your own.</a:t>
+            </a:r>
+          </a:p>
+        </p:txBody>
+      </p:sp>
+      <p:sp>
+        <p:nvSpPr>
+          <p:cNvPr id="22" name="Rectangle 21"/>
+          <p:cNvSpPr/>
+          <p:nvPr/>
+        </p:nvSpPr>
+        <p:spPr>
+          <a:xfrm>
+            <a:off x="0" y="6565392"/>
+            <a:ext cx="12191695" cy="292608"/>
+          </a:xfrm>
+          <a:prstGeom prst="rect">
+            <a:avLst/>
+          </a:prstGeom>
+          <a:solidFill>
+            <a:srgbClr val="F1F5F9"/>
+          </a:solidFill>
+          <a:ln>
+            <a:noFill/>
+          </a:ln>
+          <a:effectLst/>
+        </p:spPr>
+        <p:style>
+          <a:lnRef idx="1">
+            <a:schemeClr val="accent1"/>
+          </a:lnRef>
+          <a:fillRef idx="3">
+            <a:schemeClr val="accent1"/>
+          </a:fillRef>
+          <a:effectRef idx="2">
+            <a:schemeClr val="accent1"/>
+          </a:effectRef>
+          <a:fontRef idx="minor">
+            <a:schemeClr val="lt1"/>
+          </a:fontRef>
+        </p:style>
+        <p:txBody>
+          <a:bodyPr rtlCol="0" anchor="ctr"/>
+          <a:lstStyle/>
+          <a:p>
+            <a:pPr algn="ctr"/>
+          </a:p>
+        </p:txBody>
+      </p:sp>
+      <p:sp>
+        <p:nvSpPr>
+          <p:cNvPr id="23" name="TextBox 22"/>
+          <p:cNvSpPr txBox="1"/>
+          <p:nvPr/>
+        </p:nvSpPr>
+        <p:spPr>
+          <a:xfrm>
+            <a:off x="365760" y="6601968"/>
+            <a:ext cx="8229600" cy="228600"/>
+          </a:xfrm>
+          <a:prstGeom prst="rect">
+            <a:avLst/>
+          </a:prstGeom>
+          <a:noFill/>
+        </p:spPr>
+        <p:txBody>
+          <a:bodyPr wrap="square" lIns="36000" rIns="36000" tIns="18000" bIns="18000" anchor="t">
+            <a:spAutoFit/>
+          </a:bodyPr>
+          <a:lstStyle/>
+          <a:p>
+            <a:pPr algn="l">
+              <a:lnSpc>
+                <a:spcPct val="120000"/>
+              </a:lnSpc>
+            </a:pPr>
+            <a:r>
+              <a:rPr sz="900" b="0" i="1">
+                <a:solidFill>
+                  <a:srgbClr val="64748B"/>
+                </a:solidFill>
+                <a:latin typeface="Calibri"/>
+              </a:rPr>
+              <a:t>IPCMS — Integrated Patient Care Management System</a:t>
+            </a:r>
+          </a:p>
+        </p:txBody>
+      </p:sp>
+      <p:sp>
+        <p:nvSpPr>
+          <p:cNvPr id="24" name="TextBox 23"/>
+          <p:cNvSpPr txBox="1"/>
+          <p:nvPr/>
+        </p:nvSpPr>
+        <p:spPr>
+          <a:xfrm>
+            <a:off x="10607040" y="6601968"/>
+            <a:ext cx="1280160" cy="228600"/>
+          </a:xfrm>
+          <a:prstGeom prst="rect">
+            <a:avLst/>
+          </a:prstGeom>
+          <a:noFill/>
+        </p:spPr>
+        <p:txBody>
+          <a:bodyPr wrap="square" lIns="36000" rIns="36000" tIns="18000" bIns="18000" anchor="t">
+            <a:spAutoFit/>
+          </a:bodyPr>
+          <a:lstStyle/>
+          <a:p>
+            <a:pPr algn="r">
+              <a:lnSpc>
+                <a:spcPct val="120000"/>
+              </a:lnSpc>
+            </a:pPr>
+            <a:r>
+              <a:rPr sz="900" b="0" i="0">
+                <a:solidFill>
+                  <a:srgbClr val="64748B"/>
+                </a:solidFill>
+                <a:latin typeface="Calibri"/>
+              </a:rPr>
+              <a:t>19 / 24</a:t>
+            </a:r>
+          </a:p>
+        </p:txBody>
+      </p:sp>
+    </p:spTree>
+  </p:cSld>
+  <p:clrMapOvr>
+    <a:masterClrMapping/>
+  </p:clrMapOvr>
+</p:sld>
+</file>
+
+<file path=ppt/slides/slide23.xml><?xml version="1.0" encoding="utf-8"?>
+<p:sld xmlns:a="http://schemas.openxmlformats.org/drawingml/2006/main" xmlns:p="http://schemas.openxmlformats.org/presentationml/2006/main" xmlns:r="http://schemas.openxmlformats.org/officeDocument/2006/relationships">
+  <p:cSld>
+    <p:spTree>
+      <p:nvGrpSpPr>
+        <p:cNvPr id="1" name=""/>
+        <p:cNvGrpSpPr/>
+        <p:nvPr/>
+      </p:nvGrpSpPr>
+      <p:grpSpPr/>
+      <p:sp>
+        <p:nvSpPr>
+          <p:cNvPr id="2" name="Rectangle 1"/>
+          <p:cNvSpPr/>
+          <p:nvPr/>
+        </p:nvSpPr>
+        <p:spPr>
+          <a:xfrm>
+            <a:off x="502920" y="502920"/>
+            <a:ext cx="109728" cy="502920"/>
+          </a:xfrm>
+          <a:prstGeom prst="rect">
+            <a:avLst/>
+          </a:prstGeom>
+          <a:solidFill>
+            <a:srgbClr val="14B8A6"/>
+          </a:solidFill>
+          <a:ln>
+            <a:noFill/>
+          </a:ln>
+        </p:spPr>
+        <p:style>
+          <a:lnRef idx="1">
+            <a:schemeClr val="accent1"/>
+          </a:lnRef>
+          <a:fillRef idx="3">
+            <a:schemeClr val="accent1"/>
+          </a:fillRef>
+          <a:effectRef idx="2">
+            <a:schemeClr val="accent1"/>
+          </a:effectRef>
+          <a:fontRef idx="minor">
+            <a:schemeClr val="lt1"/>
+          </a:fontRef>
+        </p:style>
+        <p:txBody>
+          <a:bodyPr rtlCol="0" anchor="ctr"/>
+          <a:lstStyle/>
+          <a:p>
+            <a:pPr algn="ctr"/>
+          </a:p>
+        </p:txBody>
+      </p:sp>
+      <p:sp>
+        <p:nvSpPr>
+          <p:cNvPr id="3" name="TextBox 2"/>
+          <p:cNvSpPr txBox="1"/>
+          <p:nvPr/>
+        </p:nvSpPr>
+        <p:spPr>
+          <a:xfrm>
+            <a:off x="713232" y="457200"/>
+            <a:ext cx="10972800" cy="256032"/>
+          </a:xfrm>
+          <a:prstGeom prst="rect">
+            <a:avLst/>
+          </a:prstGeom>
+          <a:noFill/>
+        </p:spPr>
+        <p:txBody>
+          <a:bodyPr wrap="none">
+            <a:spAutoFit/>
+          </a:bodyPr>
+          <a:lstStyle/>
+          <a:p>
+            <a:r>
+              <a:rPr sz="1000" b="1">
+                <a:solidFill>
+                  <a:srgbClr val="14B8A6"/>
+                </a:solidFill>
+                <a:latin typeface="Calibri"/>
+              </a:rPr>
+              <a:t>SCREENSHOT 02</a:t>
+            </a:r>
+          </a:p>
+        </p:txBody>
+      </p:sp>
+      <p:sp>
+        <p:nvSpPr>
+          <p:cNvPr id="4" name="TextBox 3"/>
+          <p:cNvSpPr txBox="1"/>
+          <p:nvPr/>
+        </p:nvSpPr>
+        <p:spPr>
+          <a:xfrm>
+            <a:off x="713232" y="713232"/>
+            <a:ext cx="11155680" cy="502920"/>
+          </a:xfrm>
+          <a:prstGeom prst="rect">
+            <a:avLst/>
+          </a:prstGeom>
+          <a:noFill/>
+        </p:spPr>
+        <p:txBody>
+          <a:bodyPr wrap="none">
+            <a:spAutoFit/>
+          </a:bodyPr>
+          <a:lstStyle/>
+          <a:p>
+            <a:r>
+              <a:rPr sz="2600" b="1">
+                <a:solidFill>
+                  <a:srgbClr val="0F172A"/>
+                </a:solidFill>
+                <a:latin typeface="Calibri"/>
+              </a:rPr>
+              <a:t>Patient dashboard</a:t>
+            </a:r>
+          </a:p>
+        </p:txBody>
+      </p:sp>
+      <p:sp>
+        <p:nvSpPr>
+          <p:cNvPr id="5" name="TextBox 4"/>
+          <p:cNvSpPr txBox="1"/>
+          <p:nvPr/>
+        </p:nvSpPr>
+        <p:spPr>
+          <a:xfrm>
+            <a:off x="713232" y="1234440"/>
+            <a:ext cx="11155680" cy="365760"/>
+          </a:xfrm>
+          <a:prstGeom prst="rect">
+            <a:avLst/>
+          </a:prstGeom>
+          <a:noFill/>
+        </p:spPr>
+        <p:txBody>
+          <a:bodyPr wrap="none">
+            <a:spAutoFit/>
+          </a:bodyPr>
+          <a:lstStyle/>
+          <a:p>
+            <a:r>
+              <a:rPr sz="1200">
+                <a:solidFill>
+                  <a:srgbClr val="64748B"/>
+                </a:solidFill>
+                <a:latin typeface="Calibri"/>
+              </a:rPr>
+              <a:t>Patient view of appointments, history, prescriptions, and the AI care assistant.</a:t>
+            </a:r>
+          </a:p>
+        </p:txBody>
+      </p:sp>
+      <p:cxnSp>
+        <p:nvCxnSpPr>
+          <p:cNvPr id="6" name="Connector 5"/>
+          <p:cNvCxnSpPr/>
+          <p:nvPr/>
+        </p:nvCxnSpPr>
+        <p:spPr>
+          <a:xfrm>
+            <a:off x="713232" y="1627632"/>
+            <a:ext cx="10808208" cy="0"/>
+          </a:xfrm>
+          <a:prstGeom prst="line">
+            <a:avLst/>
+          </a:prstGeom>
+          <a:ln w="9525">
+            <a:solidFill>
+              <a:srgbClr val="E2E8F0"/>
+            </a:solidFill>
+          </a:ln>
+        </p:spPr>
+        <p:style>
+          <a:lnRef idx="2">
+            <a:schemeClr val="accent1"/>
+          </a:lnRef>
+          <a:fillRef idx="0">
+            <a:schemeClr val="accent1"/>
+          </a:fillRef>
+          <a:effectRef idx="1">
+            <a:schemeClr val="accent1"/>
+          </a:effectRef>
+          <a:fontRef idx="minor">
+            <a:schemeClr val="tx1"/>
+          </a:fontRef>
+        </p:style>
+      </p:cxnSp>
+      <p:sp>
+        <p:nvSpPr>
+          <p:cNvPr id="7" name="Rounded Rectangle 6"/>
+          <p:cNvSpPr/>
+          <p:nvPr/>
+        </p:nvSpPr>
+        <p:spPr>
+          <a:xfrm>
+            <a:off x="502920" y="1783080"/>
+            <a:ext cx="11155680" cy="4023360"/>
+          </a:xfrm>
+          <a:prstGeom prst="roundRect">
+            <a:avLst/>
+          </a:prstGeom>
+          <a:solidFill>
+            <a:srgbClr val="FFFFFF"/>
+          </a:solidFill>
+          <a:ln w="9525">
+            <a:solidFill>
+              <a:srgbClr val="CBD5E1"/>
+            </a:solidFill>
+          </a:ln>
+          <a:effectLst/>
+        </p:spPr>
+        <p:style>
+          <a:lnRef idx="1">
+            <a:schemeClr val="accent1"/>
+          </a:lnRef>
+          <a:fillRef idx="3">
+            <a:schemeClr val="accent1"/>
+          </a:fillRef>
+          <a:effectRef idx="2">
+            <a:schemeClr val="accent1"/>
+          </a:effectRef>
+          <a:fontRef idx="minor">
+            <a:schemeClr val="lt1"/>
+          </a:fontRef>
+        </p:style>
+        <p:txBody>
+          <a:bodyPr rtlCol="0" anchor="ctr"/>
+          <a:lstStyle/>
+          <a:p>
+            <a:pPr algn="ctr"/>
+          </a:p>
+        </p:txBody>
+      </p:sp>
+      <p:pic>
+        <p:nvPicPr>
+          <p:cNvPr id="8" name="Picture 7" descr="Screenshot 2026-08-20 211915.png"/>
+          <p:cNvPicPr>
+            <a:picLocks noChangeAspect="1"/>
+          </p:cNvPicPr>
+          <p:nvPr/>
+        </p:nvPicPr>
+        <p:blipFill>
+          <a:blip r:embed="rId2"/>
+          <a:stretch>
+            <a:fillRect/>
+          </a:stretch>
+        </p:blipFill>
+        <p:spPr>
+          <a:xfrm>
+            <a:off x="1962856" y="1920240"/>
+            <a:ext cx="8235808" cy="3749040"/>
+          </a:xfrm>
+          <a:prstGeom prst="rect">
+            <a:avLst/>
+          </a:prstGeom>
+        </p:spPr>
+      </p:pic>
+      <p:sp>
+        <p:nvSpPr>
+          <p:cNvPr id="9" name="Rounded Rectangle 8"/>
+          <p:cNvSpPr/>
+          <p:nvPr/>
+        </p:nvSpPr>
+        <p:spPr>
+          <a:xfrm>
+            <a:off x="502920" y="5897880"/>
+            <a:ext cx="11155680" cy="594360"/>
+          </a:xfrm>
+          <a:prstGeom prst="roundRect">
+            <a:avLst/>
+          </a:prstGeom>
+          <a:solidFill>
+            <a:srgbClr val="F1F5F9"/>
+          </a:solidFill>
+          <a:ln w="9525">
+            <a:solidFill>
+              <a:srgbClr val="CBD5E1"/>
+            </a:solidFill>
+          </a:ln>
+          <a:effectLst/>
+        </p:spPr>
+        <p:style>
+          <a:lnRef idx="1">
+            <a:schemeClr val="accent1"/>
+          </a:lnRef>
+          <a:fillRef idx="3">
+            <a:schemeClr val="accent1"/>
+          </a:fillRef>
+          <a:effectRef idx="2">
+            <a:schemeClr val="accent1"/>
+          </a:effectRef>
+          <a:fontRef idx="minor">
+            <a:schemeClr val="lt1"/>
+          </a:fontRef>
+        </p:style>
+        <p:txBody>
+          <a:bodyPr rtlCol="0" anchor="ctr"/>
+          <a:lstStyle/>
+          <a:p>
+            <a:pPr algn="ctr"/>
+          </a:p>
+        </p:txBody>
+      </p:sp>
+      <p:sp>
+        <p:nvSpPr>
+          <p:cNvPr id="10" name="TextBox 9"/>
+          <p:cNvSpPr txBox="1"/>
+          <p:nvPr/>
+        </p:nvSpPr>
+        <p:spPr>
+          <a:xfrm>
+            <a:off x="685800" y="5943600"/>
+            <a:ext cx="10789920" cy="502920"/>
+          </a:xfrm>
+          <a:prstGeom prst="rect">
+            <a:avLst/>
+          </a:prstGeom>
+          <a:noFill/>
+        </p:spPr>
+        <p:txBody>
+          <a:bodyPr wrap="square">
+            <a:spAutoFit/>
+          </a:bodyPr>
+          <a:lstStyle/>
+          <a:p>
+            <a:r>
+              <a:rPr sz="1100" b="0">
+                <a:solidFill>
+                  <a:srgbClr val="334E68"/>
+                </a:solidFill>
+                <a:latin typeface="Calibri"/>
+              </a:rPr>
+              <a:t>Patient view of appointments, history, prescriptions, and the AI care assistant.</a:t>
+            </a:r>
+          </a:p>
+        </p:txBody>
+      </p:sp>
+    </p:spTree>
+  </p:cSld>
+  <p:clrMapOvr>
+    <a:masterClrMapping/>
+  </p:clrMapOvr>
+</p:sld>
+</file>
+
+<file path=ppt/slides/slide24.xml><?xml version="1.0" encoding="utf-8"?>
+<p:sld xmlns:a="http://schemas.openxmlformats.org/drawingml/2006/main" xmlns:p="http://schemas.openxmlformats.org/presentationml/2006/main" xmlns:r="http://schemas.openxmlformats.org/officeDocument/2006/relationships">
+  <p:cSld>
+    <p:spTree>
+      <p:nvGrpSpPr>
+        <p:cNvPr id="1" name=""/>
+        <p:cNvGrpSpPr/>
+        <p:nvPr/>
+      </p:nvGrpSpPr>
+      <p:grpSpPr/>
+      <p:sp>
+        <p:nvSpPr>
+          <p:cNvPr id="2" name="Rectangle 1"/>
+          <p:cNvSpPr/>
+          <p:nvPr/>
+        </p:nvSpPr>
+        <p:spPr>
+          <a:xfrm>
+            <a:off x="502920" y="502920"/>
+            <a:ext cx="109728" cy="502920"/>
+          </a:xfrm>
+          <a:prstGeom prst="rect">
+            <a:avLst/>
+          </a:prstGeom>
+          <a:solidFill>
+            <a:srgbClr val="14B8A6"/>
+          </a:solidFill>
+          <a:ln>
+            <a:noFill/>
+          </a:ln>
+        </p:spPr>
+        <p:style>
+          <a:lnRef idx="1">
+            <a:schemeClr val="accent1"/>
+          </a:lnRef>
+          <a:fillRef idx="3">
+            <a:schemeClr val="accent1"/>
+          </a:fillRef>
+          <a:effectRef idx="2">
+            <a:schemeClr val="accent1"/>
+          </a:effectRef>
+          <a:fontRef idx="minor">
+            <a:schemeClr val="lt1"/>
+          </a:fontRef>
+        </p:style>
+        <p:txBody>
+          <a:bodyPr rtlCol="0" anchor="ctr"/>
+          <a:lstStyle/>
+          <a:p>
+            <a:pPr algn="ctr"/>
+          </a:p>
+        </p:txBody>
+      </p:sp>
+      <p:sp>
+        <p:nvSpPr>
+          <p:cNvPr id="3" name="TextBox 2"/>
+          <p:cNvSpPr txBox="1"/>
+          <p:nvPr/>
+        </p:nvSpPr>
+        <p:spPr>
+          <a:xfrm>
+            <a:off x="713232" y="457200"/>
+            <a:ext cx="10972800" cy="256032"/>
+          </a:xfrm>
+          <a:prstGeom prst="rect">
+            <a:avLst/>
+          </a:prstGeom>
+          <a:noFill/>
+        </p:spPr>
+        <p:txBody>
+          <a:bodyPr wrap="none">
+            <a:spAutoFit/>
+          </a:bodyPr>
+          <a:lstStyle/>
+          <a:p>
+            <a:r>
+              <a:rPr sz="1000" b="1">
+                <a:solidFill>
+                  <a:srgbClr val="14B8A6"/>
+                </a:solidFill>
+                <a:latin typeface="Calibri"/>
+              </a:rPr>
+              <a:t>SCREENSHOT 04</a:t>
+            </a:r>
+          </a:p>
+        </p:txBody>
+      </p:sp>
+      <p:sp>
+        <p:nvSpPr>
+          <p:cNvPr id="4" name="TextBox 3"/>
+          <p:cNvSpPr txBox="1"/>
+          <p:nvPr/>
+        </p:nvSpPr>
+        <p:spPr>
+          <a:xfrm>
+            <a:off x="713232" y="713232"/>
+            <a:ext cx="11155680" cy="502920"/>
+          </a:xfrm>
+          <a:prstGeom prst="rect">
+            <a:avLst/>
+          </a:prstGeom>
+          <a:noFill/>
+        </p:spPr>
+        <p:txBody>
+          <a:bodyPr wrap="none">
+            <a:spAutoFit/>
+          </a:bodyPr>
+          <a:lstStyle/>
+          <a:p>
+            <a:r>
+              <a:rPr sz="2600" b="1">
+                <a:solidFill>
+                  <a:srgbClr val="0F172A"/>
+                </a:solidFill>
+                <a:latin typeface="Calibri"/>
+              </a:rPr>
+              <a:t>Pharmacy &amp; medicine catalogue</a:t>
+            </a:r>
+          </a:p>
+        </p:txBody>
+      </p:sp>
+      <p:sp>
+        <p:nvSpPr>
+          <p:cNvPr id="5" name="TextBox 4"/>
+          <p:cNvSpPr txBox="1"/>
+          <p:nvPr/>
+        </p:nvSpPr>
+        <p:spPr>
+          <a:xfrm>
+            <a:off x="713232" y="1234440"/>
+            <a:ext cx="11155680" cy="365760"/>
+          </a:xfrm>
+          <a:prstGeom prst="rect">
+            <a:avLst/>
+          </a:prstGeom>
+          <a:noFill/>
+        </p:spPr>
+        <p:txBody>
+          <a:bodyPr wrap="none">
+            <a:spAutoFit/>
+          </a:bodyPr>
+          <a:lstStyle/>
+          <a:p>
+            <a:r>
+              <a:rPr sz="1200">
+                <a:solidFill>
+                  <a:srgbClr val="64748B"/>
+                </a:solidFill>
+                <a:latin typeface="Calibri"/>
+              </a:rPr>
+              <a:t>Patient-facing pharmacy with browse, buy and book flows, powered by the digital medicine catalogue.</a:t>
+            </a:r>
+          </a:p>
+        </p:txBody>
+      </p:sp>
+      <p:cxnSp>
+        <p:nvCxnSpPr>
+          <p:cNvPr id="6" name="Connector 5"/>
+          <p:cNvCxnSpPr/>
+          <p:nvPr/>
+        </p:nvCxnSpPr>
+        <p:spPr>
+          <a:xfrm>
+            <a:off x="713232" y="1627632"/>
+            <a:ext cx="10808208" cy="0"/>
+          </a:xfrm>
+          <a:prstGeom prst="line">
+            <a:avLst/>
+          </a:prstGeom>
+          <a:ln w="9525">
+            <a:solidFill>
+              <a:srgbClr val="E2E8F0"/>
+            </a:solidFill>
+          </a:ln>
+        </p:spPr>
+        <p:style>
+          <a:lnRef idx="2">
+            <a:schemeClr val="accent1"/>
+          </a:lnRef>
+          <a:fillRef idx="0">
+            <a:schemeClr val="accent1"/>
+          </a:fillRef>
+          <a:effectRef idx="1">
+            <a:schemeClr val="accent1"/>
+          </a:effectRef>
+          <a:fontRef idx="minor">
+            <a:schemeClr val="tx1"/>
+          </a:fontRef>
+        </p:style>
+      </p:cxnSp>
+      <p:sp>
+        <p:nvSpPr>
+          <p:cNvPr id="7" name="Rounded Rectangle 6"/>
+          <p:cNvSpPr/>
+          <p:nvPr/>
+        </p:nvSpPr>
+        <p:spPr>
+          <a:xfrm>
+            <a:off x="502920" y="1783080"/>
+            <a:ext cx="11155680" cy="4023360"/>
+          </a:xfrm>
+          <a:prstGeom prst="roundRect">
+            <a:avLst/>
+          </a:prstGeom>
+          <a:solidFill>
+            <a:srgbClr val="FFFFFF"/>
+          </a:solidFill>
+          <a:ln w="9525">
+            <a:solidFill>
+              <a:srgbClr val="CBD5E1"/>
+            </a:solidFill>
+          </a:ln>
+          <a:effectLst/>
+        </p:spPr>
+        <p:style>
+          <a:lnRef idx="1">
+            <a:schemeClr val="accent1"/>
+          </a:lnRef>
+          <a:fillRef idx="3">
+            <a:schemeClr val="accent1"/>
+          </a:fillRef>
+          <a:effectRef idx="2">
+            <a:schemeClr val="accent1"/>
+          </a:effectRef>
+          <a:fontRef idx="minor">
+            <a:schemeClr val="lt1"/>
+          </a:fontRef>
+        </p:style>
+        <p:txBody>
+          <a:bodyPr rtlCol="0" anchor="ctr"/>
+          <a:lstStyle/>
+          <a:p>
+            <a:pPr algn="ctr"/>
+          </a:p>
+        </p:txBody>
+      </p:sp>
+      <p:pic>
+        <p:nvPicPr>
+          <p:cNvPr id="8" name="Picture 7" descr="Screenshot 2026-08-20 231123.png"/>
+          <p:cNvPicPr>
+            <a:picLocks noChangeAspect="1"/>
+          </p:cNvPicPr>
+          <p:nvPr/>
+        </p:nvPicPr>
+        <p:blipFill>
+          <a:blip r:embed="rId2"/>
+          <a:stretch>
+            <a:fillRect/>
+          </a:stretch>
+        </p:blipFill>
+        <p:spPr>
+          <a:xfrm>
+            <a:off x="1969327" y="1920240"/>
+            <a:ext cx="8222866" cy="3749040"/>
+          </a:xfrm>
+          <a:prstGeom prst="rect">
+            <a:avLst/>
+          </a:prstGeom>
+        </p:spPr>
+      </p:pic>
+      <p:sp>
+        <p:nvSpPr>
+          <p:cNvPr id="9" name="Rounded Rectangle 8"/>
+          <p:cNvSpPr/>
+          <p:nvPr/>
+        </p:nvSpPr>
+        <p:spPr>
+          <a:xfrm>
+            <a:off x="502920" y="5897880"/>
+            <a:ext cx="11155680" cy="594360"/>
+          </a:xfrm>
+          <a:prstGeom prst="roundRect">
+            <a:avLst/>
+          </a:prstGeom>
+          <a:solidFill>
+            <a:srgbClr val="F1F5F9"/>
+          </a:solidFill>
+          <a:ln w="9525">
+            <a:solidFill>
+              <a:srgbClr val="CBD5E1"/>
+            </a:solidFill>
+          </a:ln>
+          <a:effectLst/>
+        </p:spPr>
+        <p:style>
+          <a:lnRef idx="1">
+            <a:schemeClr val="accent1"/>
+          </a:lnRef>
+          <a:fillRef idx="3">
+            <a:schemeClr val="accent1"/>
+          </a:fillRef>
+          <a:effectRef idx="2">
+            <a:schemeClr val="accent1"/>
+          </a:effectRef>
+          <a:fontRef idx="minor">
+            <a:schemeClr val="lt1"/>
+          </a:fontRef>
+        </p:style>
+        <p:txBody>
+          <a:bodyPr rtlCol="0" anchor="ctr"/>
+          <a:lstStyle/>
+          <a:p>
+            <a:pPr algn="ctr"/>
+          </a:p>
+        </p:txBody>
+      </p:sp>
+      <p:sp>
+        <p:nvSpPr>
+          <p:cNvPr id="10" name="TextBox 9"/>
+          <p:cNvSpPr txBox="1"/>
+          <p:nvPr/>
+        </p:nvSpPr>
+        <p:spPr>
+          <a:xfrm>
+            <a:off x="685800" y="5943600"/>
+            <a:ext cx="10789920" cy="502920"/>
+          </a:xfrm>
+          <a:prstGeom prst="rect">
+            <a:avLst/>
+          </a:prstGeom>
+          <a:noFill/>
+        </p:spPr>
+        <p:txBody>
+          <a:bodyPr wrap="square">
+            <a:spAutoFit/>
+          </a:bodyPr>
+          <a:lstStyle/>
+          <a:p>
+            <a:r>
+              <a:rPr sz="1100" b="0">
+                <a:solidFill>
+                  <a:srgbClr val="334E68"/>
+                </a:solidFill>
+                <a:latin typeface="Calibri"/>
+              </a:rPr>
+              <a:t>Patient-facing pharmacy with browse, buy and book flows, powered by the digital medicine catalogue.</a:t>
             </a:r>
           </a:p>
         </p:txBody>
@@ -17489,7 +24105,7 @@
                 </a:solidFill>
                 <a:latin typeface="Calibri"/>
               </a:rPr>
-              <a:t>3 / 14</a:t>
+              <a:t>3 / 24</a:t>
             </a:r>
           </a:p>
         </p:txBody>
@@ -19231,7 +25847,7 @@
                 </a:solidFill>
                 <a:latin typeface="Calibri"/>
               </a:rPr>
-              <a:t>4 / 14</a:t>
+              <a:t>4 / 24</a:t>
             </a:r>
           </a:p>
         </p:txBody>
@@ -20899,7 +27515,7 @@
                 </a:solidFill>
                 <a:latin typeface="Calibri"/>
               </a:rPr>
-              <a:t>5 / 14</a:t>
+              <a:t>5 / 24</a:t>
             </a:r>
           </a:p>
         </p:txBody>
@@ -22411,7 +29027,7 @@
                 </a:solidFill>
                 <a:latin typeface="Calibri"/>
               </a:rPr>
-              <a:t>6 / 14</a:t>
+              <a:t>6 / 24</a:t>
             </a:r>
           </a:p>
         </p:txBody>
@@ -25843,7 +32459,7 @@
                 </a:solidFill>
                 <a:latin typeface="Calibri"/>
               </a:rPr>
-              <a:t>7 / 14</a:t>
+              <a:t>7 / 24</a:t>
             </a:r>
           </a:p>
         </p:txBody>
@@ -30635,7 +37251,7 @@
                 </a:solidFill>
                 <a:latin typeface="Calibri"/>
               </a:rPr>
-              <a:t>8 / 14</a:t>
+              <a:t>8 / 24</a:t>
             </a:r>
           </a:p>
         </p:txBody>
@@ -32857,7 +39473,7 @@
                 </a:solidFill>
                 <a:latin typeface="Calibri"/>
               </a:rPr>
-              <a:t>9 / 14</a:t>
+              <a:t>9 / 24</a:t>
             </a:r>
           </a:p>
         </p:txBody>
